--- a/output/wordlabs-tract-3day.pptx
+++ b/output/wordlabs-tract-3day.pptx
@@ -4240,7 +4240,7 @@
                 <a:ea typeface="Calibri" pitchFamily="34" charset="-122"/>
                 <a:cs typeface="Calibri" pitchFamily="34" charset="-120"/>
               </a:rPr>
-              <a:t>"to pull or drag"</a:t>
+              <a:t>"pull, drag, draw"</a:t>
             </a:r>
             <a:endParaRPr lang="en-US" sz="2200" dirty="0"/>
           </a:p>
@@ -5288,7 +5288,7 @@
                 <a:ea typeface="Calibri" pitchFamily="34" charset="-122"/>
                 <a:cs typeface="Calibri" pitchFamily="34" charset="-120"/>
               </a:rPr>
-              <a:t>Word Labs  •  wordlabs.app  •  Root: 'tract' = to pull or drag</a:t>
+              <a:t>Word Labs  •  wordlabs.app  •  Root: 'tract' = pull, drag, draw</a:t>
             </a:r>
             <a:endParaRPr lang="en-US" sz="800" dirty="0"/>
           </a:p>
@@ -5928,7 +5928,7 @@
                 <a:ea typeface="Calibri" pitchFamily="34" charset="-122"/>
                 <a:cs typeface="Calibri" pitchFamily="34" charset="-120"/>
               </a:rPr>
-              <a:t>Word Labs  •  wordlabs.app  •  Root: 'tract' = to pull or drag</a:t>
+              <a:t>Word Labs  •  wordlabs.app  •  Root: 'tract' = pull, drag, draw</a:t>
             </a:r>
             <a:endParaRPr lang="en-US" sz="800" dirty="0"/>
           </a:p>
@@ -6040,7 +6040,7 @@
                 <a:ea typeface="Calibri" pitchFamily="34" charset="-122"/>
                 <a:cs typeface="Calibri" pitchFamily="34" charset="-120"/>
               </a:rPr>
-              <a:t>Loud sounds can </a:t>
+              <a:t>The strong magnet can </a:t>
             </a:r>
             <a:pPr algn="l" indent="0" marL="0">
               <a:buNone/>
@@ -6057,7 +6057,7 @@
                 <a:ea typeface="Calibri" pitchFamily="34" charset="-122"/>
                 <a:cs typeface="Calibri" pitchFamily="34" charset="-120"/>
               </a:rPr>
-              <a:t>distract</a:t>
+              <a:t>attract</a:t>
             </a:r>
             <a:pPr algn="l" indent="0" marL="0">
               <a:buNone/>
@@ -6071,7 +6071,7 @@
                 <a:ea typeface="Calibri" pitchFamily="34" charset="-122"/>
                 <a:cs typeface="Calibri" pitchFamily="34" charset="-120"/>
               </a:rPr>
-              <a:t> you, so try not to </a:t>
+              <a:t> metal objects, but it will </a:t>
             </a:r>
             <a:pPr algn="l" indent="0" marL="0">
               <a:buNone/>
@@ -6088,7 +6088,7 @@
                 <a:ea typeface="Calibri" pitchFamily="34" charset="-122"/>
                 <a:cs typeface="Calibri" pitchFamily="34" charset="-120"/>
               </a:rPr>
-              <a:t>attract</a:t>
+              <a:t>retract</a:t>
             </a:r>
             <a:pPr algn="l" indent="0" marL="0">
               <a:buNone/>
@@ -6102,7 +6102,7 @@
                 <a:ea typeface="Calibri" pitchFamily="34" charset="-122"/>
                 <a:cs typeface="Calibri" pitchFamily="34" charset="-120"/>
               </a:rPr>
-              <a:t> attention during the test.</a:t>
+              <a:t> into its casing when switched off.</a:t>
             </a:r>
             <a:endParaRPr lang="en-US" sz="1800" dirty="0"/>
           </a:p>
@@ -6257,7 +6257,7 @@
                 <a:ea typeface="Trebuchet MS" pitchFamily="34" charset="-122"/>
                 <a:cs typeface="Trebuchet MS" pitchFamily="34" charset="-120"/>
               </a:rPr>
-              <a:t>distract</a:t>
+              <a:t>attract</a:t>
             </a:r>
             <a:endParaRPr lang="en-US" sz="1400" dirty="0"/>
           </a:p>
@@ -6385,7 +6385,7 @@
                 <a:ea typeface="Trebuchet MS" pitchFamily="34" charset="-122"/>
                 <a:cs typeface="Trebuchet MS" pitchFamily="34" charset="-120"/>
               </a:rPr>
-              <a:t>attract</a:t>
+              <a:t>retract</a:t>
             </a:r>
             <a:endParaRPr lang="en-US" sz="1400" dirty="0"/>
           </a:p>
@@ -6716,7 +6716,7 @@
                 <a:ea typeface="Calibri" pitchFamily="34" charset="-122"/>
                 <a:cs typeface="Calibri" pitchFamily="34" charset="-120"/>
               </a:rPr>
-              <a:t>Word Labs  •  wordlabs.app  •  Root: 'tract' = to pull or drag</a:t>
+              <a:t>Word Labs  •  wordlabs.app  •  Root: 'tract' = pull, drag, draw</a:t>
             </a:r>
             <a:endParaRPr lang="en-US" sz="800" dirty="0"/>
           </a:p>
@@ -6855,7 +6855,7 @@
                 <a:ea typeface="Trebuchet MS" pitchFamily="34" charset="-122"/>
                 <a:cs typeface="Trebuchet MS" pitchFamily="34" charset="-120"/>
               </a:rPr>
-              <a:t>distract</a:t>
+              <a:t>attract</a:t>
             </a:r>
             <a:endParaRPr lang="en-US" sz="2800" dirty="0"/>
           </a:p>
@@ -7543,7 +7543,7 @@
                 <a:ea typeface="Calibri" pitchFamily="34" charset="-122"/>
                 <a:cs typeface="Calibri" pitchFamily="34" charset="-120"/>
               </a:rPr>
-              <a:t>Word Labs  •  wordlabs.app  •  Root: 'tract' = to pull or drag</a:t>
+              <a:t>Word Labs  •  wordlabs.app  •  Root: 'tract' = pull, drag, draw</a:t>
             </a:r>
             <a:endParaRPr lang="en-US" sz="800" dirty="0"/>
           </a:p>
@@ -7682,7 +7682,7 @@
                 <a:ea typeface="Trebuchet MS" pitchFamily="34" charset="-122"/>
                 <a:cs typeface="Trebuchet MS" pitchFamily="34" charset="-120"/>
               </a:rPr>
-              <a:t>distract</a:t>
+              <a:t>attract</a:t>
             </a:r>
             <a:endParaRPr lang="en-US" sz="2800" dirty="0"/>
           </a:p>
@@ -7821,7 +7821,7 @@
                 <a:ea typeface="Trebuchet MS" pitchFamily="34" charset="-122"/>
                 <a:cs typeface="Trebuchet MS" pitchFamily="34" charset="-120"/>
               </a:rPr>
-              <a:t>dis</a:t>
+              <a:t>at</a:t>
             </a:r>
             <a:endParaRPr lang="en-US" sz="1300" dirty="0"/>
           </a:p>
@@ -7860,7 +7860,7 @@
                 <a:ea typeface="Calibri" pitchFamily="34" charset="-122"/>
                 <a:cs typeface="Calibri" pitchFamily="34" charset="-120"/>
               </a:rPr>
-              <a:t>away, apart</a:t>
+              <a:t>to, towards</a:t>
             </a:r>
             <a:endParaRPr lang="en-US" sz="850" dirty="0"/>
           </a:p>
@@ -7868,7 +7868,46 @@
       </p:sp>
       <p:sp>
         <p:nvSpPr>
-          <p:cNvPr id="19" name="Shape 17"/>
+          <p:cNvPr id="19" name="Text 17"/>
+          <p:cNvSpPr/>
+          <p:nvPr/>
+        </p:nvSpPr>
+        <p:spPr>
+          <a:xfrm>
+            <a:off x="2938272" y="2752344"/>
+            <a:ext cx="1828800" cy="182880"/>
+          </a:xfrm>
+          <a:prstGeom prst="rect">
+            <a:avLst/>
+          </a:prstGeom>
+          <a:noFill/>
+          <a:ln/>
+        </p:spPr>
+        <p:txBody>
+          <a:bodyPr wrap="square" lIns="0" tIns="0" rIns="0" bIns="0" rtlCol="0" anchor="t"/>
+          <a:lstStyle/>
+          <a:p>
+            <a:pPr algn="ctr" indent="0" marL="0">
+              <a:buNone/>
+            </a:pPr>
+            <a:r>
+              <a:rPr lang="en-US" sz="700" i="1" dirty="0">
+                <a:solidFill>
+                  <a:srgbClr val="94A3B8"/>
+                </a:solidFill>
+                <a:latin typeface="Calibri" pitchFamily="34" charset="0"/>
+                <a:ea typeface="Calibri" pitchFamily="34" charset="-122"/>
+                <a:cs typeface="Calibri" pitchFamily="34" charset="-120"/>
+              </a:rPr>
+              <a:t>ad → at before 't'</a:t>
+            </a:r>
+            <a:endParaRPr lang="en-US" sz="700" dirty="0"/>
+          </a:p>
+        </p:txBody>
+      </p:sp>
+      <p:sp>
+        <p:nvSpPr>
+          <p:cNvPr id="20" name="Shape 18"/>
           <p:cNvSpPr/>
           <p:nvPr/>
         </p:nvSpPr>
@@ -7902,7 +7941,7 @@
       </p:sp>
       <p:sp>
         <p:nvSpPr>
-          <p:cNvPr id="20" name="Text 18"/>
+          <p:cNvPr id="21" name="Text 19"/>
           <p:cNvSpPr/>
           <p:nvPr/>
         </p:nvSpPr>
@@ -7941,7 +7980,7 @@
       </p:sp>
       <p:sp>
         <p:nvSpPr>
-          <p:cNvPr id="21" name="Text 19"/>
+          <p:cNvPr id="22" name="Text 20"/>
           <p:cNvSpPr/>
           <p:nvPr/>
         </p:nvSpPr>
@@ -7972,7 +8011,7 @@
                 <a:ea typeface="Calibri" pitchFamily="34" charset="-122"/>
                 <a:cs typeface="Calibri" pitchFamily="34" charset="-120"/>
               </a:rPr>
-              <a:t>to pull or drag</a:t>
+              <a:t>pull, draw</a:t>
             </a:r>
             <a:endParaRPr lang="en-US" sz="850" dirty="0"/>
           </a:p>
@@ -7980,7 +8019,7 @@
       </p:sp>
       <p:sp>
         <p:nvSpPr>
-          <p:cNvPr id="22" name="Shape 20"/>
+          <p:cNvPr id="23" name="Shape 21"/>
           <p:cNvSpPr/>
           <p:nvPr/>
         </p:nvSpPr>
@@ -8007,7 +8046,7 @@
       </p:sp>
       <p:sp>
         <p:nvSpPr>
-          <p:cNvPr id="23" name="Text 21"/>
+          <p:cNvPr id="24" name="Text 22"/>
           <p:cNvSpPr/>
           <p:nvPr/>
         </p:nvSpPr>
@@ -8046,7 +8085,7 @@
       </p:sp>
       <p:sp>
         <p:nvSpPr>
-          <p:cNvPr id="24" name="Shape 22"/>
+          <p:cNvPr id="25" name="Shape 23"/>
           <p:cNvSpPr/>
           <p:nvPr/>
         </p:nvSpPr>
@@ -8073,7 +8112,7 @@
       </p:sp>
       <p:sp>
         <p:nvSpPr>
-          <p:cNvPr id="25" name="Text 23"/>
+          <p:cNvPr id="26" name="Text 24"/>
           <p:cNvSpPr/>
           <p:nvPr/>
         </p:nvSpPr>
@@ -8112,7 +8151,7 @@
       </p:sp>
       <p:sp>
         <p:nvSpPr>
-          <p:cNvPr id="26" name="Shape 24"/>
+          <p:cNvPr id="27" name="Shape 25"/>
           <p:cNvSpPr/>
           <p:nvPr/>
         </p:nvSpPr>
@@ -8139,7 +8178,7 @@
       </p:sp>
       <p:sp>
         <p:nvSpPr>
-          <p:cNvPr id="27" name="Text 25"/>
+          <p:cNvPr id="28" name="Text 26"/>
           <p:cNvSpPr/>
           <p:nvPr/>
         </p:nvSpPr>
@@ -8178,7 +8217,7 @@
       </p:sp>
       <p:sp>
         <p:nvSpPr>
-          <p:cNvPr id="28" name="Shape 26"/>
+          <p:cNvPr id="29" name="Shape 27"/>
           <p:cNvSpPr/>
           <p:nvPr/>
         </p:nvSpPr>
@@ -8205,7 +8244,7 @@
       </p:sp>
       <p:sp>
         <p:nvSpPr>
-          <p:cNvPr id="29" name="Text 27"/>
+          <p:cNvPr id="30" name="Text 28"/>
           <p:cNvSpPr/>
           <p:nvPr/>
         </p:nvSpPr>
@@ -8528,7 +8567,7 @@
                 <a:ea typeface="Calibri" pitchFamily="34" charset="-122"/>
                 <a:cs typeface="Calibri" pitchFamily="34" charset="-120"/>
               </a:rPr>
-              <a:t>Word Labs  •  wordlabs.app  •  Root: 'tract' = to pull or drag</a:t>
+              <a:t>Word Labs  •  wordlabs.app  •  Root: 'tract' = pull, drag, draw</a:t>
             </a:r>
             <a:endParaRPr lang="en-US" sz="800" dirty="0"/>
           </a:p>
@@ -8667,7 +8706,7 @@
                 <a:ea typeface="Trebuchet MS" pitchFamily="34" charset="-122"/>
                 <a:cs typeface="Trebuchet MS" pitchFamily="34" charset="-120"/>
               </a:rPr>
-              <a:t>distract</a:t>
+              <a:t>attract</a:t>
             </a:r>
             <a:endParaRPr lang="en-US" sz="2800" dirty="0"/>
           </a:p>
@@ -8806,7 +8845,7 @@
                 <a:ea typeface="Trebuchet MS" pitchFamily="34" charset="-122"/>
                 <a:cs typeface="Trebuchet MS" pitchFamily="34" charset="-120"/>
               </a:rPr>
-              <a:t>dis</a:t>
+              <a:t>at</a:t>
             </a:r>
             <a:endParaRPr lang="en-US" sz="1300" dirty="0"/>
           </a:p>
@@ -8845,7 +8884,7 @@
                 <a:ea typeface="Calibri" pitchFamily="34" charset="-122"/>
                 <a:cs typeface="Calibri" pitchFamily="34" charset="-120"/>
               </a:rPr>
-              <a:t>away, apart</a:t>
+              <a:t>to, towards</a:t>
             </a:r>
             <a:endParaRPr lang="en-US" sz="850" dirty="0"/>
           </a:p>
@@ -8853,7 +8892,46 @@
       </p:sp>
       <p:sp>
         <p:nvSpPr>
-          <p:cNvPr id="19" name="Shape 17"/>
+          <p:cNvPr id="19" name="Text 17"/>
+          <p:cNvSpPr/>
+          <p:nvPr/>
+        </p:nvSpPr>
+        <p:spPr>
+          <a:xfrm>
+            <a:off x="2938272" y="2752344"/>
+            <a:ext cx="1828800" cy="182880"/>
+          </a:xfrm>
+          <a:prstGeom prst="rect">
+            <a:avLst/>
+          </a:prstGeom>
+          <a:noFill/>
+          <a:ln/>
+        </p:spPr>
+        <p:txBody>
+          <a:bodyPr wrap="square" lIns="0" tIns="0" rIns="0" bIns="0" rtlCol="0" anchor="t"/>
+          <a:lstStyle/>
+          <a:p>
+            <a:pPr algn="ctr" indent="0" marL="0">
+              <a:buNone/>
+            </a:pPr>
+            <a:r>
+              <a:rPr lang="en-US" sz="700" i="1" dirty="0">
+                <a:solidFill>
+                  <a:srgbClr val="94A3B8"/>
+                </a:solidFill>
+                <a:latin typeface="Calibri" pitchFamily="34" charset="0"/>
+                <a:ea typeface="Calibri" pitchFamily="34" charset="-122"/>
+                <a:cs typeface="Calibri" pitchFamily="34" charset="-120"/>
+              </a:rPr>
+              <a:t>ad → at before 't'</a:t>
+            </a:r>
+            <a:endParaRPr lang="en-US" sz="700" dirty="0"/>
+          </a:p>
+        </p:txBody>
+      </p:sp>
+      <p:sp>
+        <p:nvSpPr>
+          <p:cNvPr id="20" name="Shape 18"/>
           <p:cNvSpPr/>
           <p:nvPr/>
         </p:nvSpPr>
@@ -8887,7 +8965,7 @@
       </p:sp>
       <p:sp>
         <p:nvSpPr>
-          <p:cNvPr id="20" name="Text 18"/>
+          <p:cNvPr id="21" name="Text 19"/>
           <p:cNvSpPr/>
           <p:nvPr/>
         </p:nvSpPr>
@@ -8926,7 +9004,7 @@
       </p:sp>
       <p:sp>
         <p:nvSpPr>
-          <p:cNvPr id="21" name="Text 19"/>
+          <p:cNvPr id="22" name="Text 20"/>
           <p:cNvSpPr/>
           <p:nvPr/>
         </p:nvSpPr>
@@ -8957,7 +9035,7 @@
                 <a:ea typeface="Calibri" pitchFamily="34" charset="-122"/>
                 <a:cs typeface="Calibri" pitchFamily="34" charset="-120"/>
               </a:rPr>
-              <a:t>to pull or drag</a:t>
+              <a:t>pull, draw</a:t>
             </a:r>
             <a:endParaRPr lang="en-US" sz="850" dirty="0"/>
           </a:p>
@@ -8965,7 +9043,7 @@
       </p:sp>
       <p:sp>
         <p:nvSpPr>
-          <p:cNvPr id="22" name="Shape 20"/>
+          <p:cNvPr id="23" name="Shape 21"/>
           <p:cNvSpPr/>
           <p:nvPr/>
         </p:nvSpPr>
@@ -8992,7 +9070,7 @@
       </p:sp>
       <p:sp>
         <p:nvSpPr>
-          <p:cNvPr id="23" name="Text 21"/>
+          <p:cNvPr id="24" name="Text 22"/>
           <p:cNvSpPr/>
           <p:nvPr/>
         </p:nvSpPr>
@@ -9031,7 +9109,7 @@
       </p:sp>
       <p:sp>
         <p:nvSpPr>
-          <p:cNvPr id="24" name="Shape 22"/>
+          <p:cNvPr id="25" name="Shape 23"/>
           <p:cNvSpPr/>
           <p:nvPr/>
         </p:nvSpPr>
@@ -9058,7 +9136,7 @@
       </p:sp>
       <p:sp>
         <p:nvSpPr>
-          <p:cNvPr id="25" name="Shape 23"/>
+          <p:cNvPr id="26" name="Shape 24"/>
           <p:cNvSpPr/>
           <p:nvPr/>
         </p:nvSpPr>
@@ -9085,7 +9163,7 @@
       </p:sp>
       <p:sp>
         <p:nvSpPr>
-          <p:cNvPr id="26" name="Text 24"/>
+          <p:cNvPr id="27" name="Text 25"/>
           <p:cNvSpPr/>
           <p:nvPr/>
         </p:nvSpPr>
@@ -9116,7 +9194,7 @@
                 <a:ea typeface="Trebuchet MS" pitchFamily="34" charset="-122"/>
                 <a:cs typeface="Trebuchet MS" pitchFamily="34" charset="-120"/>
               </a:rPr>
-              <a:t>dis</a:t>
+              <a:t>at</a:t>
             </a:r>
             <a:endParaRPr lang="en-US" sz="1400" dirty="0"/>
           </a:p>
@@ -9124,7 +9202,7 @@
       </p:sp>
       <p:sp>
         <p:nvSpPr>
-          <p:cNvPr id="27" name="Text 25"/>
+          <p:cNvPr id="28" name="Text 26"/>
           <p:cNvSpPr/>
           <p:nvPr/>
         </p:nvSpPr>
@@ -9163,7 +9241,7 @@
       </p:sp>
       <p:sp>
         <p:nvSpPr>
-          <p:cNvPr id="28" name="Shape 26"/>
+          <p:cNvPr id="29" name="Shape 27"/>
           <p:cNvSpPr/>
           <p:nvPr/>
         </p:nvSpPr>
@@ -9190,7 +9268,7 @@
       </p:sp>
       <p:sp>
         <p:nvSpPr>
-          <p:cNvPr id="29" name="Text 27"/>
+          <p:cNvPr id="30" name="Text 28"/>
           <p:cNvSpPr/>
           <p:nvPr/>
         </p:nvSpPr>
@@ -9229,7 +9307,7 @@
       </p:sp>
       <p:sp>
         <p:nvSpPr>
-          <p:cNvPr id="30" name="Shape 28"/>
+          <p:cNvPr id="31" name="Shape 29"/>
           <p:cNvSpPr/>
           <p:nvPr/>
         </p:nvSpPr>
@@ -9256,7 +9334,7 @@
       </p:sp>
       <p:sp>
         <p:nvSpPr>
-          <p:cNvPr id="31" name="Text 29"/>
+          <p:cNvPr id="32" name="Text 30"/>
           <p:cNvSpPr/>
           <p:nvPr/>
         </p:nvSpPr>
@@ -9295,7 +9373,7 @@
       </p:sp>
       <p:sp>
         <p:nvSpPr>
-          <p:cNvPr id="32" name="Shape 30"/>
+          <p:cNvPr id="33" name="Shape 31"/>
           <p:cNvSpPr/>
           <p:nvPr/>
         </p:nvSpPr>
@@ -9322,7 +9400,7 @@
       </p:sp>
       <p:sp>
         <p:nvSpPr>
-          <p:cNvPr id="33" name="Text 31"/>
+          <p:cNvPr id="34" name="Text 32"/>
           <p:cNvSpPr/>
           <p:nvPr/>
         </p:nvSpPr>
@@ -9645,7 +9723,7 @@
                 <a:ea typeface="Calibri" pitchFamily="34" charset="-122"/>
                 <a:cs typeface="Calibri" pitchFamily="34" charset="-120"/>
               </a:rPr>
-              <a:t>Word Labs  •  wordlabs.app  •  Root: 'tract' = to pull or drag</a:t>
+              <a:t>Word Labs  •  wordlabs.app  •  Root: 'tract' = pull, drag, draw</a:t>
             </a:r>
             <a:endParaRPr lang="en-US" sz="800" dirty="0"/>
           </a:p>
@@ -9784,7 +9862,7 @@
                 <a:ea typeface="Trebuchet MS" pitchFamily="34" charset="-122"/>
                 <a:cs typeface="Trebuchet MS" pitchFamily="34" charset="-120"/>
               </a:rPr>
-              <a:t>distract</a:t>
+              <a:t>attract</a:t>
             </a:r>
             <a:endParaRPr lang="en-US" sz="2800" dirty="0"/>
           </a:p>
@@ -9923,7 +10001,7 @@
                 <a:ea typeface="Trebuchet MS" pitchFamily="34" charset="-122"/>
                 <a:cs typeface="Trebuchet MS" pitchFamily="34" charset="-120"/>
               </a:rPr>
-              <a:t>dis</a:t>
+              <a:t>at</a:t>
             </a:r>
             <a:endParaRPr lang="en-US" sz="1300" dirty="0"/>
           </a:p>
@@ -9962,7 +10040,7 @@
                 <a:ea typeface="Calibri" pitchFamily="34" charset="-122"/>
                 <a:cs typeface="Calibri" pitchFamily="34" charset="-120"/>
               </a:rPr>
-              <a:t>away, apart</a:t>
+              <a:t>to, towards</a:t>
             </a:r>
             <a:endParaRPr lang="en-US" sz="850" dirty="0"/>
           </a:p>
@@ -9970,7 +10048,46 @@
       </p:sp>
       <p:sp>
         <p:nvSpPr>
-          <p:cNvPr id="19" name="Shape 17"/>
+          <p:cNvPr id="19" name="Text 17"/>
+          <p:cNvSpPr/>
+          <p:nvPr/>
+        </p:nvSpPr>
+        <p:spPr>
+          <a:xfrm>
+            <a:off x="2938272" y="2752344"/>
+            <a:ext cx="1828800" cy="182880"/>
+          </a:xfrm>
+          <a:prstGeom prst="rect">
+            <a:avLst/>
+          </a:prstGeom>
+          <a:noFill/>
+          <a:ln/>
+        </p:spPr>
+        <p:txBody>
+          <a:bodyPr wrap="square" lIns="0" tIns="0" rIns="0" bIns="0" rtlCol="0" anchor="t"/>
+          <a:lstStyle/>
+          <a:p>
+            <a:pPr algn="ctr" indent="0" marL="0">
+              <a:buNone/>
+            </a:pPr>
+            <a:r>
+              <a:rPr lang="en-US" sz="700" i="1" dirty="0">
+                <a:solidFill>
+                  <a:srgbClr val="94A3B8"/>
+                </a:solidFill>
+                <a:latin typeface="Calibri" pitchFamily="34" charset="0"/>
+                <a:ea typeface="Calibri" pitchFamily="34" charset="-122"/>
+                <a:cs typeface="Calibri" pitchFamily="34" charset="-120"/>
+              </a:rPr>
+              <a:t>ad → at before 't'</a:t>
+            </a:r>
+            <a:endParaRPr lang="en-US" sz="700" dirty="0"/>
+          </a:p>
+        </p:txBody>
+      </p:sp>
+      <p:sp>
+        <p:nvSpPr>
+          <p:cNvPr id="20" name="Shape 18"/>
           <p:cNvSpPr/>
           <p:nvPr/>
         </p:nvSpPr>
@@ -10004,7 +10121,7 @@
       </p:sp>
       <p:sp>
         <p:nvSpPr>
-          <p:cNvPr id="20" name="Text 18"/>
+          <p:cNvPr id="21" name="Text 19"/>
           <p:cNvSpPr/>
           <p:nvPr/>
         </p:nvSpPr>
@@ -10043,7 +10160,7 @@
       </p:sp>
       <p:sp>
         <p:nvSpPr>
-          <p:cNvPr id="21" name="Text 19"/>
+          <p:cNvPr id="22" name="Text 20"/>
           <p:cNvSpPr/>
           <p:nvPr/>
         </p:nvSpPr>
@@ -10074,7 +10191,7 @@
                 <a:ea typeface="Calibri" pitchFamily="34" charset="-122"/>
                 <a:cs typeface="Calibri" pitchFamily="34" charset="-120"/>
               </a:rPr>
-              <a:t>to pull or drag</a:t>
+              <a:t>pull, draw</a:t>
             </a:r>
             <a:endParaRPr lang="en-US" sz="850" dirty="0"/>
           </a:p>
@@ -10082,7 +10199,7 @@
       </p:sp>
       <p:sp>
         <p:nvSpPr>
-          <p:cNvPr id="22" name="Shape 20"/>
+          <p:cNvPr id="23" name="Shape 21"/>
           <p:cNvSpPr/>
           <p:nvPr/>
         </p:nvSpPr>
@@ -10109,7 +10226,7 @@
       </p:sp>
       <p:sp>
         <p:nvSpPr>
-          <p:cNvPr id="23" name="Text 21"/>
+          <p:cNvPr id="24" name="Text 22"/>
           <p:cNvSpPr/>
           <p:nvPr/>
         </p:nvSpPr>
@@ -10148,7 +10265,7 @@
       </p:sp>
       <p:sp>
         <p:nvSpPr>
-          <p:cNvPr id="24" name="Shape 22"/>
+          <p:cNvPr id="25" name="Shape 23"/>
           <p:cNvSpPr/>
           <p:nvPr/>
         </p:nvSpPr>
@@ -10175,7 +10292,7 @@
       </p:sp>
       <p:sp>
         <p:nvSpPr>
-          <p:cNvPr id="25" name="Shape 23"/>
+          <p:cNvPr id="26" name="Shape 24"/>
           <p:cNvSpPr/>
           <p:nvPr/>
         </p:nvSpPr>
@@ -10202,7 +10319,7 @@
       </p:sp>
       <p:sp>
         <p:nvSpPr>
-          <p:cNvPr id="26" name="Text 24"/>
+          <p:cNvPr id="27" name="Text 25"/>
           <p:cNvSpPr/>
           <p:nvPr/>
         </p:nvSpPr>
@@ -10233,7 +10350,7 @@
                 <a:ea typeface="Trebuchet MS" pitchFamily="34" charset="-122"/>
                 <a:cs typeface="Trebuchet MS" pitchFamily="34" charset="-120"/>
               </a:rPr>
-              <a:t>dis</a:t>
+              <a:t>at</a:t>
             </a:r>
             <a:endParaRPr lang="en-US" sz="1400" dirty="0"/>
           </a:p>
@@ -10241,7 +10358,7 @@
       </p:sp>
       <p:sp>
         <p:nvSpPr>
-          <p:cNvPr id="27" name="Text 25"/>
+          <p:cNvPr id="28" name="Text 26"/>
           <p:cNvSpPr/>
           <p:nvPr/>
         </p:nvSpPr>
@@ -10280,7 +10397,7 @@
       </p:sp>
       <p:sp>
         <p:nvSpPr>
-          <p:cNvPr id="28" name="Shape 26"/>
+          <p:cNvPr id="29" name="Shape 27"/>
           <p:cNvSpPr/>
           <p:nvPr/>
         </p:nvSpPr>
@@ -10307,7 +10424,7 @@
       </p:sp>
       <p:sp>
         <p:nvSpPr>
-          <p:cNvPr id="29" name="Text 27"/>
+          <p:cNvPr id="30" name="Text 28"/>
           <p:cNvSpPr/>
           <p:nvPr/>
         </p:nvSpPr>
@@ -10346,7 +10463,7 @@
       </p:sp>
       <p:sp>
         <p:nvSpPr>
-          <p:cNvPr id="30" name="Shape 28"/>
+          <p:cNvPr id="31" name="Shape 29"/>
           <p:cNvSpPr/>
           <p:nvPr/>
         </p:nvSpPr>
@@ -10373,7 +10490,7 @@
       </p:sp>
       <p:sp>
         <p:nvSpPr>
-          <p:cNvPr id="31" name="Text 29"/>
+          <p:cNvPr id="32" name="Text 30"/>
           <p:cNvSpPr/>
           <p:nvPr/>
         </p:nvSpPr>
@@ -10412,7 +10529,7 @@
       </p:sp>
       <p:sp>
         <p:nvSpPr>
-          <p:cNvPr id="32" name="Shape 30"/>
+          <p:cNvPr id="33" name="Shape 31"/>
           <p:cNvSpPr/>
           <p:nvPr/>
         </p:nvSpPr>
@@ -10439,13 +10556,13 @@
       </p:sp>
       <p:sp>
         <p:nvSpPr>
-          <p:cNvPr id="33" name="Shape 31"/>
-          <p:cNvSpPr/>
-          <p:nvPr/>
-        </p:nvSpPr>
-        <p:spPr>
-          <a:xfrm>
-            <a:off x="2023872" y="4169664"/>
+          <p:cNvPr id="34" name="Shape 32"/>
+          <p:cNvSpPr/>
+          <p:nvPr/>
+        </p:nvSpPr>
+        <p:spPr>
+          <a:xfrm>
+            <a:off x="2254649" y="4169664"/>
             <a:ext cx="685800" cy="384048"/>
           </a:xfrm>
           <a:prstGeom prst="rect">
@@ -10466,13 +10583,13 @@
       </p:sp>
       <p:sp>
         <p:nvSpPr>
-          <p:cNvPr id="34" name="Text 32"/>
-          <p:cNvSpPr/>
-          <p:nvPr/>
-        </p:nvSpPr>
-        <p:spPr>
-          <a:xfrm>
-            <a:off x="2023872" y="4169664"/>
+          <p:cNvPr id="35" name="Text 33"/>
+          <p:cNvSpPr/>
+          <p:nvPr/>
+        </p:nvSpPr>
+        <p:spPr>
+          <a:xfrm>
+            <a:off x="2254649" y="4169664"/>
             <a:ext cx="685800" cy="384048"/>
           </a:xfrm>
           <a:prstGeom prst="rect">
@@ -10497,7 +10614,7 @@
                 <a:ea typeface="Trebuchet MS" pitchFamily="34" charset="-122"/>
                 <a:cs typeface="Trebuchet MS" pitchFamily="34" charset="-120"/>
               </a:rPr>
-              <a:t>d</a:t>
+              <a:t>a</a:t>
             </a:r>
             <a:endParaRPr lang="en-US" sz="900" dirty="0"/>
           </a:p>
@@ -10505,13 +10622,13 @@
       </p:sp>
       <p:sp>
         <p:nvSpPr>
-          <p:cNvPr id="35" name="Shape 33"/>
-          <p:cNvSpPr/>
-          <p:nvPr/>
-        </p:nvSpPr>
-        <p:spPr>
-          <a:xfrm>
-            <a:off x="2831592" y="4169664"/>
+          <p:cNvPr id="36" name="Shape 34"/>
+          <p:cNvSpPr/>
+          <p:nvPr/>
+        </p:nvSpPr>
+        <p:spPr>
+          <a:xfrm>
+            <a:off x="3293146" y="4169664"/>
             <a:ext cx="685800" cy="384048"/>
           </a:xfrm>
           <a:prstGeom prst="rect">
@@ -10532,13 +10649,13 @@
       </p:sp>
       <p:sp>
         <p:nvSpPr>
-          <p:cNvPr id="36" name="Text 34"/>
-          <p:cNvSpPr/>
-          <p:nvPr/>
-        </p:nvSpPr>
-        <p:spPr>
-          <a:xfrm>
-            <a:off x="2831592" y="4169664"/>
+          <p:cNvPr id="37" name="Text 35"/>
+          <p:cNvSpPr/>
+          <p:nvPr/>
+        </p:nvSpPr>
+        <p:spPr>
+          <a:xfrm>
+            <a:off x="3293146" y="4169664"/>
             <a:ext cx="685800" cy="384048"/>
           </a:xfrm>
           <a:prstGeom prst="rect">
@@ -10563,7 +10680,7 @@
                 <a:ea typeface="Trebuchet MS" pitchFamily="34" charset="-122"/>
                 <a:cs typeface="Trebuchet MS" pitchFamily="34" charset="-120"/>
               </a:rPr>
-              <a:t>i</a:t>
+              <a:t>t</a:t>
             </a:r>
             <a:endParaRPr lang="en-US" sz="900" dirty="0"/>
           </a:p>
@@ -10571,13 +10688,13 @@
       </p:sp>
       <p:sp>
         <p:nvSpPr>
-          <p:cNvPr id="37" name="Shape 35"/>
-          <p:cNvSpPr/>
-          <p:nvPr/>
-        </p:nvSpPr>
-        <p:spPr>
-          <a:xfrm>
-            <a:off x="3639312" y="4169664"/>
+          <p:cNvPr id="38" name="Shape 36"/>
+          <p:cNvSpPr/>
+          <p:nvPr/>
+        </p:nvSpPr>
+        <p:spPr>
+          <a:xfrm>
+            <a:off x="4331643" y="4169664"/>
             <a:ext cx="685800" cy="384048"/>
           </a:xfrm>
           <a:prstGeom prst="rect">
@@ -10598,13 +10715,13 @@
       </p:sp>
       <p:sp>
         <p:nvSpPr>
-          <p:cNvPr id="38" name="Text 36"/>
-          <p:cNvSpPr/>
-          <p:nvPr/>
-        </p:nvSpPr>
-        <p:spPr>
-          <a:xfrm>
-            <a:off x="3639312" y="4169664"/>
+          <p:cNvPr id="39" name="Text 37"/>
+          <p:cNvSpPr/>
+          <p:nvPr/>
+        </p:nvSpPr>
+        <p:spPr>
+          <a:xfrm>
+            <a:off x="4331643" y="4169664"/>
             <a:ext cx="685800" cy="384048"/>
           </a:xfrm>
           <a:prstGeom prst="rect">
@@ -10629,7 +10746,7 @@
                 <a:ea typeface="Trebuchet MS" pitchFamily="34" charset="-122"/>
                 <a:cs typeface="Trebuchet MS" pitchFamily="34" charset="-120"/>
               </a:rPr>
-              <a:t>s</a:t>
+              <a:t>t</a:t>
             </a:r>
             <a:endParaRPr lang="en-US" sz="900" dirty="0"/>
           </a:p>
@@ -10637,13 +10754,13 @@
       </p:sp>
       <p:sp>
         <p:nvSpPr>
-          <p:cNvPr id="39" name="Shape 37"/>
-          <p:cNvSpPr/>
-          <p:nvPr/>
-        </p:nvSpPr>
-        <p:spPr>
-          <a:xfrm>
-            <a:off x="4447032" y="4169664"/>
+          <p:cNvPr id="40" name="Shape 38"/>
+          <p:cNvSpPr/>
+          <p:nvPr/>
+        </p:nvSpPr>
+        <p:spPr>
+          <a:xfrm>
+            <a:off x="5370141" y="4169664"/>
             <a:ext cx="685800" cy="384048"/>
           </a:xfrm>
           <a:prstGeom prst="rect">
@@ -10664,13 +10781,13 @@
       </p:sp>
       <p:sp>
         <p:nvSpPr>
-          <p:cNvPr id="40" name="Text 38"/>
-          <p:cNvSpPr/>
-          <p:nvPr/>
-        </p:nvSpPr>
-        <p:spPr>
-          <a:xfrm>
-            <a:off x="4447032" y="4169664"/>
+          <p:cNvPr id="41" name="Text 39"/>
+          <p:cNvSpPr/>
+          <p:nvPr/>
+        </p:nvSpPr>
+        <p:spPr>
+          <a:xfrm>
+            <a:off x="5370141" y="4169664"/>
             <a:ext cx="685800" cy="384048"/>
           </a:xfrm>
           <a:prstGeom prst="rect">
@@ -10695,7 +10812,7 @@
                 <a:ea typeface="Trebuchet MS" pitchFamily="34" charset="-122"/>
                 <a:cs typeface="Trebuchet MS" pitchFamily="34" charset="-120"/>
               </a:rPr>
-              <a:t>t</a:t>
+              <a:t>r</a:t>
             </a:r>
             <a:endParaRPr lang="en-US" sz="900" dirty="0"/>
           </a:p>
@@ -10703,13 +10820,13 @@
       </p:sp>
       <p:sp>
         <p:nvSpPr>
-          <p:cNvPr id="41" name="Shape 39"/>
-          <p:cNvSpPr/>
-          <p:nvPr/>
-        </p:nvSpPr>
-        <p:spPr>
-          <a:xfrm>
-            <a:off x="5254752" y="4169664"/>
+          <p:cNvPr id="42" name="Shape 40"/>
+          <p:cNvSpPr/>
+          <p:nvPr/>
+        </p:nvSpPr>
+        <p:spPr>
+          <a:xfrm>
+            <a:off x="6408638" y="4169664"/>
             <a:ext cx="685800" cy="384048"/>
           </a:xfrm>
           <a:prstGeom prst="rect">
@@ -10730,13 +10847,13 @@
       </p:sp>
       <p:sp>
         <p:nvSpPr>
-          <p:cNvPr id="42" name="Text 40"/>
-          <p:cNvSpPr/>
-          <p:nvPr/>
-        </p:nvSpPr>
-        <p:spPr>
-          <a:xfrm>
-            <a:off x="5254752" y="4169664"/>
+          <p:cNvPr id="43" name="Text 41"/>
+          <p:cNvSpPr/>
+          <p:nvPr/>
+        </p:nvSpPr>
+        <p:spPr>
+          <a:xfrm>
+            <a:off x="6408638" y="4169664"/>
             <a:ext cx="685800" cy="384048"/>
           </a:xfrm>
           <a:prstGeom prst="rect">
@@ -10761,7 +10878,7 @@
                 <a:ea typeface="Trebuchet MS" pitchFamily="34" charset="-122"/>
                 <a:cs typeface="Trebuchet MS" pitchFamily="34" charset="-120"/>
               </a:rPr>
-              <a:t>r</a:t>
+              <a:t>a</a:t>
             </a:r>
             <a:endParaRPr lang="en-US" sz="900" dirty="0"/>
           </a:p>
@@ -10769,13 +10886,13 @@
       </p:sp>
       <p:sp>
         <p:nvSpPr>
-          <p:cNvPr id="43" name="Shape 41"/>
-          <p:cNvSpPr/>
-          <p:nvPr/>
-        </p:nvSpPr>
-        <p:spPr>
-          <a:xfrm>
-            <a:off x="6062472" y="4169664"/>
+          <p:cNvPr id="44" name="Shape 42"/>
+          <p:cNvSpPr/>
+          <p:nvPr/>
+        </p:nvSpPr>
+        <p:spPr>
+          <a:xfrm>
+            <a:off x="7447135" y="4169664"/>
             <a:ext cx="685800" cy="384048"/>
           </a:xfrm>
           <a:prstGeom prst="rect">
@@ -10796,13 +10913,13 @@
       </p:sp>
       <p:sp>
         <p:nvSpPr>
-          <p:cNvPr id="44" name="Text 42"/>
-          <p:cNvSpPr/>
-          <p:nvPr/>
-        </p:nvSpPr>
-        <p:spPr>
-          <a:xfrm>
-            <a:off x="6062472" y="4169664"/>
+          <p:cNvPr id="45" name="Text 43"/>
+          <p:cNvSpPr/>
+          <p:nvPr/>
+        </p:nvSpPr>
+        <p:spPr>
+          <a:xfrm>
+            <a:off x="7447135" y="4169664"/>
             <a:ext cx="685800" cy="384048"/>
           </a:xfrm>
           <a:prstGeom prst="rect">
@@ -10827,7 +10944,7 @@
                 <a:ea typeface="Trebuchet MS" pitchFamily="34" charset="-122"/>
                 <a:cs typeface="Trebuchet MS" pitchFamily="34" charset="-120"/>
               </a:rPr>
-              <a:t>a</a:t>
+              <a:t>ct</a:t>
             </a:r>
             <a:endParaRPr lang="en-US" sz="900" dirty="0"/>
           </a:p>
@@ -10835,79 +10952,13 @@
       </p:sp>
       <p:sp>
         <p:nvSpPr>
-          <p:cNvPr id="45" name="Shape 43"/>
-          <p:cNvSpPr/>
-          <p:nvPr/>
-        </p:nvSpPr>
-        <p:spPr>
-          <a:xfrm>
-            <a:off x="6870192" y="4169664"/>
-            <a:ext cx="685800" cy="384048"/>
-          </a:xfrm>
-          <a:prstGeom prst="rect">
-            <a:avLst>
-              <a:gd name="adj" fmla="val 9524"/>
-            </a:avLst>
-          </a:prstGeom>
-          <a:solidFill>
-            <a:srgbClr val="FFFFFF"/>
-          </a:solidFill>
-          <a:ln w="12700">
-            <a:solidFill>
-              <a:srgbClr val="DB2777"/>
-            </a:solidFill>
-            <a:prstDash val="solid"/>
-          </a:ln>
-        </p:spPr>
-      </p:sp>
-      <p:sp>
-        <p:nvSpPr>
           <p:cNvPr id="46" name="Text 44"/>
           <p:cNvSpPr/>
           <p:nvPr/>
         </p:nvSpPr>
         <p:spPr>
           <a:xfrm>
-            <a:off x="6870192" y="4169664"/>
-            <a:ext cx="685800" cy="384048"/>
-          </a:xfrm>
-          <a:prstGeom prst="rect">
-            <a:avLst/>
-          </a:prstGeom>
-          <a:noFill/>
-          <a:ln/>
-        </p:spPr>
-        <p:txBody>
-          <a:bodyPr wrap="square" lIns="0" tIns="0" rIns="0" bIns="0" rtlCol="0" anchor="ctr"/>
-          <a:lstStyle/>
-          <a:p>
-            <a:pPr algn="ctr" indent="0" marL="0">
-              <a:buNone/>
-            </a:pPr>
-            <a:r>
-              <a:rPr lang="en-US" sz="900" b="1" dirty="0">
-                <a:solidFill>
-                  <a:srgbClr val="9D174D"/>
-                </a:solidFill>
-                <a:latin typeface="Trebuchet MS" pitchFamily="34" charset="0"/>
-                <a:ea typeface="Trebuchet MS" pitchFamily="34" charset="-122"/>
-                <a:cs typeface="Trebuchet MS" pitchFamily="34" charset="-120"/>
-              </a:rPr>
-              <a:t>c</a:t>
-            </a:r>
-            <a:endParaRPr lang="en-US" sz="900" dirty="0"/>
-          </a:p>
-        </p:txBody>
-      </p:sp>
-      <p:sp>
-        <p:nvSpPr>
-          <p:cNvPr id="47" name="Text 45"/>
-          <p:cNvSpPr/>
-          <p:nvPr/>
-        </p:nvSpPr>
-        <p:spPr>
-          <a:xfrm>
-            <a:off x="6870192" y="4572000"/>
+            <a:off x="7447135" y="4572000"/>
             <a:ext cx="685800" cy="219456"/>
           </a:xfrm>
           <a:prstGeom prst="rect">
@@ -10932,75 +10983,9 @@
                 <a:ea typeface="Calibri" pitchFamily="34" charset="-122"/>
                 <a:cs typeface="Calibri" pitchFamily="34" charset="-120"/>
               </a:rPr>
-              <a:t>/k/</a:t>
+              <a:t>/kt/</a:t>
             </a:r>
             <a:endParaRPr lang="en-US" sz="750" dirty="0"/>
-          </a:p>
-        </p:txBody>
-      </p:sp>
-      <p:sp>
-        <p:nvSpPr>
-          <p:cNvPr id="48" name="Shape 46"/>
-          <p:cNvSpPr/>
-          <p:nvPr/>
-        </p:nvSpPr>
-        <p:spPr>
-          <a:xfrm>
-            <a:off x="7677912" y="4169664"/>
-            <a:ext cx="685800" cy="384048"/>
-          </a:xfrm>
-          <a:prstGeom prst="rect">
-            <a:avLst>
-              <a:gd name="adj" fmla="val 9524"/>
-            </a:avLst>
-          </a:prstGeom>
-          <a:solidFill>
-            <a:srgbClr val="FFFFFF"/>
-          </a:solidFill>
-          <a:ln w="12700">
-            <a:solidFill>
-              <a:srgbClr val="DB2777"/>
-            </a:solidFill>
-            <a:prstDash val="solid"/>
-          </a:ln>
-        </p:spPr>
-      </p:sp>
-      <p:sp>
-        <p:nvSpPr>
-          <p:cNvPr id="49" name="Text 47"/>
-          <p:cNvSpPr/>
-          <p:nvPr/>
-        </p:nvSpPr>
-        <p:spPr>
-          <a:xfrm>
-            <a:off x="7677912" y="4169664"/>
-            <a:ext cx="685800" cy="384048"/>
-          </a:xfrm>
-          <a:prstGeom prst="rect">
-            <a:avLst/>
-          </a:prstGeom>
-          <a:noFill/>
-          <a:ln/>
-        </p:spPr>
-        <p:txBody>
-          <a:bodyPr wrap="square" lIns="0" tIns="0" rIns="0" bIns="0" rtlCol="0" anchor="ctr"/>
-          <a:lstStyle/>
-          <a:p>
-            <a:pPr algn="ctr" indent="0" marL="0">
-              <a:buNone/>
-            </a:pPr>
-            <a:r>
-              <a:rPr lang="en-US" sz="900" b="1" dirty="0">
-                <a:solidFill>
-                  <a:srgbClr val="9D174D"/>
-                </a:solidFill>
-                <a:latin typeface="Trebuchet MS" pitchFamily="34" charset="0"/>
-                <a:ea typeface="Trebuchet MS" pitchFamily="34" charset="-122"/>
-                <a:cs typeface="Trebuchet MS" pitchFamily="34" charset="-120"/>
-              </a:rPr>
-              <a:t>t</a:t>
-            </a:r>
-            <a:endParaRPr lang="en-US" sz="900" dirty="0"/>
           </a:p>
         </p:txBody>
       </p:sp>
@@ -11290,7 +11275,7 @@
                 <a:ea typeface="Calibri" pitchFamily="34" charset="-122"/>
                 <a:cs typeface="Calibri" pitchFamily="34" charset="-120"/>
               </a:rPr>
-              <a:t>Word Labs  •  wordlabs.app  •  Root: 'tract' = to pull or drag</a:t>
+              <a:t>Word Labs  •  wordlabs.app  •  Root: 'tract' = pull, drag, draw</a:t>
             </a:r>
             <a:endParaRPr lang="en-US" sz="800" dirty="0"/>
           </a:p>
@@ -11429,7 +11414,7 @@
                 <a:ea typeface="Trebuchet MS" pitchFamily="34" charset="-122"/>
                 <a:cs typeface="Trebuchet MS" pitchFamily="34" charset="-120"/>
               </a:rPr>
-              <a:t>attract</a:t>
+              <a:t>retract</a:t>
             </a:r>
             <a:endParaRPr lang="en-US" sz="2800" dirty="0"/>
           </a:p>
@@ -12117,7 +12102,7 @@
                 <a:ea typeface="Calibri" pitchFamily="34" charset="-122"/>
                 <a:cs typeface="Calibri" pitchFamily="34" charset="-120"/>
               </a:rPr>
-              <a:t>Word Labs  •  wordlabs.app  •  Root: 'tract' = to pull or drag</a:t>
+              <a:t>Word Labs  •  wordlabs.app  •  Root: 'tract' = pull, drag, draw</a:t>
             </a:r>
             <a:endParaRPr lang="en-US" sz="800" dirty="0"/>
           </a:p>
@@ -12256,7 +12241,7 @@
                 <a:ea typeface="Trebuchet MS" pitchFamily="34" charset="-122"/>
                 <a:cs typeface="Trebuchet MS" pitchFamily="34" charset="-120"/>
               </a:rPr>
-              <a:t>attract</a:t>
+              <a:t>retract</a:t>
             </a:r>
             <a:endParaRPr lang="en-US" sz="2800" dirty="0"/>
           </a:p>
@@ -12395,7 +12380,7 @@
                 <a:ea typeface="Trebuchet MS" pitchFamily="34" charset="-122"/>
                 <a:cs typeface="Trebuchet MS" pitchFamily="34" charset="-120"/>
               </a:rPr>
-              <a:t>at</a:t>
+              <a:t>re</a:t>
             </a:r>
             <a:endParaRPr lang="en-US" sz="1300" dirty="0"/>
           </a:p>
@@ -12434,7 +12419,7 @@
                 <a:ea typeface="Calibri" pitchFamily="34" charset="-122"/>
                 <a:cs typeface="Calibri" pitchFamily="34" charset="-120"/>
               </a:rPr>
-              <a:t>towards</a:t>
+              <a:t>back, again</a:t>
             </a:r>
             <a:endParaRPr lang="en-US" sz="850" dirty="0"/>
           </a:p>
@@ -12442,46 +12427,7 @@
       </p:sp>
       <p:sp>
         <p:nvSpPr>
-          <p:cNvPr id="19" name="Text 17"/>
-          <p:cNvSpPr/>
-          <p:nvPr/>
-        </p:nvSpPr>
-        <p:spPr>
-          <a:xfrm>
-            <a:off x="2938272" y="2752344"/>
-            <a:ext cx="1828800" cy="182880"/>
-          </a:xfrm>
-          <a:prstGeom prst="rect">
-            <a:avLst/>
-          </a:prstGeom>
-          <a:noFill/>
-          <a:ln/>
-        </p:spPr>
-        <p:txBody>
-          <a:bodyPr wrap="square" lIns="0" tIns="0" rIns="0" bIns="0" rtlCol="0" anchor="t"/>
-          <a:lstStyle/>
-          <a:p>
-            <a:pPr algn="ctr" indent="0" marL="0">
-              <a:buNone/>
-            </a:pPr>
-            <a:r>
-              <a:rPr lang="en-US" sz="700" i="1" dirty="0">
-                <a:solidFill>
-                  <a:srgbClr val="94A3B8"/>
-                </a:solidFill>
-                <a:latin typeface="Calibri" pitchFamily="34" charset="0"/>
-                <a:ea typeface="Calibri" pitchFamily="34" charset="-122"/>
-                <a:cs typeface="Calibri" pitchFamily="34" charset="-120"/>
-              </a:rPr>
-              <a:t>ad → at before 't'</a:t>
-            </a:r>
-            <a:endParaRPr lang="en-US" sz="700" dirty="0"/>
-          </a:p>
-        </p:txBody>
-      </p:sp>
-      <p:sp>
-        <p:nvSpPr>
-          <p:cNvPr id="20" name="Shape 18"/>
+          <p:cNvPr id="19" name="Shape 17"/>
           <p:cNvSpPr/>
           <p:nvPr/>
         </p:nvSpPr>
@@ -12515,7 +12461,7 @@
       </p:sp>
       <p:sp>
         <p:nvSpPr>
-          <p:cNvPr id="21" name="Text 19"/>
+          <p:cNvPr id="20" name="Text 18"/>
           <p:cNvSpPr/>
           <p:nvPr/>
         </p:nvSpPr>
@@ -12554,7 +12500,7 @@
       </p:sp>
       <p:sp>
         <p:nvSpPr>
-          <p:cNvPr id="22" name="Text 20"/>
+          <p:cNvPr id="21" name="Text 19"/>
           <p:cNvSpPr/>
           <p:nvPr/>
         </p:nvSpPr>
@@ -12585,7 +12531,7 @@
                 <a:ea typeface="Calibri" pitchFamily="34" charset="-122"/>
                 <a:cs typeface="Calibri" pitchFamily="34" charset="-120"/>
               </a:rPr>
-              <a:t>to pull or drag</a:t>
+              <a:t>pull, draw</a:t>
             </a:r>
             <a:endParaRPr lang="en-US" sz="850" dirty="0"/>
           </a:p>
@@ -12593,7 +12539,7 @@
       </p:sp>
       <p:sp>
         <p:nvSpPr>
-          <p:cNvPr id="23" name="Shape 21"/>
+          <p:cNvPr id="22" name="Shape 20"/>
           <p:cNvSpPr/>
           <p:nvPr/>
         </p:nvSpPr>
@@ -12620,7 +12566,7 @@
       </p:sp>
       <p:sp>
         <p:nvSpPr>
-          <p:cNvPr id="24" name="Text 22"/>
+          <p:cNvPr id="23" name="Text 21"/>
           <p:cNvSpPr/>
           <p:nvPr/>
         </p:nvSpPr>
@@ -12659,7 +12605,7 @@
       </p:sp>
       <p:sp>
         <p:nvSpPr>
-          <p:cNvPr id="25" name="Shape 23"/>
+          <p:cNvPr id="24" name="Shape 22"/>
           <p:cNvSpPr/>
           <p:nvPr/>
         </p:nvSpPr>
@@ -12686,7 +12632,7 @@
       </p:sp>
       <p:sp>
         <p:nvSpPr>
-          <p:cNvPr id="26" name="Text 24"/>
+          <p:cNvPr id="25" name="Text 23"/>
           <p:cNvSpPr/>
           <p:nvPr/>
         </p:nvSpPr>
@@ -12725,7 +12671,7 @@
       </p:sp>
       <p:sp>
         <p:nvSpPr>
-          <p:cNvPr id="27" name="Shape 25"/>
+          <p:cNvPr id="26" name="Shape 24"/>
           <p:cNvSpPr/>
           <p:nvPr/>
         </p:nvSpPr>
@@ -12752,7 +12698,7 @@
       </p:sp>
       <p:sp>
         <p:nvSpPr>
-          <p:cNvPr id="28" name="Text 26"/>
+          <p:cNvPr id="27" name="Text 25"/>
           <p:cNvSpPr/>
           <p:nvPr/>
         </p:nvSpPr>
@@ -12791,7 +12737,7 @@
       </p:sp>
       <p:sp>
         <p:nvSpPr>
-          <p:cNvPr id="29" name="Shape 27"/>
+          <p:cNvPr id="28" name="Shape 26"/>
           <p:cNvSpPr/>
           <p:nvPr/>
         </p:nvSpPr>
@@ -12818,7 +12764,7 @@
       </p:sp>
       <p:sp>
         <p:nvSpPr>
-          <p:cNvPr id="30" name="Text 28"/>
+          <p:cNvPr id="29" name="Text 27"/>
           <p:cNvSpPr/>
           <p:nvPr/>
         </p:nvSpPr>
@@ -13141,7 +13087,7 @@
                 <a:ea typeface="Calibri" pitchFamily="34" charset="-122"/>
                 <a:cs typeface="Calibri" pitchFamily="34" charset="-120"/>
               </a:rPr>
-              <a:t>Word Labs  •  wordlabs.app  •  Root: 'tract' = to pull or drag</a:t>
+              <a:t>Word Labs  •  wordlabs.app  •  Root: 'tract' = pull, drag, draw</a:t>
             </a:r>
             <a:endParaRPr lang="en-US" sz="800" dirty="0"/>
           </a:p>
@@ -13280,7 +13226,7 @@
                 <a:ea typeface="Trebuchet MS" pitchFamily="34" charset="-122"/>
                 <a:cs typeface="Trebuchet MS" pitchFamily="34" charset="-120"/>
               </a:rPr>
-              <a:t>attract</a:t>
+              <a:t>retract</a:t>
             </a:r>
             <a:endParaRPr lang="en-US" sz="2800" dirty="0"/>
           </a:p>
@@ -13419,7 +13365,7 @@
                 <a:ea typeface="Trebuchet MS" pitchFamily="34" charset="-122"/>
                 <a:cs typeface="Trebuchet MS" pitchFamily="34" charset="-120"/>
               </a:rPr>
-              <a:t>at</a:t>
+              <a:t>re</a:t>
             </a:r>
             <a:endParaRPr lang="en-US" sz="1300" dirty="0"/>
           </a:p>
@@ -13458,7 +13404,7 @@
                 <a:ea typeface="Calibri" pitchFamily="34" charset="-122"/>
                 <a:cs typeface="Calibri" pitchFamily="34" charset="-120"/>
               </a:rPr>
-              <a:t>towards</a:t>
+              <a:t>back, again</a:t>
             </a:r>
             <a:endParaRPr lang="en-US" sz="850" dirty="0"/>
           </a:p>
@@ -13466,46 +13412,7 @@
       </p:sp>
       <p:sp>
         <p:nvSpPr>
-          <p:cNvPr id="19" name="Text 17"/>
-          <p:cNvSpPr/>
-          <p:nvPr/>
-        </p:nvSpPr>
-        <p:spPr>
-          <a:xfrm>
-            <a:off x="2938272" y="2752344"/>
-            <a:ext cx="1828800" cy="182880"/>
-          </a:xfrm>
-          <a:prstGeom prst="rect">
-            <a:avLst/>
-          </a:prstGeom>
-          <a:noFill/>
-          <a:ln/>
-        </p:spPr>
-        <p:txBody>
-          <a:bodyPr wrap="square" lIns="0" tIns="0" rIns="0" bIns="0" rtlCol="0" anchor="t"/>
-          <a:lstStyle/>
-          <a:p>
-            <a:pPr algn="ctr" indent="0" marL="0">
-              <a:buNone/>
-            </a:pPr>
-            <a:r>
-              <a:rPr lang="en-US" sz="700" i="1" dirty="0">
-                <a:solidFill>
-                  <a:srgbClr val="94A3B8"/>
-                </a:solidFill>
-                <a:latin typeface="Calibri" pitchFamily="34" charset="0"/>
-                <a:ea typeface="Calibri" pitchFamily="34" charset="-122"/>
-                <a:cs typeface="Calibri" pitchFamily="34" charset="-120"/>
-              </a:rPr>
-              <a:t>ad → at before 't'</a:t>
-            </a:r>
-            <a:endParaRPr lang="en-US" sz="700" dirty="0"/>
-          </a:p>
-        </p:txBody>
-      </p:sp>
-      <p:sp>
-        <p:nvSpPr>
-          <p:cNvPr id="20" name="Shape 18"/>
+          <p:cNvPr id="19" name="Shape 17"/>
           <p:cNvSpPr/>
           <p:nvPr/>
         </p:nvSpPr>
@@ -13539,7 +13446,7 @@
       </p:sp>
       <p:sp>
         <p:nvSpPr>
-          <p:cNvPr id="21" name="Text 19"/>
+          <p:cNvPr id="20" name="Text 18"/>
           <p:cNvSpPr/>
           <p:nvPr/>
         </p:nvSpPr>
@@ -13578,7 +13485,7 @@
       </p:sp>
       <p:sp>
         <p:nvSpPr>
-          <p:cNvPr id="22" name="Text 20"/>
+          <p:cNvPr id="21" name="Text 19"/>
           <p:cNvSpPr/>
           <p:nvPr/>
         </p:nvSpPr>
@@ -13609,7 +13516,7 @@
                 <a:ea typeface="Calibri" pitchFamily="34" charset="-122"/>
                 <a:cs typeface="Calibri" pitchFamily="34" charset="-120"/>
               </a:rPr>
-              <a:t>to pull or drag</a:t>
+              <a:t>pull, draw</a:t>
             </a:r>
             <a:endParaRPr lang="en-US" sz="850" dirty="0"/>
           </a:p>
@@ -13617,7 +13524,7 @@
       </p:sp>
       <p:sp>
         <p:nvSpPr>
-          <p:cNvPr id="23" name="Shape 21"/>
+          <p:cNvPr id="22" name="Shape 20"/>
           <p:cNvSpPr/>
           <p:nvPr/>
         </p:nvSpPr>
@@ -13644,7 +13551,7 @@
       </p:sp>
       <p:sp>
         <p:nvSpPr>
-          <p:cNvPr id="24" name="Text 22"/>
+          <p:cNvPr id="23" name="Text 21"/>
           <p:cNvSpPr/>
           <p:nvPr/>
         </p:nvSpPr>
@@ -13683,7 +13590,7 @@
       </p:sp>
       <p:sp>
         <p:nvSpPr>
-          <p:cNvPr id="25" name="Shape 23"/>
+          <p:cNvPr id="24" name="Shape 22"/>
           <p:cNvSpPr/>
           <p:nvPr/>
         </p:nvSpPr>
@@ -13710,7 +13617,7 @@
       </p:sp>
       <p:sp>
         <p:nvSpPr>
-          <p:cNvPr id="26" name="Shape 24"/>
+          <p:cNvPr id="25" name="Shape 23"/>
           <p:cNvSpPr/>
           <p:nvPr/>
         </p:nvSpPr>
@@ -13737,7 +13644,7 @@
       </p:sp>
       <p:sp>
         <p:nvSpPr>
-          <p:cNvPr id="27" name="Text 25"/>
+          <p:cNvPr id="26" name="Text 24"/>
           <p:cNvSpPr/>
           <p:nvPr/>
         </p:nvSpPr>
@@ -13768,7 +13675,7 @@
                 <a:ea typeface="Trebuchet MS" pitchFamily="34" charset="-122"/>
                 <a:cs typeface="Trebuchet MS" pitchFamily="34" charset="-120"/>
               </a:rPr>
-              <a:t>at</a:t>
+              <a:t>re</a:t>
             </a:r>
             <a:endParaRPr lang="en-US" sz="1400" dirty="0"/>
           </a:p>
@@ -13776,7 +13683,7 @@
       </p:sp>
       <p:sp>
         <p:nvSpPr>
-          <p:cNvPr id="28" name="Text 26"/>
+          <p:cNvPr id="27" name="Text 25"/>
           <p:cNvSpPr/>
           <p:nvPr/>
         </p:nvSpPr>
@@ -13815,7 +13722,7 @@
       </p:sp>
       <p:sp>
         <p:nvSpPr>
-          <p:cNvPr id="29" name="Shape 27"/>
+          <p:cNvPr id="28" name="Shape 26"/>
           <p:cNvSpPr/>
           <p:nvPr/>
         </p:nvSpPr>
@@ -13842,7 +13749,7 @@
       </p:sp>
       <p:sp>
         <p:nvSpPr>
-          <p:cNvPr id="30" name="Text 28"/>
+          <p:cNvPr id="29" name="Text 27"/>
           <p:cNvSpPr/>
           <p:nvPr/>
         </p:nvSpPr>
@@ -13881,7 +13788,7 @@
       </p:sp>
       <p:sp>
         <p:nvSpPr>
-          <p:cNvPr id="31" name="Shape 29"/>
+          <p:cNvPr id="30" name="Shape 28"/>
           <p:cNvSpPr/>
           <p:nvPr/>
         </p:nvSpPr>
@@ -13908,7 +13815,7 @@
       </p:sp>
       <p:sp>
         <p:nvSpPr>
-          <p:cNvPr id="32" name="Text 30"/>
+          <p:cNvPr id="31" name="Text 29"/>
           <p:cNvSpPr/>
           <p:nvPr/>
         </p:nvSpPr>
@@ -13947,7 +13854,7 @@
       </p:sp>
       <p:sp>
         <p:nvSpPr>
-          <p:cNvPr id="33" name="Shape 31"/>
+          <p:cNvPr id="32" name="Shape 30"/>
           <p:cNvSpPr/>
           <p:nvPr/>
         </p:nvSpPr>
@@ -13974,7 +13881,7 @@
       </p:sp>
       <p:sp>
         <p:nvSpPr>
-          <p:cNvPr id="34" name="Text 32"/>
+          <p:cNvPr id="33" name="Text 31"/>
           <p:cNvSpPr/>
           <p:nvPr/>
         </p:nvSpPr>
@@ -14206,7 +14113,7 @@
                 <a:ea typeface="Calibri" pitchFamily="34" charset="-122"/>
                 <a:cs typeface="Calibri" pitchFamily="34" charset="-120"/>
               </a:rPr>
-              <a:t>Root 'tract' — to pull or drag</a:t>
+              <a:t>Root 'tract' — pull, drag, draw</a:t>
             </a:r>
             <a:endParaRPr lang="en-US" sz="1600" dirty="0"/>
           </a:p>
@@ -14562,7 +14469,7 @@
                 <a:ea typeface="Calibri" pitchFamily="34" charset="-122"/>
                 <a:cs typeface="Calibri" pitchFamily="34" charset="-120"/>
               </a:rPr>
-              <a:t>Word Labs  •  wordlabs.app  •  Root: 'tract' = to pull or drag</a:t>
+              <a:t>Word Labs  •  wordlabs.app  •  Root: 'tract' = pull, drag, draw</a:t>
             </a:r>
             <a:endParaRPr lang="en-US" sz="800" dirty="0"/>
           </a:p>
@@ -14701,7 +14608,7 @@
                 <a:ea typeface="Trebuchet MS" pitchFamily="34" charset="-122"/>
                 <a:cs typeface="Trebuchet MS" pitchFamily="34" charset="-120"/>
               </a:rPr>
-              <a:t>attract</a:t>
+              <a:t>retract</a:t>
             </a:r>
             <a:endParaRPr lang="en-US" sz="2800" dirty="0"/>
           </a:p>
@@ -14840,7 +14747,7 @@
                 <a:ea typeface="Trebuchet MS" pitchFamily="34" charset="-122"/>
                 <a:cs typeface="Trebuchet MS" pitchFamily="34" charset="-120"/>
               </a:rPr>
-              <a:t>at</a:t>
+              <a:t>re</a:t>
             </a:r>
             <a:endParaRPr lang="en-US" sz="1300" dirty="0"/>
           </a:p>
@@ -14879,7 +14786,7 @@
                 <a:ea typeface="Calibri" pitchFamily="34" charset="-122"/>
                 <a:cs typeface="Calibri" pitchFamily="34" charset="-120"/>
               </a:rPr>
-              <a:t>towards</a:t>
+              <a:t>back, again</a:t>
             </a:r>
             <a:endParaRPr lang="en-US" sz="850" dirty="0"/>
           </a:p>
@@ -14887,46 +14794,7 @@
       </p:sp>
       <p:sp>
         <p:nvSpPr>
-          <p:cNvPr id="19" name="Text 17"/>
-          <p:cNvSpPr/>
-          <p:nvPr/>
-        </p:nvSpPr>
-        <p:spPr>
-          <a:xfrm>
-            <a:off x="2938272" y="2752344"/>
-            <a:ext cx="1828800" cy="182880"/>
-          </a:xfrm>
-          <a:prstGeom prst="rect">
-            <a:avLst/>
-          </a:prstGeom>
-          <a:noFill/>
-          <a:ln/>
-        </p:spPr>
-        <p:txBody>
-          <a:bodyPr wrap="square" lIns="0" tIns="0" rIns="0" bIns="0" rtlCol="0" anchor="t"/>
-          <a:lstStyle/>
-          <a:p>
-            <a:pPr algn="ctr" indent="0" marL="0">
-              <a:buNone/>
-            </a:pPr>
-            <a:r>
-              <a:rPr lang="en-US" sz="700" i="1" dirty="0">
-                <a:solidFill>
-                  <a:srgbClr val="94A3B8"/>
-                </a:solidFill>
-                <a:latin typeface="Calibri" pitchFamily="34" charset="0"/>
-                <a:ea typeface="Calibri" pitchFamily="34" charset="-122"/>
-                <a:cs typeface="Calibri" pitchFamily="34" charset="-120"/>
-              </a:rPr>
-              <a:t>ad → at before 't'</a:t>
-            </a:r>
-            <a:endParaRPr lang="en-US" sz="700" dirty="0"/>
-          </a:p>
-        </p:txBody>
-      </p:sp>
-      <p:sp>
-        <p:nvSpPr>
-          <p:cNvPr id="20" name="Shape 18"/>
+          <p:cNvPr id="19" name="Shape 17"/>
           <p:cNvSpPr/>
           <p:nvPr/>
         </p:nvSpPr>
@@ -14960,7 +14828,7 @@
       </p:sp>
       <p:sp>
         <p:nvSpPr>
-          <p:cNvPr id="21" name="Text 19"/>
+          <p:cNvPr id="20" name="Text 18"/>
           <p:cNvSpPr/>
           <p:nvPr/>
         </p:nvSpPr>
@@ -14999,7 +14867,7 @@
       </p:sp>
       <p:sp>
         <p:nvSpPr>
-          <p:cNvPr id="22" name="Text 20"/>
+          <p:cNvPr id="21" name="Text 19"/>
           <p:cNvSpPr/>
           <p:nvPr/>
         </p:nvSpPr>
@@ -15030,7 +14898,7 @@
                 <a:ea typeface="Calibri" pitchFamily="34" charset="-122"/>
                 <a:cs typeface="Calibri" pitchFamily="34" charset="-120"/>
               </a:rPr>
-              <a:t>to pull or drag</a:t>
+              <a:t>pull, draw</a:t>
             </a:r>
             <a:endParaRPr lang="en-US" sz="850" dirty="0"/>
           </a:p>
@@ -15038,7 +14906,7 @@
       </p:sp>
       <p:sp>
         <p:nvSpPr>
-          <p:cNvPr id="23" name="Shape 21"/>
+          <p:cNvPr id="22" name="Shape 20"/>
           <p:cNvSpPr/>
           <p:nvPr/>
         </p:nvSpPr>
@@ -15065,7 +14933,7 @@
       </p:sp>
       <p:sp>
         <p:nvSpPr>
-          <p:cNvPr id="24" name="Text 22"/>
+          <p:cNvPr id="23" name="Text 21"/>
           <p:cNvSpPr/>
           <p:nvPr/>
         </p:nvSpPr>
@@ -15104,7 +14972,7 @@
       </p:sp>
       <p:sp>
         <p:nvSpPr>
-          <p:cNvPr id="25" name="Shape 23"/>
+          <p:cNvPr id="24" name="Shape 22"/>
           <p:cNvSpPr/>
           <p:nvPr/>
         </p:nvSpPr>
@@ -15131,7 +14999,7 @@
       </p:sp>
       <p:sp>
         <p:nvSpPr>
-          <p:cNvPr id="26" name="Shape 24"/>
+          <p:cNvPr id="25" name="Shape 23"/>
           <p:cNvSpPr/>
           <p:nvPr/>
         </p:nvSpPr>
@@ -15158,7 +15026,7 @@
       </p:sp>
       <p:sp>
         <p:nvSpPr>
-          <p:cNvPr id="27" name="Text 25"/>
+          <p:cNvPr id="26" name="Text 24"/>
           <p:cNvSpPr/>
           <p:nvPr/>
         </p:nvSpPr>
@@ -15189,7 +15057,7 @@
                 <a:ea typeface="Trebuchet MS" pitchFamily="34" charset="-122"/>
                 <a:cs typeface="Trebuchet MS" pitchFamily="34" charset="-120"/>
               </a:rPr>
-              <a:t>at</a:t>
+              <a:t>re</a:t>
             </a:r>
             <a:endParaRPr lang="en-US" sz="1400" dirty="0"/>
           </a:p>
@@ -15197,7 +15065,7 @@
       </p:sp>
       <p:sp>
         <p:nvSpPr>
-          <p:cNvPr id="28" name="Text 26"/>
+          <p:cNvPr id="27" name="Text 25"/>
           <p:cNvSpPr/>
           <p:nvPr/>
         </p:nvSpPr>
@@ -15236,7 +15104,7 @@
       </p:sp>
       <p:sp>
         <p:nvSpPr>
-          <p:cNvPr id="29" name="Shape 27"/>
+          <p:cNvPr id="28" name="Shape 26"/>
           <p:cNvSpPr/>
           <p:nvPr/>
         </p:nvSpPr>
@@ -15263,7 +15131,7 @@
       </p:sp>
       <p:sp>
         <p:nvSpPr>
-          <p:cNvPr id="30" name="Text 28"/>
+          <p:cNvPr id="29" name="Text 27"/>
           <p:cNvSpPr/>
           <p:nvPr/>
         </p:nvSpPr>
@@ -15302,7 +15170,7 @@
       </p:sp>
       <p:sp>
         <p:nvSpPr>
-          <p:cNvPr id="31" name="Shape 29"/>
+          <p:cNvPr id="30" name="Shape 28"/>
           <p:cNvSpPr/>
           <p:nvPr/>
         </p:nvSpPr>
@@ -15329,7 +15197,7 @@
       </p:sp>
       <p:sp>
         <p:nvSpPr>
-          <p:cNvPr id="32" name="Text 30"/>
+          <p:cNvPr id="31" name="Text 29"/>
           <p:cNvSpPr/>
           <p:nvPr/>
         </p:nvSpPr>
@@ -15368,7 +15236,7 @@
       </p:sp>
       <p:sp>
         <p:nvSpPr>
-          <p:cNvPr id="33" name="Shape 31"/>
+          <p:cNvPr id="32" name="Shape 30"/>
           <p:cNvSpPr/>
           <p:nvPr/>
         </p:nvSpPr>
@@ -15395,7 +15263,7 @@
       </p:sp>
       <p:sp>
         <p:nvSpPr>
-          <p:cNvPr id="34" name="Shape 32"/>
+          <p:cNvPr id="33" name="Shape 31"/>
           <p:cNvSpPr/>
           <p:nvPr/>
         </p:nvSpPr>
@@ -15422,7 +15290,7 @@
       </p:sp>
       <p:sp>
         <p:nvSpPr>
-          <p:cNvPr id="35" name="Text 33"/>
+          <p:cNvPr id="34" name="Text 32"/>
           <p:cNvSpPr/>
           <p:nvPr/>
         </p:nvSpPr>
@@ -15453,7 +15321,7 @@
                 <a:ea typeface="Trebuchet MS" pitchFamily="34" charset="-122"/>
                 <a:cs typeface="Trebuchet MS" pitchFamily="34" charset="-120"/>
               </a:rPr>
-              <a:t>a</a:t>
+              <a:t>r</a:t>
             </a:r>
             <a:endParaRPr lang="en-US" sz="900" dirty="0"/>
           </a:p>
@@ -15461,7 +15329,7 @@
       </p:sp>
       <p:sp>
         <p:nvSpPr>
-          <p:cNvPr id="36" name="Shape 34"/>
+          <p:cNvPr id="35" name="Shape 33"/>
           <p:cNvSpPr/>
           <p:nvPr/>
         </p:nvSpPr>
@@ -15488,7 +15356,7 @@
       </p:sp>
       <p:sp>
         <p:nvSpPr>
-          <p:cNvPr id="37" name="Text 35"/>
+          <p:cNvPr id="36" name="Text 34"/>
           <p:cNvSpPr/>
           <p:nvPr/>
         </p:nvSpPr>
@@ -15519,7 +15387,7 @@
                 <a:ea typeface="Trebuchet MS" pitchFamily="34" charset="-122"/>
                 <a:cs typeface="Trebuchet MS" pitchFamily="34" charset="-120"/>
               </a:rPr>
-              <a:t>tt</a:t>
+              <a:t>e</a:t>
             </a:r>
             <a:endParaRPr lang="en-US" sz="900" dirty="0"/>
           </a:p>
@@ -15527,7 +15395,7 @@
       </p:sp>
       <p:sp>
         <p:nvSpPr>
-          <p:cNvPr id="38" name="Shape 36"/>
+          <p:cNvPr id="37" name="Shape 35"/>
           <p:cNvSpPr/>
           <p:nvPr/>
         </p:nvSpPr>
@@ -15554,7 +15422,7 @@
       </p:sp>
       <p:sp>
         <p:nvSpPr>
-          <p:cNvPr id="39" name="Text 37"/>
+          <p:cNvPr id="38" name="Text 36"/>
           <p:cNvSpPr/>
           <p:nvPr/>
         </p:nvSpPr>
@@ -15585,7 +15453,7 @@
                 <a:ea typeface="Trebuchet MS" pitchFamily="34" charset="-122"/>
                 <a:cs typeface="Trebuchet MS" pitchFamily="34" charset="-120"/>
               </a:rPr>
-              <a:t>r</a:t>
+              <a:t>t</a:t>
             </a:r>
             <a:endParaRPr lang="en-US" sz="900" dirty="0"/>
           </a:p>
@@ -15593,7 +15461,7 @@
       </p:sp>
       <p:sp>
         <p:nvSpPr>
-          <p:cNvPr id="40" name="Shape 38"/>
+          <p:cNvPr id="39" name="Shape 37"/>
           <p:cNvSpPr/>
           <p:nvPr/>
         </p:nvSpPr>
@@ -15620,7 +15488,7 @@
       </p:sp>
       <p:sp>
         <p:nvSpPr>
-          <p:cNvPr id="41" name="Text 39"/>
+          <p:cNvPr id="40" name="Text 38"/>
           <p:cNvSpPr/>
           <p:nvPr/>
         </p:nvSpPr>
@@ -15651,7 +15519,7 @@
                 <a:ea typeface="Trebuchet MS" pitchFamily="34" charset="-122"/>
                 <a:cs typeface="Trebuchet MS" pitchFamily="34" charset="-120"/>
               </a:rPr>
-              <a:t>a</a:t>
+              <a:t>r</a:t>
             </a:r>
             <a:endParaRPr lang="en-US" sz="900" dirty="0"/>
           </a:p>
@@ -15659,7 +15527,7 @@
       </p:sp>
       <p:sp>
         <p:nvSpPr>
-          <p:cNvPr id="42" name="Shape 40"/>
+          <p:cNvPr id="41" name="Shape 39"/>
           <p:cNvSpPr/>
           <p:nvPr/>
         </p:nvSpPr>
@@ -15686,7 +15554,7 @@
       </p:sp>
       <p:sp>
         <p:nvSpPr>
-          <p:cNvPr id="43" name="Text 41"/>
+          <p:cNvPr id="42" name="Text 40"/>
           <p:cNvSpPr/>
           <p:nvPr/>
         </p:nvSpPr>
@@ -15717,7 +15585,7 @@
                 <a:ea typeface="Trebuchet MS" pitchFamily="34" charset="-122"/>
                 <a:cs typeface="Trebuchet MS" pitchFamily="34" charset="-120"/>
               </a:rPr>
-              <a:t>c</a:t>
+              <a:t>a</a:t>
             </a:r>
             <a:endParaRPr lang="en-US" sz="900" dirty="0"/>
           </a:p>
@@ -15725,13 +15593,79 @@
       </p:sp>
       <p:sp>
         <p:nvSpPr>
+          <p:cNvPr id="43" name="Shape 41"/>
+          <p:cNvSpPr/>
+          <p:nvPr/>
+        </p:nvSpPr>
+        <p:spPr>
+          <a:xfrm>
+            <a:off x="7447135" y="4169664"/>
+            <a:ext cx="685800" cy="384048"/>
+          </a:xfrm>
+          <a:prstGeom prst="rect">
+            <a:avLst>
+              <a:gd name="adj" fmla="val 9524"/>
+            </a:avLst>
+          </a:prstGeom>
+          <a:solidFill>
+            <a:srgbClr val="FFFFFF"/>
+          </a:solidFill>
+          <a:ln w="12700">
+            <a:solidFill>
+              <a:srgbClr val="DB2777"/>
+            </a:solidFill>
+            <a:prstDash val="solid"/>
+          </a:ln>
+        </p:spPr>
+      </p:sp>
+      <p:sp>
+        <p:nvSpPr>
           <p:cNvPr id="44" name="Text 42"/>
           <p:cNvSpPr/>
           <p:nvPr/>
         </p:nvSpPr>
         <p:spPr>
           <a:xfrm>
-            <a:off x="6408638" y="4572000"/>
+            <a:off x="7447135" y="4169664"/>
+            <a:ext cx="685800" cy="384048"/>
+          </a:xfrm>
+          <a:prstGeom prst="rect">
+            <a:avLst/>
+          </a:prstGeom>
+          <a:noFill/>
+          <a:ln/>
+        </p:spPr>
+        <p:txBody>
+          <a:bodyPr wrap="square" lIns="0" tIns="0" rIns="0" bIns="0" rtlCol="0" anchor="ctr"/>
+          <a:lstStyle/>
+          <a:p>
+            <a:pPr algn="ctr" indent="0" marL="0">
+              <a:buNone/>
+            </a:pPr>
+            <a:r>
+              <a:rPr lang="en-US" sz="900" b="1" dirty="0">
+                <a:solidFill>
+                  <a:srgbClr val="9D174D"/>
+                </a:solidFill>
+                <a:latin typeface="Trebuchet MS" pitchFamily="34" charset="0"/>
+                <a:ea typeface="Trebuchet MS" pitchFamily="34" charset="-122"/>
+                <a:cs typeface="Trebuchet MS" pitchFamily="34" charset="-120"/>
+              </a:rPr>
+              <a:t>ct</a:t>
+            </a:r>
+            <a:endParaRPr lang="en-US" sz="900" dirty="0"/>
+          </a:p>
+        </p:txBody>
+      </p:sp>
+      <p:sp>
+        <p:nvSpPr>
+          <p:cNvPr id="45" name="Text 43"/>
+          <p:cNvSpPr/>
+          <p:nvPr/>
+        </p:nvSpPr>
+        <p:spPr>
+          <a:xfrm>
+            <a:off x="7447135" y="4572000"/>
             <a:ext cx="685800" cy="219456"/>
           </a:xfrm>
           <a:prstGeom prst="rect">
@@ -15756,75 +15690,9 @@
                 <a:ea typeface="Calibri" pitchFamily="34" charset="-122"/>
                 <a:cs typeface="Calibri" pitchFamily="34" charset="-120"/>
               </a:rPr>
-              <a:t>/k/</a:t>
+              <a:t>/kt/</a:t>
             </a:r>
             <a:endParaRPr lang="en-US" sz="750" dirty="0"/>
-          </a:p>
-        </p:txBody>
-      </p:sp>
-      <p:sp>
-        <p:nvSpPr>
-          <p:cNvPr id="45" name="Shape 43"/>
-          <p:cNvSpPr/>
-          <p:nvPr/>
-        </p:nvSpPr>
-        <p:spPr>
-          <a:xfrm>
-            <a:off x="7447135" y="4169664"/>
-            <a:ext cx="685800" cy="384048"/>
-          </a:xfrm>
-          <a:prstGeom prst="rect">
-            <a:avLst>
-              <a:gd name="adj" fmla="val 9524"/>
-            </a:avLst>
-          </a:prstGeom>
-          <a:solidFill>
-            <a:srgbClr val="FFFFFF"/>
-          </a:solidFill>
-          <a:ln w="12700">
-            <a:solidFill>
-              <a:srgbClr val="DB2777"/>
-            </a:solidFill>
-            <a:prstDash val="solid"/>
-          </a:ln>
-        </p:spPr>
-      </p:sp>
-      <p:sp>
-        <p:nvSpPr>
-          <p:cNvPr id="46" name="Text 44"/>
-          <p:cNvSpPr/>
-          <p:nvPr/>
-        </p:nvSpPr>
-        <p:spPr>
-          <a:xfrm>
-            <a:off x="7447135" y="4169664"/>
-            <a:ext cx="685800" cy="384048"/>
-          </a:xfrm>
-          <a:prstGeom prst="rect">
-            <a:avLst/>
-          </a:prstGeom>
-          <a:noFill/>
-          <a:ln/>
-        </p:spPr>
-        <p:txBody>
-          <a:bodyPr wrap="square" lIns="0" tIns="0" rIns="0" bIns="0" rtlCol="0" anchor="ctr"/>
-          <a:lstStyle/>
-          <a:p>
-            <a:pPr algn="ctr" indent="0" marL="0">
-              <a:buNone/>
-            </a:pPr>
-            <a:r>
-              <a:rPr lang="en-US" sz="900" b="1" dirty="0">
-                <a:solidFill>
-                  <a:srgbClr val="9D174D"/>
-                </a:solidFill>
-                <a:latin typeface="Trebuchet MS" pitchFamily="34" charset="0"/>
-                <a:ea typeface="Trebuchet MS" pitchFamily="34" charset="-122"/>
-                <a:cs typeface="Trebuchet MS" pitchFamily="34" charset="-120"/>
-              </a:rPr>
-              <a:t>t</a:t>
-            </a:r>
-            <a:endParaRPr lang="en-US" sz="900" dirty="0"/>
           </a:p>
         </p:txBody>
       </p:sp>
@@ -16396,7 +16264,7 @@
                 <a:ea typeface="Calibri" pitchFamily="34" charset="-122"/>
                 <a:cs typeface="Calibri" pitchFamily="34" charset="-120"/>
               </a:rPr>
-              <a:t>Word Labs  •  wordlabs.app  •  Root: 'tract' = to pull or drag</a:t>
+              <a:t>Word Labs  •  wordlabs.app  •  Root: 'tract' = pull, drag, draw</a:t>
             </a:r>
             <a:endParaRPr lang="en-US" sz="800" dirty="0"/>
           </a:p>
@@ -17036,7 +16904,7 @@
                 <a:ea typeface="Calibri" pitchFamily="34" charset="-122"/>
                 <a:cs typeface="Calibri" pitchFamily="34" charset="-120"/>
               </a:rPr>
-              <a:t>Word Labs  •  wordlabs.app  •  Root: 'tract' = to pull or drag</a:t>
+              <a:t>Word Labs  •  wordlabs.app  •  Root: 'tract' = pull, drag, draw</a:t>
             </a:r>
             <a:endParaRPr lang="en-US" sz="800" dirty="0"/>
           </a:p>
@@ -17148,7 +17016,7 @@
                 <a:ea typeface="Calibri" pitchFamily="34" charset="-122"/>
                 <a:cs typeface="Calibri" pitchFamily="34" charset="-120"/>
               </a:rPr>
-              <a:t>The </a:t>
+              <a:t>After much </a:t>
             </a:r>
             <a:pPr algn="l" indent="0" marL="0">
               <a:buNone/>
@@ -17165,7 +17033,7 @@
                 <a:ea typeface="Calibri" pitchFamily="34" charset="-122"/>
                 <a:cs typeface="Calibri" pitchFamily="34" charset="-120"/>
               </a:rPr>
-              <a:t>contract</a:t>
+              <a:t>distraction</a:t>
             </a:r>
             <a:pPr algn="l" indent="0" marL="0">
               <a:buNone/>
@@ -17179,7 +17047,7 @@
                 <a:ea typeface="Calibri" pitchFamily="34" charset="-122"/>
                 <a:cs typeface="Calibri" pitchFamily="34" charset="-120"/>
               </a:rPr>
-              <a:t> stated that the builder should not </a:t>
+              <a:t>, the class managed to </a:t>
             </a:r>
             <a:pPr algn="l" indent="0" marL="0">
               <a:buNone/>
@@ -17196,7 +17064,7 @@
                 <a:ea typeface="Calibri" pitchFamily="34" charset="-122"/>
                 <a:cs typeface="Calibri" pitchFamily="34" charset="-120"/>
               </a:rPr>
-              <a:t>distract</a:t>
+              <a:t>subtract</a:t>
             </a:r>
             <a:pPr algn="l" indent="0" marL="0">
               <a:buNone/>
@@ -17210,7 +17078,7 @@
                 <a:ea typeface="Calibri" pitchFamily="34" charset="-122"/>
                 <a:cs typeface="Calibri" pitchFamily="34" charset="-120"/>
               </a:rPr>
-              <a:t> workers, but the </a:t>
+              <a:t> the numbers and then </a:t>
             </a:r>
             <a:pPr algn="l" indent="0" marL="0">
               <a:buNone/>
@@ -17227,7 +17095,7 @@
                 <a:ea typeface="Calibri" pitchFamily="34" charset="-122"/>
                 <a:cs typeface="Calibri" pitchFamily="34" charset="-120"/>
               </a:rPr>
-              <a:t>tractor</a:t>
+              <a:t>extract</a:t>
             </a:r>
             <a:pPr algn="l" indent="0" marL="0">
               <a:buNone/>
@@ -17241,7 +17109,7 @@
                 <a:ea typeface="Calibri" pitchFamily="34" charset="-122"/>
                 <a:cs typeface="Calibri" pitchFamily="34" charset="-120"/>
               </a:rPr>
-              <a:t> noise made that very difficult.</a:t>
+              <a:t> the correct answer.</a:t>
             </a:r>
             <a:endParaRPr lang="en-US" sz="1800" dirty="0"/>
           </a:p>
@@ -17396,7 +17264,7 @@
                 <a:ea typeface="Trebuchet MS" pitchFamily="34" charset="-122"/>
                 <a:cs typeface="Trebuchet MS" pitchFamily="34" charset="-120"/>
               </a:rPr>
-              <a:t>contract</a:t>
+              <a:t>distraction</a:t>
             </a:r>
             <a:endParaRPr lang="en-US" sz="1400" dirty="0"/>
           </a:p>
@@ -17524,7 +17392,7 @@
                 <a:ea typeface="Trebuchet MS" pitchFamily="34" charset="-122"/>
                 <a:cs typeface="Trebuchet MS" pitchFamily="34" charset="-120"/>
               </a:rPr>
-              <a:t>distract</a:t>
+              <a:t>subtract</a:t>
             </a:r>
             <a:endParaRPr lang="en-US" sz="1400" dirty="0"/>
           </a:p>
@@ -17652,7 +17520,7 @@
                 <a:ea typeface="Trebuchet MS" pitchFamily="34" charset="-122"/>
                 <a:cs typeface="Trebuchet MS" pitchFamily="34" charset="-120"/>
               </a:rPr>
-              <a:t>tractor</a:t>
+              <a:t>extract</a:t>
             </a:r>
             <a:endParaRPr lang="en-US" sz="1400" dirty="0"/>
           </a:p>
@@ -17983,7 +17851,7 @@
                 <a:ea typeface="Calibri" pitchFamily="34" charset="-122"/>
                 <a:cs typeface="Calibri" pitchFamily="34" charset="-120"/>
               </a:rPr>
-              <a:t>Word Labs  •  wordlabs.app  •  Root: 'tract' = to pull or drag</a:t>
+              <a:t>Word Labs  •  wordlabs.app  •  Root: 'tract' = pull, drag, draw</a:t>
             </a:r>
             <a:endParaRPr lang="en-US" sz="800" dirty="0"/>
           </a:p>
@@ -18122,7 +17990,7 @@
                 <a:ea typeface="Trebuchet MS" pitchFamily="34" charset="-122"/>
                 <a:cs typeface="Trebuchet MS" pitchFamily="34" charset="-120"/>
               </a:rPr>
-              <a:t>contract</a:t>
+              <a:t>distraction</a:t>
             </a:r>
             <a:endParaRPr lang="en-US" sz="2800" dirty="0"/>
           </a:p>
@@ -18810,7 +18678,7 @@
                 <a:ea typeface="Calibri" pitchFamily="34" charset="-122"/>
                 <a:cs typeface="Calibri" pitchFamily="34" charset="-120"/>
               </a:rPr>
-              <a:t>Word Labs  •  wordlabs.app  •  Root: 'tract' = to pull or drag</a:t>
+              <a:t>Word Labs  •  wordlabs.app  •  Root: 'tract' = pull, drag, draw</a:t>
             </a:r>
             <a:endParaRPr lang="en-US" sz="800" dirty="0"/>
           </a:p>
@@ -18949,7 +18817,7 @@
                 <a:ea typeface="Trebuchet MS" pitchFamily="34" charset="-122"/>
                 <a:cs typeface="Trebuchet MS" pitchFamily="34" charset="-120"/>
               </a:rPr>
-              <a:t>contract</a:t>
+              <a:t>distraction</a:t>
             </a:r>
             <a:endParaRPr lang="en-US" sz="2800" dirty="0"/>
           </a:p>
@@ -19029,7 +18897,7 @@
         </p:nvSpPr>
         <p:spPr>
           <a:xfrm>
-            <a:off x="2938272" y="2258568"/>
+            <a:off x="2221992" y="2258568"/>
             <a:ext cx="1828800" cy="292608"/>
           </a:xfrm>
           <a:prstGeom prst="rect">
@@ -19063,7 +18931,7 @@
         </p:nvSpPr>
         <p:spPr>
           <a:xfrm>
-            <a:off x="2938272" y="2258568"/>
+            <a:off x="2221992" y="2258568"/>
             <a:ext cx="1828800" cy="292608"/>
           </a:xfrm>
           <a:prstGeom prst="rect">
@@ -19088,7 +18956,7 @@
                 <a:ea typeface="Trebuchet MS" pitchFamily="34" charset="-122"/>
                 <a:cs typeface="Trebuchet MS" pitchFamily="34" charset="-120"/>
               </a:rPr>
-              <a:t>con</a:t>
+              <a:t>dis</a:t>
             </a:r>
             <a:endParaRPr lang="en-US" sz="1300" dirty="0"/>
           </a:p>
@@ -19102,7 +18970,7 @@
         </p:nvSpPr>
         <p:spPr>
           <a:xfrm>
-            <a:off x="2938272" y="2569464"/>
+            <a:off x="2221992" y="2569464"/>
             <a:ext cx="1828800" cy="201168"/>
           </a:xfrm>
           <a:prstGeom prst="rect">
@@ -19127,7 +18995,7 @@
                 <a:ea typeface="Calibri" pitchFamily="34" charset="-122"/>
                 <a:cs typeface="Calibri" pitchFamily="34" charset="-120"/>
               </a:rPr>
-              <a:t>together, with</a:t>
+              <a:t>away, apart</a:t>
             </a:r>
             <a:endParaRPr lang="en-US" sz="850" dirty="0"/>
           </a:p>
@@ -19141,7 +19009,7 @@
         </p:nvSpPr>
         <p:spPr>
           <a:xfrm>
-            <a:off x="5803392" y="2258568"/>
+            <a:off x="4370832" y="2258568"/>
             <a:ext cx="1828800" cy="292608"/>
           </a:xfrm>
           <a:prstGeom prst="rect">
@@ -19175,7 +19043,7 @@
         </p:nvSpPr>
         <p:spPr>
           <a:xfrm>
-            <a:off x="5803392" y="2258568"/>
+            <a:off x="4370832" y="2258568"/>
             <a:ext cx="1828800" cy="292608"/>
           </a:xfrm>
           <a:prstGeom prst="rect">
@@ -19214,7 +19082,7 @@
         </p:nvSpPr>
         <p:spPr>
           <a:xfrm>
-            <a:off x="5803392" y="2569464"/>
+            <a:off x="4370832" y="2569464"/>
             <a:ext cx="1828800" cy="201168"/>
           </a:xfrm>
           <a:prstGeom prst="rect">
@@ -19239,7 +19107,7 @@
                 <a:ea typeface="Calibri" pitchFamily="34" charset="-122"/>
                 <a:cs typeface="Calibri" pitchFamily="34" charset="-120"/>
               </a:rPr>
-              <a:t>to pull or drag</a:t>
+              <a:t>pull, draw</a:t>
             </a:r>
             <a:endParaRPr lang="en-US" sz="850" dirty="0"/>
           </a:p>
@@ -19248,6 +19116,118 @@
       <p:sp>
         <p:nvSpPr>
           <p:cNvPr id="22" name="Shape 20"/>
+          <p:cNvSpPr/>
+          <p:nvPr/>
+        </p:nvSpPr>
+        <p:spPr>
+          <a:xfrm>
+            <a:off x="6519672" y="2258568"/>
+            <a:ext cx="1828800" cy="292608"/>
+          </a:xfrm>
+          <a:prstGeom prst="rect">
+            <a:avLst>
+              <a:gd name="adj" fmla="val 25000"/>
+            </a:avLst>
+          </a:prstGeom>
+          <a:solidFill>
+            <a:srgbClr val="FCE7F3"/>
+          </a:solidFill>
+          <a:ln w="19050">
+            <a:solidFill>
+              <a:srgbClr val="DB2777"/>
+            </a:solidFill>
+            <a:prstDash val="solid"/>
+          </a:ln>
+          <a:effectLst>
+            <a:outerShdw sx="100000" sy="100000" kx="0" ky="0" algn="bl" rotWithShape="0" blurRad="101600" dist="38100" dir="8100000">
+              <a:srgbClr val="000000">
+                <a:alpha val="12000"/>
+              </a:srgbClr>
+            </a:outerShdw>
+          </a:effectLst>
+        </p:spPr>
+      </p:sp>
+      <p:sp>
+        <p:nvSpPr>
+          <p:cNvPr id="23" name="Text 21"/>
+          <p:cNvSpPr/>
+          <p:nvPr/>
+        </p:nvSpPr>
+        <p:spPr>
+          <a:xfrm>
+            <a:off x="6519672" y="2258568"/>
+            <a:ext cx="1828800" cy="292608"/>
+          </a:xfrm>
+          <a:prstGeom prst="rect">
+            <a:avLst/>
+          </a:prstGeom>
+          <a:noFill/>
+          <a:ln/>
+        </p:spPr>
+        <p:txBody>
+          <a:bodyPr wrap="square" lIns="0" tIns="0" rIns="0" bIns="0" rtlCol="0" anchor="ctr"/>
+          <a:lstStyle/>
+          <a:p>
+            <a:pPr algn="ctr" indent="0" marL="0">
+              <a:buNone/>
+            </a:pPr>
+            <a:r>
+              <a:rPr lang="en-US" sz="1300" b="1" dirty="0">
+                <a:solidFill>
+                  <a:srgbClr val="9D174D"/>
+                </a:solidFill>
+                <a:latin typeface="Trebuchet MS" pitchFamily="34" charset="0"/>
+                <a:ea typeface="Trebuchet MS" pitchFamily="34" charset="-122"/>
+                <a:cs typeface="Trebuchet MS" pitchFamily="34" charset="-120"/>
+              </a:rPr>
+              <a:t>ion</a:t>
+            </a:r>
+            <a:endParaRPr lang="en-US" sz="1300" dirty="0"/>
+          </a:p>
+        </p:txBody>
+      </p:sp>
+      <p:sp>
+        <p:nvSpPr>
+          <p:cNvPr id="24" name="Text 22"/>
+          <p:cNvSpPr/>
+          <p:nvPr/>
+        </p:nvSpPr>
+        <p:spPr>
+          <a:xfrm>
+            <a:off x="6519672" y="2569464"/>
+            <a:ext cx="1828800" cy="201168"/>
+          </a:xfrm>
+          <a:prstGeom prst="rect">
+            <a:avLst/>
+          </a:prstGeom>
+          <a:noFill/>
+          <a:ln/>
+        </p:spPr>
+        <p:txBody>
+          <a:bodyPr wrap="square" lIns="0" tIns="0" rIns="0" bIns="0" rtlCol="0" anchor="t"/>
+          <a:lstStyle/>
+          <a:p>
+            <a:pPr algn="ctr" indent="0" marL="0">
+              <a:buNone/>
+            </a:pPr>
+            <a:r>
+              <a:rPr lang="en-US" sz="850" dirty="0">
+                <a:solidFill>
+                  <a:srgbClr val="475569"/>
+                </a:solidFill>
+                <a:latin typeface="Calibri" pitchFamily="34" charset="0"/>
+                <a:ea typeface="Calibri" pitchFamily="34" charset="-122"/>
+                <a:cs typeface="Calibri" pitchFamily="34" charset="-120"/>
+              </a:rPr>
+              <a:t>state or result of</a:t>
+            </a:r>
+            <a:endParaRPr lang="en-US" sz="850" dirty="0"/>
+          </a:p>
+        </p:txBody>
+      </p:sp>
+      <p:sp>
+        <p:nvSpPr>
+          <p:cNvPr id="25" name="Shape 23"/>
           <p:cNvSpPr/>
           <p:nvPr/>
         </p:nvSpPr>
@@ -19274,7 +19254,7 @@
       </p:sp>
       <p:sp>
         <p:nvSpPr>
-          <p:cNvPr id="23" name="Text 21"/>
+          <p:cNvPr id="26" name="Text 24"/>
           <p:cNvSpPr/>
           <p:nvPr/>
         </p:nvSpPr>
@@ -19313,7 +19293,7 @@
       </p:sp>
       <p:sp>
         <p:nvSpPr>
-          <p:cNvPr id="24" name="Shape 22"/>
+          <p:cNvPr id="27" name="Shape 25"/>
           <p:cNvSpPr/>
           <p:nvPr/>
         </p:nvSpPr>
@@ -19340,7 +19320,7 @@
       </p:sp>
       <p:sp>
         <p:nvSpPr>
-          <p:cNvPr id="25" name="Text 23"/>
+          <p:cNvPr id="28" name="Text 26"/>
           <p:cNvSpPr/>
           <p:nvPr/>
         </p:nvSpPr>
@@ -19379,7 +19359,7 @@
       </p:sp>
       <p:sp>
         <p:nvSpPr>
-          <p:cNvPr id="26" name="Shape 24"/>
+          <p:cNvPr id="29" name="Shape 27"/>
           <p:cNvSpPr/>
           <p:nvPr/>
         </p:nvSpPr>
@@ -19406,7 +19386,7 @@
       </p:sp>
       <p:sp>
         <p:nvSpPr>
-          <p:cNvPr id="27" name="Text 25"/>
+          <p:cNvPr id="30" name="Text 28"/>
           <p:cNvSpPr/>
           <p:nvPr/>
         </p:nvSpPr>
@@ -19445,7 +19425,7 @@
       </p:sp>
       <p:sp>
         <p:nvSpPr>
-          <p:cNvPr id="28" name="Shape 26"/>
+          <p:cNvPr id="31" name="Shape 29"/>
           <p:cNvSpPr/>
           <p:nvPr/>
         </p:nvSpPr>
@@ -19472,7 +19452,7 @@
       </p:sp>
       <p:sp>
         <p:nvSpPr>
-          <p:cNvPr id="29" name="Text 27"/>
+          <p:cNvPr id="32" name="Text 30"/>
           <p:cNvSpPr/>
           <p:nvPr/>
         </p:nvSpPr>
@@ -19795,7 +19775,7 @@
                 <a:ea typeface="Calibri" pitchFamily="34" charset="-122"/>
                 <a:cs typeface="Calibri" pitchFamily="34" charset="-120"/>
               </a:rPr>
-              <a:t>Word Labs  •  wordlabs.app  •  Root: 'tract' = to pull or drag</a:t>
+              <a:t>Word Labs  •  wordlabs.app  •  Root: 'tract' = pull, drag, draw</a:t>
             </a:r>
             <a:endParaRPr lang="en-US" sz="800" dirty="0"/>
           </a:p>
@@ -19934,7 +19914,7 @@
                 <a:ea typeface="Trebuchet MS" pitchFamily="34" charset="-122"/>
                 <a:cs typeface="Trebuchet MS" pitchFamily="34" charset="-120"/>
               </a:rPr>
-              <a:t>contract</a:t>
+              <a:t>distraction</a:t>
             </a:r>
             <a:endParaRPr lang="en-US" sz="2800" dirty="0"/>
           </a:p>
@@ -20014,7 +19994,7 @@
         </p:nvSpPr>
         <p:spPr>
           <a:xfrm>
-            <a:off x="2938272" y="2258568"/>
+            <a:off x="2221992" y="2258568"/>
             <a:ext cx="1828800" cy="292608"/>
           </a:xfrm>
           <a:prstGeom prst="rect">
@@ -20048,7 +20028,7 @@
         </p:nvSpPr>
         <p:spPr>
           <a:xfrm>
-            <a:off x="2938272" y="2258568"/>
+            <a:off x="2221992" y="2258568"/>
             <a:ext cx="1828800" cy="292608"/>
           </a:xfrm>
           <a:prstGeom prst="rect">
@@ -20073,7 +20053,7 @@
                 <a:ea typeface="Trebuchet MS" pitchFamily="34" charset="-122"/>
                 <a:cs typeface="Trebuchet MS" pitchFamily="34" charset="-120"/>
               </a:rPr>
-              <a:t>con</a:t>
+              <a:t>dis</a:t>
             </a:r>
             <a:endParaRPr lang="en-US" sz="1300" dirty="0"/>
           </a:p>
@@ -20087,7 +20067,7 @@
         </p:nvSpPr>
         <p:spPr>
           <a:xfrm>
-            <a:off x="2938272" y="2569464"/>
+            <a:off x="2221992" y="2569464"/>
             <a:ext cx="1828800" cy="201168"/>
           </a:xfrm>
           <a:prstGeom prst="rect">
@@ -20112,7 +20092,7 @@
                 <a:ea typeface="Calibri" pitchFamily="34" charset="-122"/>
                 <a:cs typeface="Calibri" pitchFamily="34" charset="-120"/>
               </a:rPr>
-              <a:t>together, with</a:t>
+              <a:t>away, apart</a:t>
             </a:r>
             <a:endParaRPr lang="en-US" sz="850" dirty="0"/>
           </a:p>
@@ -20126,7 +20106,7 @@
         </p:nvSpPr>
         <p:spPr>
           <a:xfrm>
-            <a:off x="5803392" y="2258568"/>
+            <a:off x="4370832" y="2258568"/>
             <a:ext cx="1828800" cy="292608"/>
           </a:xfrm>
           <a:prstGeom prst="rect">
@@ -20160,7 +20140,7 @@
         </p:nvSpPr>
         <p:spPr>
           <a:xfrm>
-            <a:off x="5803392" y="2258568"/>
+            <a:off x="4370832" y="2258568"/>
             <a:ext cx="1828800" cy="292608"/>
           </a:xfrm>
           <a:prstGeom prst="rect">
@@ -20199,7 +20179,7 @@
         </p:nvSpPr>
         <p:spPr>
           <a:xfrm>
-            <a:off x="5803392" y="2569464"/>
+            <a:off x="4370832" y="2569464"/>
             <a:ext cx="1828800" cy="201168"/>
           </a:xfrm>
           <a:prstGeom prst="rect">
@@ -20224,7 +20204,7 @@
                 <a:ea typeface="Calibri" pitchFamily="34" charset="-122"/>
                 <a:cs typeface="Calibri" pitchFamily="34" charset="-120"/>
               </a:rPr>
-              <a:t>to pull or drag</a:t>
+              <a:t>pull, draw</a:t>
             </a:r>
             <a:endParaRPr lang="en-US" sz="850" dirty="0"/>
           </a:p>
@@ -20233,6 +20213,118 @@
       <p:sp>
         <p:nvSpPr>
           <p:cNvPr id="22" name="Shape 20"/>
+          <p:cNvSpPr/>
+          <p:nvPr/>
+        </p:nvSpPr>
+        <p:spPr>
+          <a:xfrm>
+            <a:off x="6519672" y="2258568"/>
+            <a:ext cx="1828800" cy="292608"/>
+          </a:xfrm>
+          <a:prstGeom prst="rect">
+            <a:avLst>
+              <a:gd name="adj" fmla="val 25000"/>
+            </a:avLst>
+          </a:prstGeom>
+          <a:solidFill>
+            <a:srgbClr val="FCE7F3"/>
+          </a:solidFill>
+          <a:ln w="19050">
+            <a:solidFill>
+              <a:srgbClr val="DB2777"/>
+            </a:solidFill>
+            <a:prstDash val="solid"/>
+          </a:ln>
+          <a:effectLst>
+            <a:outerShdw sx="100000" sy="100000" kx="0" ky="0" algn="bl" rotWithShape="0" blurRad="101600" dist="38100" dir="8100000">
+              <a:srgbClr val="000000">
+                <a:alpha val="12000"/>
+              </a:srgbClr>
+            </a:outerShdw>
+          </a:effectLst>
+        </p:spPr>
+      </p:sp>
+      <p:sp>
+        <p:nvSpPr>
+          <p:cNvPr id="23" name="Text 21"/>
+          <p:cNvSpPr/>
+          <p:nvPr/>
+        </p:nvSpPr>
+        <p:spPr>
+          <a:xfrm>
+            <a:off x="6519672" y="2258568"/>
+            <a:ext cx="1828800" cy="292608"/>
+          </a:xfrm>
+          <a:prstGeom prst="rect">
+            <a:avLst/>
+          </a:prstGeom>
+          <a:noFill/>
+          <a:ln/>
+        </p:spPr>
+        <p:txBody>
+          <a:bodyPr wrap="square" lIns="0" tIns="0" rIns="0" bIns="0" rtlCol="0" anchor="ctr"/>
+          <a:lstStyle/>
+          <a:p>
+            <a:pPr algn="ctr" indent="0" marL="0">
+              <a:buNone/>
+            </a:pPr>
+            <a:r>
+              <a:rPr lang="en-US" sz="1300" b="1" dirty="0">
+                <a:solidFill>
+                  <a:srgbClr val="9D174D"/>
+                </a:solidFill>
+                <a:latin typeface="Trebuchet MS" pitchFamily="34" charset="0"/>
+                <a:ea typeface="Trebuchet MS" pitchFamily="34" charset="-122"/>
+                <a:cs typeface="Trebuchet MS" pitchFamily="34" charset="-120"/>
+              </a:rPr>
+              <a:t>ion</a:t>
+            </a:r>
+            <a:endParaRPr lang="en-US" sz="1300" dirty="0"/>
+          </a:p>
+        </p:txBody>
+      </p:sp>
+      <p:sp>
+        <p:nvSpPr>
+          <p:cNvPr id="24" name="Text 22"/>
+          <p:cNvSpPr/>
+          <p:nvPr/>
+        </p:nvSpPr>
+        <p:spPr>
+          <a:xfrm>
+            <a:off x="6519672" y="2569464"/>
+            <a:ext cx="1828800" cy="201168"/>
+          </a:xfrm>
+          <a:prstGeom prst="rect">
+            <a:avLst/>
+          </a:prstGeom>
+          <a:noFill/>
+          <a:ln/>
+        </p:spPr>
+        <p:txBody>
+          <a:bodyPr wrap="square" lIns="0" tIns="0" rIns="0" bIns="0" rtlCol="0" anchor="t"/>
+          <a:lstStyle/>
+          <a:p>
+            <a:pPr algn="ctr" indent="0" marL="0">
+              <a:buNone/>
+            </a:pPr>
+            <a:r>
+              <a:rPr lang="en-US" sz="850" dirty="0">
+                <a:solidFill>
+                  <a:srgbClr val="475569"/>
+                </a:solidFill>
+                <a:latin typeface="Calibri" pitchFamily="34" charset="0"/>
+                <a:ea typeface="Calibri" pitchFamily="34" charset="-122"/>
+                <a:cs typeface="Calibri" pitchFamily="34" charset="-120"/>
+              </a:rPr>
+              <a:t>state or result of</a:t>
+            </a:r>
+            <a:endParaRPr lang="en-US" sz="850" dirty="0"/>
+          </a:p>
+        </p:txBody>
+      </p:sp>
+      <p:sp>
+        <p:nvSpPr>
+          <p:cNvPr id="25" name="Shape 23"/>
           <p:cNvSpPr/>
           <p:nvPr/>
         </p:nvSpPr>
@@ -20259,7 +20351,7 @@
       </p:sp>
       <p:sp>
         <p:nvSpPr>
-          <p:cNvPr id="23" name="Text 21"/>
+          <p:cNvPr id="26" name="Text 24"/>
           <p:cNvSpPr/>
           <p:nvPr/>
         </p:nvSpPr>
@@ -20298,7 +20390,7 @@
       </p:sp>
       <p:sp>
         <p:nvSpPr>
-          <p:cNvPr id="24" name="Shape 22"/>
+          <p:cNvPr id="27" name="Shape 25"/>
           <p:cNvSpPr/>
           <p:nvPr/>
         </p:nvSpPr>
@@ -20325,13 +20417,13 @@
       </p:sp>
       <p:sp>
         <p:nvSpPr>
-          <p:cNvPr id="25" name="Shape 23"/>
-          <p:cNvSpPr/>
-          <p:nvPr/>
-        </p:nvSpPr>
-        <p:spPr>
-          <a:xfrm>
-            <a:off x="2999232" y="3364992"/>
+          <p:cNvPr id="28" name="Shape 26"/>
+          <p:cNvSpPr/>
+          <p:nvPr/>
+        </p:nvSpPr>
+        <p:spPr>
+          <a:xfrm>
+            <a:off x="2313432" y="3364992"/>
             <a:ext cx="1645920" cy="475488"/>
           </a:xfrm>
           <a:prstGeom prst="rect">
@@ -20352,13 +20444,13 @@
       </p:sp>
       <p:sp>
         <p:nvSpPr>
-          <p:cNvPr id="26" name="Text 24"/>
-          <p:cNvSpPr/>
-          <p:nvPr/>
-        </p:nvSpPr>
-        <p:spPr>
-          <a:xfrm>
-            <a:off x="2999232" y="3364992"/>
+          <p:cNvPr id="29" name="Text 27"/>
+          <p:cNvSpPr/>
+          <p:nvPr/>
+        </p:nvSpPr>
+        <p:spPr>
+          <a:xfrm>
+            <a:off x="2313432" y="3364992"/>
             <a:ext cx="1645920" cy="475488"/>
           </a:xfrm>
           <a:prstGeom prst="rect">
@@ -20383,7 +20475,7 @@
                 <a:ea typeface="Trebuchet MS" pitchFamily="34" charset="-122"/>
                 <a:cs typeface="Trebuchet MS" pitchFamily="34" charset="-120"/>
               </a:rPr>
-              <a:t>con</a:t>
+              <a:t>dis</a:t>
             </a:r>
             <a:endParaRPr lang="en-US" sz="1400" dirty="0"/>
           </a:p>
@@ -20391,14 +20483,14 @@
       </p:sp>
       <p:sp>
         <p:nvSpPr>
-          <p:cNvPr id="27" name="Text 25"/>
-          <p:cNvSpPr/>
-          <p:nvPr/>
-        </p:nvSpPr>
-        <p:spPr>
-          <a:xfrm>
-            <a:off x="4645152" y="3364992"/>
-            <a:ext cx="1097280" cy="475488"/>
+          <p:cNvPr id="30" name="Text 28"/>
+          <p:cNvSpPr/>
+          <p:nvPr/>
+        </p:nvSpPr>
+        <p:spPr>
+          <a:xfrm>
+            <a:off x="3959352" y="3364992"/>
+            <a:ext cx="411480" cy="475488"/>
           </a:xfrm>
           <a:prstGeom prst="rect">
             <a:avLst/>
@@ -20430,13 +20522,13 @@
       </p:sp>
       <p:sp>
         <p:nvSpPr>
-          <p:cNvPr id="28" name="Shape 26"/>
-          <p:cNvSpPr/>
-          <p:nvPr/>
-        </p:nvSpPr>
-        <p:spPr>
-          <a:xfrm>
-            <a:off x="5742432" y="3364992"/>
+          <p:cNvPr id="31" name="Shape 29"/>
+          <p:cNvSpPr/>
+          <p:nvPr/>
+        </p:nvSpPr>
+        <p:spPr>
+          <a:xfrm>
+            <a:off x="4370832" y="3364992"/>
             <a:ext cx="1645920" cy="475488"/>
           </a:xfrm>
           <a:prstGeom prst="rect">
@@ -20457,13 +20549,13 @@
       </p:sp>
       <p:sp>
         <p:nvSpPr>
-          <p:cNvPr id="29" name="Text 27"/>
-          <p:cNvSpPr/>
-          <p:nvPr/>
-        </p:nvSpPr>
-        <p:spPr>
-          <a:xfrm>
-            <a:off x="5742432" y="3364992"/>
+          <p:cNvPr id="32" name="Text 30"/>
+          <p:cNvSpPr/>
+          <p:nvPr/>
+        </p:nvSpPr>
+        <p:spPr>
+          <a:xfrm>
+            <a:off x="4370832" y="3364992"/>
             <a:ext cx="1645920" cy="475488"/>
           </a:xfrm>
           <a:prstGeom prst="rect">
@@ -20488,7 +20580,7 @@
                 <a:ea typeface="Trebuchet MS" pitchFamily="34" charset="-122"/>
                 <a:cs typeface="Trebuchet MS" pitchFamily="34" charset="-120"/>
               </a:rPr>
-              <a:t>tract</a:t>
+              <a:t>trac</a:t>
             </a:r>
             <a:endParaRPr lang="en-US" sz="1400" dirty="0"/>
           </a:p>
@@ -20496,7 +20588,112 @@
       </p:sp>
       <p:sp>
         <p:nvSpPr>
-          <p:cNvPr id="30" name="Shape 28"/>
+          <p:cNvPr id="33" name="Text 31"/>
+          <p:cNvSpPr/>
+          <p:nvPr/>
+        </p:nvSpPr>
+        <p:spPr>
+          <a:xfrm>
+            <a:off x="6016752" y="3364992"/>
+            <a:ext cx="411480" cy="475488"/>
+          </a:xfrm>
+          <a:prstGeom prst="rect">
+            <a:avLst/>
+          </a:prstGeom>
+          <a:noFill/>
+          <a:ln/>
+        </p:spPr>
+        <p:txBody>
+          <a:bodyPr wrap="square" lIns="0" tIns="0" rIns="0" bIns="0" rtlCol="0" anchor="ctr"/>
+          <a:lstStyle/>
+          <a:p>
+            <a:pPr algn="ctr" indent="0" marL="0">
+              <a:buNone/>
+            </a:pPr>
+            <a:r>
+              <a:rPr lang="en-US" sz="1600" b="1" dirty="0">
+                <a:solidFill>
+                  <a:srgbClr val="0D9488"/>
+                </a:solidFill>
+                <a:latin typeface="Trebuchet MS" pitchFamily="34" charset="0"/>
+                <a:ea typeface="Trebuchet MS" pitchFamily="34" charset="-122"/>
+                <a:cs typeface="Trebuchet MS" pitchFamily="34" charset="-120"/>
+              </a:rPr>
+              <a:t>·</a:t>
+            </a:r>
+            <a:endParaRPr lang="en-US" sz="1600" dirty="0"/>
+          </a:p>
+        </p:txBody>
+      </p:sp>
+      <p:sp>
+        <p:nvSpPr>
+          <p:cNvPr id="34" name="Shape 32"/>
+          <p:cNvSpPr/>
+          <p:nvPr/>
+        </p:nvSpPr>
+        <p:spPr>
+          <a:xfrm>
+            <a:off x="6428232" y="3364992"/>
+            <a:ext cx="1645920" cy="475488"/>
+          </a:xfrm>
+          <a:prstGeom prst="rect">
+            <a:avLst>
+              <a:gd name="adj" fmla="val 9615"/>
+            </a:avLst>
+          </a:prstGeom>
+          <a:solidFill>
+            <a:srgbClr val="FFFFFF"/>
+          </a:solidFill>
+          <a:ln w="12700">
+            <a:solidFill>
+              <a:srgbClr val="0D9488"/>
+            </a:solidFill>
+            <a:prstDash val="solid"/>
+          </a:ln>
+        </p:spPr>
+      </p:sp>
+      <p:sp>
+        <p:nvSpPr>
+          <p:cNvPr id="35" name="Text 33"/>
+          <p:cNvSpPr/>
+          <p:nvPr/>
+        </p:nvSpPr>
+        <p:spPr>
+          <a:xfrm>
+            <a:off x="6428232" y="3364992"/>
+            <a:ext cx="1645920" cy="475488"/>
+          </a:xfrm>
+          <a:prstGeom prst="rect">
+            <a:avLst/>
+          </a:prstGeom>
+          <a:noFill/>
+          <a:ln/>
+        </p:spPr>
+        <p:txBody>
+          <a:bodyPr wrap="square" lIns="0" tIns="0" rIns="0" bIns="0" rtlCol="0" anchor="ctr"/>
+          <a:lstStyle/>
+          <a:p>
+            <a:pPr algn="ctr" indent="0" marL="0">
+              <a:buNone/>
+            </a:pPr>
+            <a:r>
+              <a:rPr lang="en-US" sz="1400" b="1" dirty="0">
+                <a:solidFill>
+                  <a:srgbClr val="0D9488"/>
+                </a:solidFill>
+                <a:latin typeface="Trebuchet MS" pitchFamily="34" charset="0"/>
+                <a:ea typeface="Trebuchet MS" pitchFamily="34" charset="-122"/>
+                <a:cs typeface="Trebuchet MS" pitchFamily="34" charset="-120"/>
+              </a:rPr>
+              <a:t>tion</a:t>
+            </a:r>
+            <a:endParaRPr lang="en-US" sz="1400" dirty="0"/>
+          </a:p>
+        </p:txBody>
+      </p:sp>
+      <p:sp>
+        <p:nvSpPr>
+          <p:cNvPr id="36" name="Shape 34"/>
           <p:cNvSpPr/>
           <p:nvPr/>
         </p:nvSpPr>
@@ -20523,7 +20720,7 @@
       </p:sp>
       <p:sp>
         <p:nvSpPr>
-          <p:cNvPr id="31" name="Text 29"/>
+          <p:cNvPr id="37" name="Text 35"/>
           <p:cNvSpPr/>
           <p:nvPr/>
         </p:nvSpPr>
@@ -20562,7 +20759,7 @@
       </p:sp>
       <p:sp>
         <p:nvSpPr>
-          <p:cNvPr id="32" name="Shape 30"/>
+          <p:cNvPr id="38" name="Shape 36"/>
           <p:cNvSpPr/>
           <p:nvPr/>
         </p:nvSpPr>
@@ -20589,7 +20786,7 @@
       </p:sp>
       <p:sp>
         <p:nvSpPr>
-          <p:cNvPr id="33" name="Text 31"/>
+          <p:cNvPr id="39" name="Text 37"/>
           <p:cNvSpPr/>
           <p:nvPr/>
         </p:nvSpPr>
@@ -20912,7 +21109,7 @@
                 <a:ea typeface="Calibri" pitchFamily="34" charset="-122"/>
                 <a:cs typeface="Calibri" pitchFamily="34" charset="-120"/>
               </a:rPr>
-              <a:t>Word Labs  •  wordlabs.app  •  Root: 'tract' = to pull or drag</a:t>
+              <a:t>Word Labs  •  wordlabs.app  •  Root: 'tract' = pull, drag, draw</a:t>
             </a:r>
             <a:endParaRPr lang="en-US" sz="800" dirty="0"/>
           </a:p>
@@ -21051,7 +21248,7 @@
                 <a:ea typeface="Trebuchet MS" pitchFamily="34" charset="-122"/>
                 <a:cs typeface="Trebuchet MS" pitchFamily="34" charset="-120"/>
               </a:rPr>
-              <a:t>contract</a:t>
+              <a:t>distraction</a:t>
             </a:r>
             <a:endParaRPr lang="en-US" sz="2800" dirty="0"/>
           </a:p>
@@ -21131,7 +21328,7 @@
         </p:nvSpPr>
         <p:spPr>
           <a:xfrm>
-            <a:off x="2938272" y="2258568"/>
+            <a:off x="2221992" y="2258568"/>
             <a:ext cx="1828800" cy="292608"/>
           </a:xfrm>
           <a:prstGeom prst="rect">
@@ -21165,7 +21362,7 @@
         </p:nvSpPr>
         <p:spPr>
           <a:xfrm>
-            <a:off x="2938272" y="2258568"/>
+            <a:off x="2221992" y="2258568"/>
             <a:ext cx="1828800" cy="292608"/>
           </a:xfrm>
           <a:prstGeom prst="rect">
@@ -21190,7 +21387,7 @@
                 <a:ea typeface="Trebuchet MS" pitchFamily="34" charset="-122"/>
                 <a:cs typeface="Trebuchet MS" pitchFamily="34" charset="-120"/>
               </a:rPr>
-              <a:t>con</a:t>
+              <a:t>dis</a:t>
             </a:r>
             <a:endParaRPr lang="en-US" sz="1300" dirty="0"/>
           </a:p>
@@ -21204,7 +21401,7 @@
         </p:nvSpPr>
         <p:spPr>
           <a:xfrm>
-            <a:off x="2938272" y="2569464"/>
+            <a:off x="2221992" y="2569464"/>
             <a:ext cx="1828800" cy="201168"/>
           </a:xfrm>
           <a:prstGeom prst="rect">
@@ -21229,7 +21426,7 @@
                 <a:ea typeface="Calibri" pitchFamily="34" charset="-122"/>
                 <a:cs typeface="Calibri" pitchFamily="34" charset="-120"/>
               </a:rPr>
-              <a:t>together, with</a:t>
+              <a:t>away, apart</a:t>
             </a:r>
             <a:endParaRPr lang="en-US" sz="850" dirty="0"/>
           </a:p>
@@ -21243,7 +21440,7 @@
         </p:nvSpPr>
         <p:spPr>
           <a:xfrm>
-            <a:off x="5803392" y="2258568"/>
+            <a:off x="4370832" y="2258568"/>
             <a:ext cx="1828800" cy="292608"/>
           </a:xfrm>
           <a:prstGeom prst="rect">
@@ -21277,7 +21474,7 @@
         </p:nvSpPr>
         <p:spPr>
           <a:xfrm>
-            <a:off x="5803392" y="2258568"/>
+            <a:off x="4370832" y="2258568"/>
             <a:ext cx="1828800" cy="292608"/>
           </a:xfrm>
           <a:prstGeom prst="rect">
@@ -21316,7 +21513,7 @@
         </p:nvSpPr>
         <p:spPr>
           <a:xfrm>
-            <a:off x="5803392" y="2569464"/>
+            <a:off x="4370832" y="2569464"/>
             <a:ext cx="1828800" cy="201168"/>
           </a:xfrm>
           <a:prstGeom prst="rect">
@@ -21341,7 +21538,7 @@
                 <a:ea typeface="Calibri" pitchFamily="34" charset="-122"/>
                 <a:cs typeface="Calibri" pitchFamily="34" charset="-120"/>
               </a:rPr>
-              <a:t>to pull or drag</a:t>
+              <a:t>pull, draw</a:t>
             </a:r>
             <a:endParaRPr lang="en-US" sz="850" dirty="0"/>
           </a:p>
@@ -21350,6 +21547,118 @@
       <p:sp>
         <p:nvSpPr>
           <p:cNvPr id="22" name="Shape 20"/>
+          <p:cNvSpPr/>
+          <p:nvPr/>
+        </p:nvSpPr>
+        <p:spPr>
+          <a:xfrm>
+            <a:off x="6519672" y="2258568"/>
+            <a:ext cx="1828800" cy="292608"/>
+          </a:xfrm>
+          <a:prstGeom prst="rect">
+            <a:avLst>
+              <a:gd name="adj" fmla="val 25000"/>
+            </a:avLst>
+          </a:prstGeom>
+          <a:solidFill>
+            <a:srgbClr val="FCE7F3"/>
+          </a:solidFill>
+          <a:ln w="19050">
+            <a:solidFill>
+              <a:srgbClr val="DB2777"/>
+            </a:solidFill>
+            <a:prstDash val="solid"/>
+          </a:ln>
+          <a:effectLst>
+            <a:outerShdw sx="100000" sy="100000" kx="0" ky="0" algn="bl" rotWithShape="0" blurRad="101600" dist="38100" dir="8100000">
+              <a:srgbClr val="000000">
+                <a:alpha val="12000"/>
+              </a:srgbClr>
+            </a:outerShdw>
+          </a:effectLst>
+        </p:spPr>
+      </p:sp>
+      <p:sp>
+        <p:nvSpPr>
+          <p:cNvPr id="23" name="Text 21"/>
+          <p:cNvSpPr/>
+          <p:nvPr/>
+        </p:nvSpPr>
+        <p:spPr>
+          <a:xfrm>
+            <a:off x="6519672" y="2258568"/>
+            <a:ext cx="1828800" cy="292608"/>
+          </a:xfrm>
+          <a:prstGeom prst="rect">
+            <a:avLst/>
+          </a:prstGeom>
+          <a:noFill/>
+          <a:ln/>
+        </p:spPr>
+        <p:txBody>
+          <a:bodyPr wrap="square" lIns="0" tIns="0" rIns="0" bIns="0" rtlCol="0" anchor="ctr"/>
+          <a:lstStyle/>
+          <a:p>
+            <a:pPr algn="ctr" indent="0" marL="0">
+              <a:buNone/>
+            </a:pPr>
+            <a:r>
+              <a:rPr lang="en-US" sz="1300" b="1" dirty="0">
+                <a:solidFill>
+                  <a:srgbClr val="9D174D"/>
+                </a:solidFill>
+                <a:latin typeface="Trebuchet MS" pitchFamily="34" charset="0"/>
+                <a:ea typeface="Trebuchet MS" pitchFamily="34" charset="-122"/>
+                <a:cs typeface="Trebuchet MS" pitchFamily="34" charset="-120"/>
+              </a:rPr>
+              <a:t>ion</a:t>
+            </a:r>
+            <a:endParaRPr lang="en-US" sz="1300" dirty="0"/>
+          </a:p>
+        </p:txBody>
+      </p:sp>
+      <p:sp>
+        <p:nvSpPr>
+          <p:cNvPr id="24" name="Text 22"/>
+          <p:cNvSpPr/>
+          <p:nvPr/>
+        </p:nvSpPr>
+        <p:spPr>
+          <a:xfrm>
+            <a:off x="6519672" y="2569464"/>
+            <a:ext cx="1828800" cy="201168"/>
+          </a:xfrm>
+          <a:prstGeom prst="rect">
+            <a:avLst/>
+          </a:prstGeom>
+          <a:noFill/>
+          <a:ln/>
+        </p:spPr>
+        <p:txBody>
+          <a:bodyPr wrap="square" lIns="0" tIns="0" rIns="0" bIns="0" rtlCol="0" anchor="t"/>
+          <a:lstStyle/>
+          <a:p>
+            <a:pPr algn="ctr" indent="0" marL="0">
+              <a:buNone/>
+            </a:pPr>
+            <a:r>
+              <a:rPr lang="en-US" sz="850" dirty="0">
+                <a:solidFill>
+                  <a:srgbClr val="475569"/>
+                </a:solidFill>
+                <a:latin typeface="Calibri" pitchFamily="34" charset="0"/>
+                <a:ea typeface="Calibri" pitchFamily="34" charset="-122"/>
+                <a:cs typeface="Calibri" pitchFamily="34" charset="-120"/>
+              </a:rPr>
+              <a:t>state or result of</a:t>
+            </a:r>
+            <a:endParaRPr lang="en-US" sz="850" dirty="0"/>
+          </a:p>
+        </p:txBody>
+      </p:sp>
+      <p:sp>
+        <p:nvSpPr>
+          <p:cNvPr id="25" name="Shape 23"/>
           <p:cNvSpPr/>
           <p:nvPr/>
         </p:nvSpPr>
@@ -21376,7 +21685,7 @@
       </p:sp>
       <p:sp>
         <p:nvSpPr>
-          <p:cNvPr id="23" name="Text 21"/>
+          <p:cNvPr id="26" name="Text 24"/>
           <p:cNvSpPr/>
           <p:nvPr/>
         </p:nvSpPr>
@@ -21415,7 +21724,7 @@
       </p:sp>
       <p:sp>
         <p:nvSpPr>
-          <p:cNvPr id="24" name="Shape 22"/>
+          <p:cNvPr id="27" name="Shape 25"/>
           <p:cNvSpPr/>
           <p:nvPr/>
         </p:nvSpPr>
@@ -21442,13 +21751,13 @@
       </p:sp>
       <p:sp>
         <p:nvSpPr>
-          <p:cNvPr id="25" name="Shape 23"/>
-          <p:cNvSpPr/>
-          <p:nvPr/>
-        </p:nvSpPr>
-        <p:spPr>
-          <a:xfrm>
-            <a:off x="2999232" y="3364992"/>
+          <p:cNvPr id="28" name="Shape 26"/>
+          <p:cNvSpPr/>
+          <p:nvPr/>
+        </p:nvSpPr>
+        <p:spPr>
+          <a:xfrm>
+            <a:off x="2313432" y="3364992"/>
             <a:ext cx="1645920" cy="475488"/>
           </a:xfrm>
           <a:prstGeom prst="rect">
@@ -21469,13 +21778,13 @@
       </p:sp>
       <p:sp>
         <p:nvSpPr>
-          <p:cNvPr id="26" name="Text 24"/>
-          <p:cNvSpPr/>
-          <p:nvPr/>
-        </p:nvSpPr>
-        <p:spPr>
-          <a:xfrm>
-            <a:off x="2999232" y="3364992"/>
+          <p:cNvPr id="29" name="Text 27"/>
+          <p:cNvSpPr/>
+          <p:nvPr/>
+        </p:nvSpPr>
+        <p:spPr>
+          <a:xfrm>
+            <a:off x="2313432" y="3364992"/>
             <a:ext cx="1645920" cy="475488"/>
           </a:xfrm>
           <a:prstGeom prst="rect">
@@ -21500,7 +21809,7 @@
                 <a:ea typeface="Trebuchet MS" pitchFamily="34" charset="-122"/>
                 <a:cs typeface="Trebuchet MS" pitchFamily="34" charset="-120"/>
               </a:rPr>
-              <a:t>con</a:t>
+              <a:t>dis</a:t>
             </a:r>
             <a:endParaRPr lang="en-US" sz="1400" dirty="0"/>
           </a:p>
@@ -21508,14 +21817,14 @@
       </p:sp>
       <p:sp>
         <p:nvSpPr>
-          <p:cNvPr id="27" name="Text 25"/>
-          <p:cNvSpPr/>
-          <p:nvPr/>
-        </p:nvSpPr>
-        <p:spPr>
-          <a:xfrm>
-            <a:off x="4645152" y="3364992"/>
-            <a:ext cx="1097280" cy="475488"/>
+          <p:cNvPr id="30" name="Text 28"/>
+          <p:cNvSpPr/>
+          <p:nvPr/>
+        </p:nvSpPr>
+        <p:spPr>
+          <a:xfrm>
+            <a:off x="3959352" y="3364992"/>
+            <a:ext cx="411480" cy="475488"/>
           </a:xfrm>
           <a:prstGeom prst="rect">
             <a:avLst/>
@@ -21547,13 +21856,13 @@
       </p:sp>
       <p:sp>
         <p:nvSpPr>
-          <p:cNvPr id="28" name="Shape 26"/>
-          <p:cNvSpPr/>
-          <p:nvPr/>
-        </p:nvSpPr>
-        <p:spPr>
-          <a:xfrm>
-            <a:off x="5742432" y="3364992"/>
+          <p:cNvPr id="31" name="Shape 29"/>
+          <p:cNvSpPr/>
+          <p:nvPr/>
+        </p:nvSpPr>
+        <p:spPr>
+          <a:xfrm>
+            <a:off x="4370832" y="3364992"/>
             <a:ext cx="1645920" cy="475488"/>
           </a:xfrm>
           <a:prstGeom prst="rect">
@@ -21574,13 +21883,13 @@
       </p:sp>
       <p:sp>
         <p:nvSpPr>
-          <p:cNvPr id="29" name="Text 27"/>
-          <p:cNvSpPr/>
-          <p:nvPr/>
-        </p:nvSpPr>
-        <p:spPr>
-          <a:xfrm>
-            <a:off x="5742432" y="3364992"/>
+          <p:cNvPr id="32" name="Text 30"/>
+          <p:cNvSpPr/>
+          <p:nvPr/>
+        </p:nvSpPr>
+        <p:spPr>
+          <a:xfrm>
+            <a:off x="4370832" y="3364992"/>
             <a:ext cx="1645920" cy="475488"/>
           </a:xfrm>
           <a:prstGeom prst="rect">
@@ -21605,7 +21914,7 @@
                 <a:ea typeface="Trebuchet MS" pitchFamily="34" charset="-122"/>
                 <a:cs typeface="Trebuchet MS" pitchFamily="34" charset="-120"/>
               </a:rPr>
-              <a:t>tract</a:t>
+              <a:t>trac</a:t>
             </a:r>
             <a:endParaRPr lang="en-US" sz="1400" dirty="0"/>
           </a:p>
@@ -21613,7 +21922,112 @@
       </p:sp>
       <p:sp>
         <p:nvSpPr>
-          <p:cNvPr id="30" name="Shape 28"/>
+          <p:cNvPr id="33" name="Text 31"/>
+          <p:cNvSpPr/>
+          <p:nvPr/>
+        </p:nvSpPr>
+        <p:spPr>
+          <a:xfrm>
+            <a:off x="6016752" y="3364992"/>
+            <a:ext cx="411480" cy="475488"/>
+          </a:xfrm>
+          <a:prstGeom prst="rect">
+            <a:avLst/>
+          </a:prstGeom>
+          <a:noFill/>
+          <a:ln/>
+        </p:spPr>
+        <p:txBody>
+          <a:bodyPr wrap="square" lIns="0" tIns="0" rIns="0" bIns="0" rtlCol="0" anchor="ctr"/>
+          <a:lstStyle/>
+          <a:p>
+            <a:pPr algn="ctr" indent="0" marL="0">
+              <a:buNone/>
+            </a:pPr>
+            <a:r>
+              <a:rPr lang="en-US" sz="1600" b="1" dirty="0">
+                <a:solidFill>
+                  <a:srgbClr val="0D9488"/>
+                </a:solidFill>
+                <a:latin typeface="Trebuchet MS" pitchFamily="34" charset="0"/>
+                <a:ea typeface="Trebuchet MS" pitchFamily="34" charset="-122"/>
+                <a:cs typeface="Trebuchet MS" pitchFamily="34" charset="-120"/>
+              </a:rPr>
+              <a:t>·</a:t>
+            </a:r>
+            <a:endParaRPr lang="en-US" sz="1600" dirty="0"/>
+          </a:p>
+        </p:txBody>
+      </p:sp>
+      <p:sp>
+        <p:nvSpPr>
+          <p:cNvPr id="34" name="Shape 32"/>
+          <p:cNvSpPr/>
+          <p:nvPr/>
+        </p:nvSpPr>
+        <p:spPr>
+          <a:xfrm>
+            <a:off x="6428232" y="3364992"/>
+            <a:ext cx="1645920" cy="475488"/>
+          </a:xfrm>
+          <a:prstGeom prst="rect">
+            <a:avLst>
+              <a:gd name="adj" fmla="val 9615"/>
+            </a:avLst>
+          </a:prstGeom>
+          <a:solidFill>
+            <a:srgbClr val="FFFFFF"/>
+          </a:solidFill>
+          <a:ln w="12700">
+            <a:solidFill>
+              <a:srgbClr val="0D9488"/>
+            </a:solidFill>
+            <a:prstDash val="solid"/>
+          </a:ln>
+        </p:spPr>
+      </p:sp>
+      <p:sp>
+        <p:nvSpPr>
+          <p:cNvPr id="35" name="Text 33"/>
+          <p:cNvSpPr/>
+          <p:nvPr/>
+        </p:nvSpPr>
+        <p:spPr>
+          <a:xfrm>
+            <a:off x="6428232" y="3364992"/>
+            <a:ext cx="1645920" cy="475488"/>
+          </a:xfrm>
+          <a:prstGeom prst="rect">
+            <a:avLst/>
+          </a:prstGeom>
+          <a:noFill/>
+          <a:ln/>
+        </p:spPr>
+        <p:txBody>
+          <a:bodyPr wrap="square" lIns="0" tIns="0" rIns="0" bIns="0" rtlCol="0" anchor="ctr"/>
+          <a:lstStyle/>
+          <a:p>
+            <a:pPr algn="ctr" indent="0" marL="0">
+              <a:buNone/>
+            </a:pPr>
+            <a:r>
+              <a:rPr lang="en-US" sz="1400" b="1" dirty="0">
+                <a:solidFill>
+                  <a:srgbClr val="0D9488"/>
+                </a:solidFill>
+                <a:latin typeface="Trebuchet MS" pitchFamily="34" charset="0"/>
+                <a:ea typeface="Trebuchet MS" pitchFamily="34" charset="-122"/>
+                <a:cs typeface="Trebuchet MS" pitchFamily="34" charset="-120"/>
+              </a:rPr>
+              <a:t>tion</a:t>
+            </a:r>
+            <a:endParaRPr lang="en-US" sz="1400" dirty="0"/>
+          </a:p>
+        </p:txBody>
+      </p:sp>
+      <p:sp>
+        <p:nvSpPr>
+          <p:cNvPr id="36" name="Shape 34"/>
           <p:cNvSpPr/>
           <p:nvPr/>
         </p:nvSpPr>
@@ -21640,7 +22054,7 @@
       </p:sp>
       <p:sp>
         <p:nvSpPr>
-          <p:cNvPr id="31" name="Text 29"/>
+          <p:cNvPr id="37" name="Text 35"/>
           <p:cNvSpPr/>
           <p:nvPr/>
         </p:nvSpPr>
@@ -21679,7 +22093,7 @@
       </p:sp>
       <p:sp>
         <p:nvSpPr>
-          <p:cNvPr id="32" name="Shape 30"/>
+          <p:cNvPr id="38" name="Shape 36"/>
           <p:cNvSpPr/>
           <p:nvPr/>
         </p:nvSpPr>
@@ -21706,14 +22120,14 @@
       </p:sp>
       <p:sp>
         <p:nvSpPr>
-          <p:cNvPr id="33" name="Shape 31"/>
-          <p:cNvSpPr/>
-          <p:nvPr/>
-        </p:nvSpPr>
-        <p:spPr>
-          <a:xfrm>
-            <a:off x="2023872" y="4169664"/>
-            <a:ext cx="685800" cy="384048"/>
+          <p:cNvPr id="39" name="Shape 37"/>
+          <p:cNvSpPr/>
+          <p:nvPr/>
+        </p:nvSpPr>
+        <p:spPr>
+          <a:xfrm>
+            <a:off x="1951828" y="4169664"/>
+            <a:ext cx="603504" cy="384048"/>
           </a:xfrm>
           <a:prstGeom prst="rect">
             <a:avLst>
@@ -21733,14 +22147,14 @@
       </p:sp>
       <p:sp>
         <p:nvSpPr>
-          <p:cNvPr id="34" name="Text 32"/>
-          <p:cNvSpPr/>
-          <p:nvPr/>
-        </p:nvSpPr>
-        <p:spPr>
-          <a:xfrm>
-            <a:off x="2023872" y="4169664"/>
-            <a:ext cx="685800" cy="384048"/>
+          <p:cNvPr id="40" name="Text 38"/>
+          <p:cNvSpPr/>
+          <p:nvPr/>
+        </p:nvSpPr>
+        <p:spPr>
+          <a:xfrm>
+            <a:off x="1951828" y="4169664"/>
+            <a:ext cx="603504" cy="384048"/>
           </a:xfrm>
           <a:prstGeom prst="rect">
             <a:avLst/>
@@ -21764,6 +22178,402 @@
                 <a:ea typeface="Trebuchet MS" pitchFamily="34" charset="-122"/>
                 <a:cs typeface="Trebuchet MS" pitchFamily="34" charset="-120"/>
               </a:rPr>
+              <a:t>d</a:t>
+            </a:r>
+            <a:endParaRPr lang="en-US" sz="900" dirty="0"/>
+          </a:p>
+        </p:txBody>
+      </p:sp>
+      <p:sp>
+        <p:nvSpPr>
+          <p:cNvPr id="41" name="Shape 39"/>
+          <p:cNvSpPr/>
+          <p:nvPr/>
+        </p:nvSpPr>
+        <p:spPr>
+          <a:xfrm>
+            <a:off x="2605209" y="4169664"/>
+            <a:ext cx="603504" cy="384048"/>
+          </a:xfrm>
+          <a:prstGeom prst="rect">
+            <a:avLst>
+              <a:gd name="adj" fmla="val 9524"/>
+            </a:avLst>
+          </a:prstGeom>
+          <a:solidFill>
+            <a:srgbClr val="FFFFFF"/>
+          </a:solidFill>
+          <a:ln w="12700">
+            <a:solidFill>
+              <a:srgbClr val="DB2777"/>
+            </a:solidFill>
+            <a:prstDash val="solid"/>
+          </a:ln>
+        </p:spPr>
+      </p:sp>
+      <p:sp>
+        <p:nvSpPr>
+          <p:cNvPr id="42" name="Text 40"/>
+          <p:cNvSpPr/>
+          <p:nvPr/>
+        </p:nvSpPr>
+        <p:spPr>
+          <a:xfrm>
+            <a:off x="2605209" y="4169664"/>
+            <a:ext cx="603504" cy="384048"/>
+          </a:xfrm>
+          <a:prstGeom prst="rect">
+            <a:avLst/>
+          </a:prstGeom>
+          <a:noFill/>
+          <a:ln/>
+        </p:spPr>
+        <p:txBody>
+          <a:bodyPr wrap="square" lIns="0" tIns="0" rIns="0" bIns="0" rtlCol="0" anchor="ctr"/>
+          <a:lstStyle/>
+          <a:p>
+            <a:pPr algn="ctr" indent="0" marL="0">
+              <a:buNone/>
+            </a:pPr>
+            <a:r>
+              <a:rPr lang="en-US" sz="900" b="1" dirty="0">
+                <a:solidFill>
+                  <a:srgbClr val="9D174D"/>
+                </a:solidFill>
+                <a:latin typeface="Trebuchet MS" pitchFamily="34" charset="0"/>
+                <a:ea typeface="Trebuchet MS" pitchFamily="34" charset="-122"/>
+                <a:cs typeface="Trebuchet MS" pitchFamily="34" charset="-120"/>
+              </a:rPr>
+              <a:t>i</a:t>
+            </a:r>
+            <a:endParaRPr lang="en-US" sz="900" dirty="0"/>
+          </a:p>
+        </p:txBody>
+      </p:sp>
+      <p:sp>
+        <p:nvSpPr>
+          <p:cNvPr id="43" name="Shape 41"/>
+          <p:cNvSpPr/>
+          <p:nvPr/>
+        </p:nvSpPr>
+        <p:spPr>
+          <a:xfrm>
+            <a:off x="3258589" y="4169664"/>
+            <a:ext cx="603504" cy="384048"/>
+          </a:xfrm>
+          <a:prstGeom prst="rect">
+            <a:avLst>
+              <a:gd name="adj" fmla="val 9524"/>
+            </a:avLst>
+          </a:prstGeom>
+          <a:solidFill>
+            <a:srgbClr val="FFFFFF"/>
+          </a:solidFill>
+          <a:ln w="12700">
+            <a:solidFill>
+              <a:srgbClr val="DB2777"/>
+            </a:solidFill>
+            <a:prstDash val="solid"/>
+          </a:ln>
+        </p:spPr>
+      </p:sp>
+      <p:sp>
+        <p:nvSpPr>
+          <p:cNvPr id="44" name="Text 42"/>
+          <p:cNvSpPr/>
+          <p:nvPr/>
+        </p:nvSpPr>
+        <p:spPr>
+          <a:xfrm>
+            <a:off x="3258589" y="4169664"/>
+            <a:ext cx="603504" cy="384048"/>
+          </a:xfrm>
+          <a:prstGeom prst="rect">
+            <a:avLst/>
+          </a:prstGeom>
+          <a:noFill/>
+          <a:ln/>
+        </p:spPr>
+        <p:txBody>
+          <a:bodyPr wrap="square" lIns="0" tIns="0" rIns="0" bIns="0" rtlCol="0" anchor="ctr"/>
+          <a:lstStyle/>
+          <a:p>
+            <a:pPr algn="ctr" indent="0" marL="0">
+              <a:buNone/>
+            </a:pPr>
+            <a:r>
+              <a:rPr lang="en-US" sz="900" b="1" dirty="0">
+                <a:solidFill>
+                  <a:srgbClr val="9D174D"/>
+                </a:solidFill>
+                <a:latin typeface="Trebuchet MS" pitchFamily="34" charset="0"/>
+                <a:ea typeface="Trebuchet MS" pitchFamily="34" charset="-122"/>
+                <a:cs typeface="Trebuchet MS" pitchFamily="34" charset="-120"/>
+              </a:rPr>
+              <a:t>s</a:t>
+            </a:r>
+            <a:endParaRPr lang="en-US" sz="900" dirty="0"/>
+          </a:p>
+        </p:txBody>
+      </p:sp>
+      <p:sp>
+        <p:nvSpPr>
+          <p:cNvPr id="45" name="Shape 43"/>
+          <p:cNvSpPr/>
+          <p:nvPr/>
+        </p:nvSpPr>
+        <p:spPr>
+          <a:xfrm>
+            <a:off x="3911969" y="4169664"/>
+            <a:ext cx="603504" cy="384048"/>
+          </a:xfrm>
+          <a:prstGeom prst="rect">
+            <a:avLst>
+              <a:gd name="adj" fmla="val 9524"/>
+            </a:avLst>
+          </a:prstGeom>
+          <a:solidFill>
+            <a:srgbClr val="FFFFFF"/>
+          </a:solidFill>
+          <a:ln w="12700">
+            <a:solidFill>
+              <a:srgbClr val="DB2777"/>
+            </a:solidFill>
+            <a:prstDash val="solid"/>
+          </a:ln>
+        </p:spPr>
+      </p:sp>
+      <p:sp>
+        <p:nvSpPr>
+          <p:cNvPr id="46" name="Text 44"/>
+          <p:cNvSpPr/>
+          <p:nvPr/>
+        </p:nvSpPr>
+        <p:spPr>
+          <a:xfrm>
+            <a:off x="3911969" y="4169664"/>
+            <a:ext cx="603504" cy="384048"/>
+          </a:xfrm>
+          <a:prstGeom prst="rect">
+            <a:avLst/>
+          </a:prstGeom>
+          <a:noFill/>
+          <a:ln/>
+        </p:spPr>
+        <p:txBody>
+          <a:bodyPr wrap="square" lIns="0" tIns="0" rIns="0" bIns="0" rtlCol="0" anchor="ctr"/>
+          <a:lstStyle/>
+          <a:p>
+            <a:pPr algn="ctr" indent="0" marL="0">
+              <a:buNone/>
+            </a:pPr>
+            <a:r>
+              <a:rPr lang="en-US" sz="900" b="1" dirty="0">
+                <a:solidFill>
+                  <a:srgbClr val="9D174D"/>
+                </a:solidFill>
+                <a:latin typeface="Trebuchet MS" pitchFamily="34" charset="0"/>
+                <a:ea typeface="Trebuchet MS" pitchFamily="34" charset="-122"/>
+                <a:cs typeface="Trebuchet MS" pitchFamily="34" charset="-120"/>
+              </a:rPr>
+              <a:t>t</a:t>
+            </a:r>
+            <a:endParaRPr lang="en-US" sz="900" dirty="0"/>
+          </a:p>
+        </p:txBody>
+      </p:sp>
+      <p:sp>
+        <p:nvSpPr>
+          <p:cNvPr id="47" name="Shape 45"/>
+          <p:cNvSpPr/>
+          <p:nvPr/>
+        </p:nvSpPr>
+        <p:spPr>
+          <a:xfrm>
+            <a:off x="4565350" y="4169664"/>
+            <a:ext cx="603504" cy="384048"/>
+          </a:xfrm>
+          <a:prstGeom prst="rect">
+            <a:avLst>
+              <a:gd name="adj" fmla="val 9524"/>
+            </a:avLst>
+          </a:prstGeom>
+          <a:solidFill>
+            <a:srgbClr val="FFFFFF"/>
+          </a:solidFill>
+          <a:ln w="12700">
+            <a:solidFill>
+              <a:srgbClr val="DB2777"/>
+            </a:solidFill>
+            <a:prstDash val="solid"/>
+          </a:ln>
+        </p:spPr>
+      </p:sp>
+      <p:sp>
+        <p:nvSpPr>
+          <p:cNvPr id="48" name="Text 46"/>
+          <p:cNvSpPr/>
+          <p:nvPr/>
+        </p:nvSpPr>
+        <p:spPr>
+          <a:xfrm>
+            <a:off x="4565350" y="4169664"/>
+            <a:ext cx="603504" cy="384048"/>
+          </a:xfrm>
+          <a:prstGeom prst="rect">
+            <a:avLst/>
+          </a:prstGeom>
+          <a:noFill/>
+          <a:ln/>
+        </p:spPr>
+        <p:txBody>
+          <a:bodyPr wrap="square" lIns="0" tIns="0" rIns="0" bIns="0" rtlCol="0" anchor="ctr"/>
+          <a:lstStyle/>
+          <a:p>
+            <a:pPr algn="ctr" indent="0" marL="0">
+              <a:buNone/>
+            </a:pPr>
+            <a:r>
+              <a:rPr lang="en-US" sz="900" b="1" dirty="0">
+                <a:solidFill>
+                  <a:srgbClr val="9D174D"/>
+                </a:solidFill>
+                <a:latin typeface="Trebuchet MS" pitchFamily="34" charset="0"/>
+                <a:ea typeface="Trebuchet MS" pitchFamily="34" charset="-122"/>
+                <a:cs typeface="Trebuchet MS" pitchFamily="34" charset="-120"/>
+              </a:rPr>
+              <a:t>r</a:t>
+            </a:r>
+            <a:endParaRPr lang="en-US" sz="900" dirty="0"/>
+          </a:p>
+        </p:txBody>
+      </p:sp>
+      <p:sp>
+        <p:nvSpPr>
+          <p:cNvPr id="49" name="Shape 47"/>
+          <p:cNvSpPr/>
+          <p:nvPr/>
+        </p:nvSpPr>
+        <p:spPr>
+          <a:xfrm>
+            <a:off x="5218730" y="4169664"/>
+            <a:ext cx="603504" cy="384048"/>
+          </a:xfrm>
+          <a:prstGeom prst="rect">
+            <a:avLst>
+              <a:gd name="adj" fmla="val 9524"/>
+            </a:avLst>
+          </a:prstGeom>
+          <a:solidFill>
+            <a:srgbClr val="FFFFFF"/>
+          </a:solidFill>
+          <a:ln w="12700">
+            <a:solidFill>
+              <a:srgbClr val="DB2777"/>
+            </a:solidFill>
+            <a:prstDash val="solid"/>
+          </a:ln>
+        </p:spPr>
+      </p:sp>
+      <p:sp>
+        <p:nvSpPr>
+          <p:cNvPr id="50" name="Text 48"/>
+          <p:cNvSpPr/>
+          <p:nvPr/>
+        </p:nvSpPr>
+        <p:spPr>
+          <a:xfrm>
+            <a:off x="5218730" y="4169664"/>
+            <a:ext cx="603504" cy="384048"/>
+          </a:xfrm>
+          <a:prstGeom prst="rect">
+            <a:avLst/>
+          </a:prstGeom>
+          <a:noFill/>
+          <a:ln/>
+        </p:spPr>
+        <p:txBody>
+          <a:bodyPr wrap="square" lIns="0" tIns="0" rIns="0" bIns="0" rtlCol="0" anchor="ctr"/>
+          <a:lstStyle/>
+          <a:p>
+            <a:pPr algn="ctr" indent="0" marL="0">
+              <a:buNone/>
+            </a:pPr>
+            <a:r>
+              <a:rPr lang="en-US" sz="900" b="1" dirty="0">
+                <a:solidFill>
+                  <a:srgbClr val="9D174D"/>
+                </a:solidFill>
+                <a:latin typeface="Trebuchet MS" pitchFamily="34" charset="0"/>
+                <a:ea typeface="Trebuchet MS" pitchFamily="34" charset="-122"/>
+                <a:cs typeface="Trebuchet MS" pitchFamily="34" charset="-120"/>
+              </a:rPr>
+              <a:t>a</a:t>
+            </a:r>
+            <a:endParaRPr lang="en-US" sz="900" dirty="0"/>
+          </a:p>
+        </p:txBody>
+      </p:sp>
+      <p:sp>
+        <p:nvSpPr>
+          <p:cNvPr id="51" name="Shape 49"/>
+          <p:cNvSpPr/>
+          <p:nvPr/>
+        </p:nvSpPr>
+        <p:spPr>
+          <a:xfrm>
+            <a:off x="5872111" y="4169664"/>
+            <a:ext cx="603504" cy="384048"/>
+          </a:xfrm>
+          <a:prstGeom prst="rect">
+            <a:avLst>
+              <a:gd name="adj" fmla="val 9524"/>
+            </a:avLst>
+          </a:prstGeom>
+          <a:solidFill>
+            <a:srgbClr val="FFFFFF"/>
+          </a:solidFill>
+          <a:ln w="12700">
+            <a:solidFill>
+              <a:srgbClr val="DB2777"/>
+            </a:solidFill>
+            <a:prstDash val="solid"/>
+          </a:ln>
+        </p:spPr>
+      </p:sp>
+      <p:sp>
+        <p:nvSpPr>
+          <p:cNvPr id="52" name="Text 50"/>
+          <p:cNvSpPr/>
+          <p:nvPr/>
+        </p:nvSpPr>
+        <p:spPr>
+          <a:xfrm>
+            <a:off x="5872111" y="4169664"/>
+            <a:ext cx="603504" cy="384048"/>
+          </a:xfrm>
+          <a:prstGeom prst="rect">
+            <a:avLst/>
+          </a:prstGeom>
+          <a:noFill/>
+          <a:ln/>
+        </p:spPr>
+        <p:txBody>
+          <a:bodyPr wrap="square" lIns="0" tIns="0" rIns="0" bIns="0" rtlCol="0" anchor="ctr"/>
+          <a:lstStyle/>
+          <a:p>
+            <a:pPr algn="ctr" indent="0" marL="0">
+              <a:buNone/>
+            </a:pPr>
+            <a:r>
+              <a:rPr lang="en-US" sz="900" b="1" dirty="0">
+                <a:solidFill>
+                  <a:srgbClr val="9D174D"/>
+                </a:solidFill>
+                <a:latin typeface="Trebuchet MS" pitchFamily="34" charset="0"/>
+                <a:ea typeface="Trebuchet MS" pitchFamily="34" charset="-122"/>
+                <a:cs typeface="Trebuchet MS" pitchFamily="34" charset="-120"/>
+              </a:rPr>
               <a:t>c</a:t>
             </a:r>
             <a:endParaRPr lang="en-US" sz="900" dirty="0"/>
@@ -21772,14 +22582,212 @@
       </p:sp>
       <p:sp>
         <p:nvSpPr>
-          <p:cNvPr id="35" name="Text 33"/>
-          <p:cNvSpPr/>
-          <p:nvPr/>
-        </p:nvSpPr>
-        <p:spPr>
-          <a:xfrm>
-            <a:off x="2023872" y="4572000"/>
-            <a:ext cx="685800" cy="219456"/>
+          <p:cNvPr id="53" name="Shape 51"/>
+          <p:cNvSpPr/>
+          <p:nvPr/>
+        </p:nvSpPr>
+        <p:spPr>
+          <a:xfrm>
+            <a:off x="6525491" y="4169664"/>
+            <a:ext cx="603504" cy="384048"/>
+          </a:xfrm>
+          <a:prstGeom prst="rect">
+            <a:avLst>
+              <a:gd name="adj" fmla="val 9524"/>
+            </a:avLst>
+          </a:prstGeom>
+          <a:solidFill>
+            <a:srgbClr val="FFFFFF"/>
+          </a:solidFill>
+          <a:ln w="12700">
+            <a:solidFill>
+              <a:srgbClr val="DB2777"/>
+            </a:solidFill>
+            <a:prstDash val="solid"/>
+          </a:ln>
+        </p:spPr>
+      </p:sp>
+      <p:sp>
+        <p:nvSpPr>
+          <p:cNvPr id="54" name="Text 52"/>
+          <p:cNvSpPr/>
+          <p:nvPr/>
+        </p:nvSpPr>
+        <p:spPr>
+          <a:xfrm>
+            <a:off x="6525491" y="4169664"/>
+            <a:ext cx="603504" cy="384048"/>
+          </a:xfrm>
+          <a:prstGeom prst="rect">
+            <a:avLst/>
+          </a:prstGeom>
+          <a:noFill/>
+          <a:ln/>
+        </p:spPr>
+        <p:txBody>
+          <a:bodyPr wrap="square" lIns="0" tIns="0" rIns="0" bIns="0" rtlCol="0" anchor="ctr"/>
+          <a:lstStyle/>
+          <a:p>
+            <a:pPr algn="ctr" indent="0" marL="0">
+              <a:buNone/>
+            </a:pPr>
+            <a:r>
+              <a:rPr lang="en-US" sz="900" b="1" dirty="0">
+                <a:solidFill>
+                  <a:srgbClr val="9D174D"/>
+                </a:solidFill>
+                <a:latin typeface="Trebuchet MS" pitchFamily="34" charset="0"/>
+                <a:ea typeface="Trebuchet MS" pitchFamily="34" charset="-122"/>
+                <a:cs typeface="Trebuchet MS" pitchFamily="34" charset="-120"/>
+              </a:rPr>
+              <a:t>t</a:t>
+            </a:r>
+            <a:endParaRPr lang="en-US" sz="900" dirty="0"/>
+          </a:p>
+        </p:txBody>
+      </p:sp>
+      <p:sp>
+        <p:nvSpPr>
+          <p:cNvPr id="55" name="Shape 53"/>
+          <p:cNvSpPr/>
+          <p:nvPr/>
+        </p:nvSpPr>
+        <p:spPr>
+          <a:xfrm>
+            <a:off x="7178871" y="4169664"/>
+            <a:ext cx="603504" cy="384048"/>
+          </a:xfrm>
+          <a:prstGeom prst="rect">
+            <a:avLst>
+              <a:gd name="adj" fmla="val 9524"/>
+            </a:avLst>
+          </a:prstGeom>
+          <a:solidFill>
+            <a:srgbClr val="FFFFFF"/>
+          </a:solidFill>
+          <a:ln w="12700">
+            <a:solidFill>
+              <a:srgbClr val="DB2777"/>
+            </a:solidFill>
+            <a:prstDash val="solid"/>
+          </a:ln>
+        </p:spPr>
+      </p:sp>
+      <p:sp>
+        <p:nvSpPr>
+          <p:cNvPr id="56" name="Text 54"/>
+          <p:cNvSpPr/>
+          <p:nvPr/>
+        </p:nvSpPr>
+        <p:spPr>
+          <a:xfrm>
+            <a:off x="7178871" y="4169664"/>
+            <a:ext cx="603504" cy="384048"/>
+          </a:xfrm>
+          <a:prstGeom prst="rect">
+            <a:avLst/>
+          </a:prstGeom>
+          <a:noFill/>
+          <a:ln/>
+        </p:spPr>
+        <p:txBody>
+          <a:bodyPr wrap="square" lIns="0" tIns="0" rIns="0" bIns="0" rtlCol="0" anchor="ctr"/>
+          <a:lstStyle/>
+          <a:p>
+            <a:pPr algn="ctr" indent="0" marL="0">
+              <a:buNone/>
+            </a:pPr>
+            <a:r>
+              <a:rPr lang="en-US" sz="900" b="1" dirty="0">
+                <a:solidFill>
+                  <a:srgbClr val="9D174D"/>
+                </a:solidFill>
+                <a:latin typeface="Trebuchet MS" pitchFamily="34" charset="0"/>
+                <a:ea typeface="Trebuchet MS" pitchFamily="34" charset="-122"/>
+                <a:cs typeface="Trebuchet MS" pitchFamily="34" charset="-120"/>
+              </a:rPr>
+              <a:t>i</a:t>
+            </a:r>
+            <a:endParaRPr lang="en-US" sz="900" dirty="0"/>
+          </a:p>
+        </p:txBody>
+      </p:sp>
+      <p:sp>
+        <p:nvSpPr>
+          <p:cNvPr id="57" name="Shape 55"/>
+          <p:cNvSpPr/>
+          <p:nvPr/>
+        </p:nvSpPr>
+        <p:spPr>
+          <a:xfrm>
+            <a:off x="7832252" y="4169664"/>
+            <a:ext cx="603504" cy="384048"/>
+          </a:xfrm>
+          <a:prstGeom prst="rect">
+            <a:avLst>
+              <a:gd name="adj" fmla="val 9524"/>
+            </a:avLst>
+          </a:prstGeom>
+          <a:solidFill>
+            <a:srgbClr val="FFFFFF"/>
+          </a:solidFill>
+          <a:ln w="12700">
+            <a:solidFill>
+              <a:srgbClr val="DB2777"/>
+            </a:solidFill>
+            <a:prstDash val="solid"/>
+          </a:ln>
+        </p:spPr>
+      </p:sp>
+      <p:sp>
+        <p:nvSpPr>
+          <p:cNvPr id="58" name="Text 56"/>
+          <p:cNvSpPr/>
+          <p:nvPr/>
+        </p:nvSpPr>
+        <p:spPr>
+          <a:xfrm>
+            <a:off x="7832252" y="4169664"/>
+            <a:ext cx="603504" cy="384048"/>
+          </a:xfrm>
+          <a:prstGeom prst="rect">
+            <a:avLst/>
+          </a:prstGeom>
+          <a:noFill/>
+          <a:ln/>
+        </p:spPr>
+        <p:txBody>
+          <a:bodyPr wrap="square" lIns="0" tIns="0" rIns="0" bIns="0" rtlCol="0" anchor="ctr"/>
+          <a:lstStyle/>
+          <a:p>
+            <a:pPr algn="ctr" indent="0" marL="0">
+              <a:buNone/>
+            </a:pPr>
+            <a:r>
+              <a:rPr lang="en-US" sz="900" b="1" dirty="0">
+                <a:solidFill>
+                  <a:srgbClr val="9D174D"/>
+                </a:solidFill>
+                <a:latin typeface="Trebuchet MS" pitchFamily="34" charset="0"/>
+                <a:ea typeface="Trebuchet MS" pitchFamily="34" charset="-122"/>
+                <a:cs typeface="Trebuchet MS" pitchFamily="34" charset="-120"/>
+              </a:rPr>
+              <a:t>on</a:t>
+            </a:r>
+            <a:endParaRPr lang="en-US" sz="900" dirty="0"/>
+          </a:p>
+        </p:txBody>
+      </p:sp>
+      <p:sp>
+        <p:nvSpPr>
+          <p:cNvPr id="59" name="Text 57"/>
+          <p:cNvSpPr/>
+          <p:nvPr/>
+        </p:nvSpPr>
+        <p:spPr>
+          <a:xfrm>
+            <a:off x="7832252" y="4572000"/>
+            <a:ext cx="603504" cy="219456"/>
           </a:xfrm>
           <a:prstGeom prst="rect">
             <a:avLst/>
@@ -21803,510 +22811,9 @@
                 <a:ea typeface="Calibri" pitchFamily="34" charset="-122"/>
                 <a:cs typeface="Calibri" pitchFamily="34" charset="-120"/>
               </a:rPr>
-              <a:t>/k/</a:t>
+              <a:t>/shun/</a:t>
             </a:r>
             <a:endParaRPr lang="en-US" sz="750" dirty="0"/>
-          </a:p>
-        </p:txBody>
-      </p:sp>
-      <p:sp>
-        <p:nvSpPr>
-          <p:cNvPr id="36" name="Shape 34"/>
-          <p:cNvSpPr/>
-          <p:nvPr/>
-        </p:nvSpPr>
-        <p:spPr>
-          <a:xfrm>
-            <a:off x="2831592" y="4169664"/>
-            <a:ext cx="685800" cy="384048"/>
-          </a:xfrm>
-          <a:prstGeom prst="rect">
-            <a:avLst>
-              <a:gd name="adj" fmla="val 9524"/>
-            </a:avLst>
-          </a:prstGeom>
-          <a:solidFill>
-            <a:srgbClr val="FFFFFF"/>
-          </a:solidFill>
-          <a:ln w="12700">
-            <a:solidFill>
-              <a:srgbClr val="DB2777"/>
-            </a:solidFill>
-            <a:prstDash val="solid"/>
-          </a:ln>
-        </p:spPr>
-      </p:sp>
-      <p:sp>
-        <p:nvSpPr>
-          <p:cNvPr id="37" name="Text 35"/>
-          <p:cNvSpPr/>
-          <p:nvPr/>
-        </p:nvSpPr>
-        <p:spPr>
-          <a:xfrm>
-            <a:off x="2831592" y="4169664"/>
-            <a:ext cx="685800" cy="384048"/>
-          </a:xfrm>
-          <a:prstGeom prst="rect">
-            <a:avLst/>
-          </a:prstGeom>
-          <a:noFill/>
-          <a:ln/>
-        </p:spPr>
-        <p:txBody>
-          <a:bodyPr wrap="square" lIns="0" tIns="0" rIns="0" bIns="0" rtlCol="0" anchor="ctr"/>
-          <a:lstStyle/>
-          <a:p>
-            <a:pPr algn="ctr" indent="0" marL="0">
-              <a:buNone/>
-            </a:pPr>
-            <a:r>
-              <a:rPr lang="en-US" sz="900" b="1" dirty="0">
-                <a:solidFill>
-                  <a:srgbClr val="9D174D"/>
-                </a:solidFill>
-                <a:latin typeface="Trebuchet MS" pitchFamily="34" charset="0"/>
-                <a:ea typeface="Trebuchet MS" pitchFamily="34" charset="-122"/>
-                <a:cs typeface="Trebuchet MS" pitchFamily="34" charset="-120"/>
-              </a:rPr>
-              <a:t>o</a:t>
-            </a:r>
-            <a:endParaRPr lang="en-US" sz="900" dirty="0"/>
-          </a:p>
-        </p:txBody>
-      </p:sp>
-      <p:sp>
-        <p:nvSpPr>
-          <p:cNvPr id="38" name="Shape 36"/>
-          <p:cNvSpPr/>
-          <p:nvPr/>
-        </p:nvSpPr>
-        <p:spPr>
-          <a:xfrm>
-            <a:off x="3639312" y="4169664"/>
-            <a:ext cx="685800" cy="384048"/>
-          </a:xfrm>
-          <a:prstGeom prst="rect">
-            <a:avLst>
-              <a:gd name="adj" fmla="val 9524"/>
-            </a:avLst>
-          </a:prstGeom>
-          <a:solidFill>
-            <a:srgbClr val="FFFFFF"/>
-          </a:solidFill>
-          <a:ln w="12700">
-            <a:solidFill>
-              <a:srgbClr val="DB2777"/>
-            </a:solidFill>
-            <a:prstDash val="solid"/>
-          </a:ln>
-        </p:spPr>
-      </p:sp>
-      <p:sp>
-        <p:nvSpPr>
-          <p:cNvPr id="39" name="Text 37"/>
-          <p:cNvSpPr/>
-          <p:nvPr/>
-        </p:nvSpPr>
-        <p:spPr>
-          <a:xfrm>
-            <a:off x="3639312" y="4169664"/>
-            <a:ext cx="685800" cy="384048"/>
-          </a:xfrm>
-          <a:prstGeom prst="rect">
-            <a:avLst/>
-          </a:prstGeom>
-          <a:noFill/>
-          <a:ln/>
-        </p:spPr>
-        <p:txBody>
-          <a:bodyPr wrap="square" lIns="0" tIns="0" rIns="0" bIns="0" rtlCol="0" anchor="ctr"/>
-          <a:lstStyle/>
-          <a:p>
-            <a:pPr algn="ctr" indent="0" marL="0">
-              <a:buNone/>
-            </a:pPr>
-            <a:r>
-              <a:rPr lang="en-US" sz="900" b="1" dirty="0">
-                <a:solidFill>
-                  <a:srgbClr val="9D174D"/>
-                </a:solidFill>
-                <a:latin typeface="Trebuchet MS" pitchFamily="34" charset="0"/>
-                <a:ea typeface="Trebuchet MS" pitchFamily="34" charset="-122"/>
-                <a:cs typeface="Trebuchet MS" pitchFamily="34" charset="-120"/>
-              </a:rPr>
-              <a:t>n</a:t>
-            </a:r>
-            <a:endParaRPr lang="en-US" sz="900" dirty="0"/>
-          </a:p>
-        </p:txBody>
-      </p:sp>
-      <p:sp>
-        <p:nvSpPr>
-          <p:cNvPr id="40" name="Shape 38"/>
-          <p:cNvSpPr/>
-          <p:nvPr/>
-        </p:nvSpPr>
-        <p:spPr>
-          <a:xfrm>
-            <a:off x="4447032" y="4169664"/>
-            <a:ext cx="685800" cy="384048"/>
-          </a:xfrm>
-          <a:prstGeom prst="rect">
-            <a:avLst>
-              <a:gd name="adj" fmla="val 9524"/>
-            </a:avLst>
-          </a:prstGeom>
-          <a:solidFill>
-            <a:srgbClr val="FFFFFF"/>
-          </a:solidFill>
-          <a:ln w="12700">
-            <a:solidFill>
-              <a:srgbClr val="DB2777"/>
-            </a:solidFill>
-            <a:prstDash val="solid"/>
-          </a:ln>
-        </p:spPr>
-      </p:sp>
-      <p:sp>
-        <p:nvSpPr>
-          <p:cNvPr id="41" name="Text 39"/>
-          <p:cNvSpPr/>
-          <p:nvPr/>
-        </p:nvSpPr>
-        <p:spPr>
-          <a:xfrm>
-            <a:off x="4447032" y="4169664"/>
-            <a:ext cx="685800" cy="384048"/>
-          </a:xfrm>
-          <a:prstGeom prst="rect">
-            <a:avLst/>
-          </a:prstGeom>
-          <a:noFill/>
-          <a:ln/>
-        </p:spPr>
-        <p:txBody>
-          <a:bodyPr wrap="square" lIns="0" tIns="0" rIns="0" bIns="0" rtlCol="0" anchor="ctr"/>
-          <a:lstStyle/>
-          <a:p>
-            <a:pPr algn="ctr" indent="0" marL="0">
-              <a:buNone/>
-            </a:pPr>
-            <a:r>
-              <a:rPr lang="en-US" sz="900" b="1" dirty="0">
-                <a:solidFill>
-                  <a:srgbClr val="9D174D"/>
-                </a:solidFill>
-                <a:latin typeface="Trebuchet MS" pitchFamily="34" charset="0"/>
-                <a:ea typeface="Trebuchet MS" pitchFamily="34" charset="-122"/>
-                <a:cs typeface="Trebuchet MS" pitchFamily="34" charset="-120"/>
-              </a:rPr>
-              <a:t>t</a:t>
-            </a:r>
-            <a:endParaRPr lang="en-US" sz="900" dirty="0"/>
-          </a:p>
-        </p:txBody>
-      </p:sp>
-      <p:sp>
-        <p:nvSpPr>
-          <p:cNvPr id="42" name="Shape 40"/>
-          <p:cNvSpPr/>
-          <p:nvPr/>
-        </p:nvSpPr>
-        <p:spPr>
-          <a:xfrm>
-            <a:off x="5254752" y="4169664"/>
-            <a:ext cx="685800" cy="384048"/>
-          </a:xfrm>
-          <a:prstGeom prst="rect">
-            <a:avLst>
-              <a:gd name="adj" fmla="val 9524"/>
-            </a:avLst>
-          </a:prstGeom>
-          <a:solidFill>
-            <a:srgbClr val="FFFFFF"/>
-          </a:solidFill>
-          <a:ln w="12700">
-            <a:solidFill>
-              <a:srgbClr val="DB2777"/>
-            </a:solidFill>
-            <a:prstDash val="solid"/>
-          </a:ln>
-        </p:spPr>
-      </p:sp>
-      <p:sp>
-        <p:nvSpPr>
-          <p:cNvPr id="43" name="Text 41"/>
-          <p:cNvSpPr/>
-          <p:nvPr/>
-        </p:nvSpPr>
-        <p:spPr>
-          <a:xfrm>
-            <a:off x="5254752" y="4169664"/>
-            <a:ext cx="685800" cy="384048"/>
-          </a:xfrm>
-          <a:prstGeom prst="rect">
-            <a:avLst/>
-          </a:prstGeom>
-          <a:noFill/>
-          <a:ln/>
-        </p:spPr>
-        <p:txBody>
-          <a:bodyPr wrap="square" lIns="0" tIns="0" rIns="0" bIns="0" rtlCol="0" anchor="ctr"/>
-          <a:lstStyle/>
-          <a:p>
-            <a:pPr algn="ctr" indent="0" marL="0">
-              <a:buNone/>
-            </a:pPr>
-            <a:r>
-              <a:rPr lang="en-US" sz="900" b="1" dirty="0">
-                <a:solidFill>
-                  <a:srgbClr val="9D174D"/>
-                </a:solidFill>
-                <a:latin typeface="Trebuchet MS" pitchFamily="34" charset="0"/>
-                <a:ea typeface="Trebuchet MS" pitchFamily="34" charset="-122"/>
-                <a:cs typeface="Trebuchet MS" pitchFamily="34" charset="-120"/>
-              </a:rPr>
-              <a:t>r</a:t>
-            </a:r>
-            <a:endParaRPr lang="en-US" sz="900" dirty="0"/>
-          </a:p>
-        </p:txBody>
-      </p:sp>
-      <p:sp>
-        <p:nvSpPr>
-          <p:cNvPr id="44" name="Shape 42"/>
-          <p:cNvSpPr/>
-          <p:nvPr/>
-        </p:nvSpPr>
-        <p:spPr>
-          <a:xfrm>
-            <a:off x="6062472" y="4169664"/>
-            <a:ext cx="685800" cy="384048"/>
-          </a:xfrm>
-          <a:prstGeom prst="rect">
-            <a:avLst>
-              <a:gd name="adj" fmla="val 9524"/>
-            </a:avLst>
-          </a:prstGeom>
-          <a:solidFill>
-            <a:srgbClr val="FFFFFF"/>
-          </a:solidFill>
-          <a:ln w="12700">
-            <a:solidFill>
-              <a:srgbClr val="DB2777"/>
-            </a:solidFill>
-            <a:prstDash val="solid"/>
-          </a:ln>
-        </p:spPr>
-      </p:sp>
-      <p:sp>
-        <p:nvSpPr>
-          <p:cNvPr id="45" name="Text 43"/>
-          <p:cNvSpPr/>
-          <p:nvPr/>
-        </p:nvSpPr>
-        <p:spPr>
-          <a:xfrm>
-            <a:off x="6062472" y="4169664"/>
-            <a:ext cx="685800" cy="384048"/>
-          </a:xfrm>
-          <a:prstGeom prst="rect">
-            <a:avLst/>
-          </a:prstGeom>
-          <a:noFill/>
-          <a:ln/>
-        </p:spPr>
-        <p:txBody>
-          <a:bodyPr wrap="square" lIns="0" tIns="0" rIns="0" bIns="0" rtlCol="0" anchor="ctr"/>
-          <a:lstStyle/>
-          <a:p>
-            <a:pPr algn="ctr" indent="0" marL="0">
-              <a:buNone/>
-            </a:pPr>
-            <a:r>
-              <a:rPr lang="en-US" sz="900" b="1" dirty="0">
-                <a:solidFill>
-                  <a:srgbClr val="9D174D"/>
-                </a:solidFill>
-                <a:latin typeface="Trebuchet MS" pitchFamily="34" charset="0"/>
-                <a:ea typeface="Trebuchet MS" pitchFamily="34" charset="-122"/>
-                <a:cs typeface="Trebuchet MS" pitchFamily="34" charset="-120"/>
-              </a:rPr>
-              <a:t>a</a:t>
-            </a:r>
-            <a:endParaRPr lang="en-US" sz="900" dirty="0"/>
-          </a:p>
-        </p:txBody>
-      </p:sp>
-      <p:sp>
-        <p:nvSpPr>
-          <p:cNvPr id="46" name="Shape 44"/>
-          <p:cNvSpPr/>
-          <p:nvPr/>
-        </p:nvSpPr>
-        <p:spPr>
-          <a:xfrm>
-            <a:off x="6870192" y="4169664"/>
-            <a:ext cx="685800" cy="384048"/>
-          </a:xfrm>
-          <a:prstGeom prst="rect">
-            <a:avLst>
-              <a:gd name="adj" fmla="val 9524"/>
-            </a:avLst>
-          </a:prstGeom>
-          <a:solidFill>
-            <a:srgbClr val="FFFFFF"/>
-          </a:solidFill>
-          <a:ln w="12700">
-            <a:solidFill>
-              <a:srgbClr val="DB2777"/>
-            </a:solidFill>
-            <a:prstDash val="solid"/>
-          </a:ln>
-        </p:spPr>
-      </p:sp>
-      <p:sp>
-        <p:nvSpPr>
-          <p:cNvPr id="47" name="Text 45"/>
-          <p:cNvSpPr/>
-          <p:nvPr/>
-        </p:nvSpPr>
-        <p:spPr>
-          <a:xfrm>
-            <a:off x="6870192" y="4169664"/>
-            <a:ext cx="685800" cy="384048"/>
-          </a:xfrm>
-          <a:prstGeom prst="rect">
-            <a:avLst/>
-          </a:prstGeom>
-          <a:noFill/>
-          <a:ln/>
-        </p:spPr>
-        <p:txBody>
-          <a:bodyPr wrap="square" lIns="0" tIns="0" rIns="0" bIns="0" rtlCol="0" anchor="ctr"/>
-          <a:lstStyle/>
-          <a:p>
-            <a:pPr algn="ctr" indent="0" marL="0">
-              <a:buNone/>
-            </a:pPr>
-            <a:r>
-              <a:rPr lang="en-US" sz="900" b="1" dirty="0">
-                <a:solidFill>
-                  <a:srgbClr val="9D174D"/>
-                </a:solidFill>
-                <a:latin typeface="Trebuchet MS" pitchFamily="34" charset="0"/>
-                <a:ea typeface="Trebuchet MS" pitchFamily="34" charset="-122"/>
-                <a:cs typeface="Trebuchet MS" pitchFamily="34" charset="-120"/>
-              </a:rPr>
-              <a:t>c</a:t>
-            </a:r>
-            <a:endParaRPr lang="en-US" sz="900" dirty="0"/>
-          </a:p>
-        </p:txBody>
-      </p:sp>
-      <p:sp>
-        <p:nvSpPr>
-          <p:cNvPr id="48" name="Text 46"/>
-          <p:cNvSpPr/>
-          <p:nvPr/>
-        </p:nvSpPr>
-        <p:spPr>
-          <a:xfrm>
-            <a:off x="6870192" y="4572000"/>
-            <a:ext cx="685800" cy="219456"/>
-          </a:xfrm>
-          <a:prstGeom prst="rect">
-            <a:avLst/>
-          </a:prstGeom>
-          <a:noFill/>
-          <a:ln/>
-        </p:spPr>
-        <p:txBody>
-          <a:bodyPr wrap="square" lIns="0" tIns="0" rIns="0" bIns="0" rtlCol="0" anchor="t"/>
-          <a:lstStyle/>
-          <a:p>
-            <a:pPr algn="ctr" indent="0" marL="0">
-              <a:buNone/>
-            </a:pPr>
-            <a:r>
-              <a:rPr lang="en-US" sz="750" i="1" dirty="0">
-                <a:solidFill>
-                  <a:srgbClr val="94A3B8"/>
-                </a:solidFill>
-                <a:latin typeface="Calibri" pitchFamily="34" charset="0"/>
-                <a:ea typeface="Calibri" pitchFamily="34" charset="-122"/>
-                <a:cs typeface="Calibri" pitchFamily="34" charset="-120"/>
-              </a:rPr>
-              <a:t>/k/</a:t>
-            </a:r>
-            <a:endParaRPr lang="en-US" sz="750" dirty="0"/>
-          </a:p>
-        </p:txBody>
-      </p:sp>
-      <p:sp>
-        <p:nvSpPr>
-          <p:cNvPr id="49" name="Shape 47"/>
-          <p:cNvSpPr/>
-          <p:nvPr/>
-        </p:nvSpPr>
-        <p:spPr>
-          <a:xfrm>
-            <a:off x="7677912" y="4169664"/>
-            <a:ext cx="685800" cy="384048"/>
-          </a:xfrm>
-          <a:prstGeom prst="rect">
-            <a:avLst>
-              <a:gd name="adj" fmla="val 9524"/>
-            </a:avLst>
-          </a:prstGeom>
-          <a:solidFill>
-            <a:srgbClr val="FFFFFF"/>
-          </a:solidFill>
-          <a:ln w="12700">
-            <a:solidFill>
-              <a:srgbClr val="DB2777"/>
-            </a:solidFill>
-            <a:prstDash val="solid"/>
-          </a:ln>
-        </p:spPr>
-      </p:sp>
-      <p:sp>
-        <p:nvSpPr>
-          <p:cNvPr id="50" name="Text 48"/>
-          <p:cNvSpPr/>
-          <p:nvPr/>
-        </p:nvSpPr>
-        <p:spPr>
-          <a:xfrm>
-            <a:off x="7677912" y="4169664"/>
-            <a:ext cx="685800" cy="384048"/>
-          </a:xfrm>
-          <a:prstGeom prst="rect">
-            <a:avLst/>
-          </a:prstGeom>
-          <a:noFill/>
-          <a:ln/>
-        </p:spPr>
-        <p:txBody>
-          <a:bodyPr wrap="square" lIns="0" tIns="0" rIns="0" bIns="0" rtlCol="0" anchor="ctr"/>
-          <a:lstStyle/>
-          <a:p>
-            <a:pPr algn="ctr" indent="0" marL="0">
-              <a:buNone/>
-            </a:pPr>
-            <a:r>
-              <a:rPr lang="en-US" sz="900" b="1" dirty="0">
-                <a:solidFill>
-                  <a:srgbClr val="9D174D"/>
-                </a:solidFill>
-                <a:latin typeface="Trebuchet MS" pitchFamily="34" charset="0"/>
-                <a:ea typeface="Trebuchet MS" pitchFamily="34" charset="-122"/>
-                <a:cs typeface="Trebuchet MS" pitchFamily="34" charset="-120"/>
-              </a:rPr>
-              <a:t>t</a:t>
-            </a:r>
-            <a:endParaRPr lang="en-US" sz="900" dirty="0"/>
           </a:p>
         </p:txBody>
       </p:sp>
@@ -22596,7 +23103,7 @@
                 <a:ea typeface="Calibri" pitchFamily="34" charset="-122"/>
                 <a:cs typeface="Calibri" pitchFamily="34" charset="-120"/>
               </a:rPr>
-              <a:t>Word Labs  •  wordlabs.app  •  Root: 'tract' = to pull or drag</a:t>
+              <a:t>Word Labs  •  wordlabs.app  •  Root: 'tract' = pull, drag, draw</a:t>
             </a:r>
             <a:endParaRPr lang="en-US" sz="800" dirty="0"/>
           </a:p>
@@ -22735,7 +23242,7 @@
                 <a:ea typeface="Trebuchet MS" pitchFamily="34" charset="-122"/>
                 <a:cs typeface="Trebuchet MS" pitchFamily="34" charset="-120"/>
               </a:rPr>
-              <a:t>distract</a:t>
+              <a:t>subtract</a:t>
             </a:r>
             <a:endParaRPr lang="en-US" sz="2800" dirty="0"/>
           </a:p>
@@ -23423,7 +23930,7 @@
                 <a:ea typeface="Calibri" pitchFamily="34" charset="-122"/>
                 <a:cs typeface="Calibri" pitchFamily="34" charset="-120"/>
               </a:rPr>
-              <a:t>Word Labs  •  wordlabs.app  •  Root: 'tract' = to pull or drag</a:t>
+              <a:t>Word Labs  •  wordlabs.app  •  Root: 'tract' = pull, drag, draw</a:t>
             </a:r>
             <a:endParaRPr lang="en-US" sz="800" dirty="0"/>
           </a:p>
@@ -23562,7 +24069,7 @@
                 <a:ea typeface="Trebuchet MS" pitchFamily="34" charset="-122"/>
                 <a:cs typeface="Trebuchet MS" pitchFamily="34" charset="-120"/>
               </a:rPr>
-              <a:t>distract</a:t>
+              <a:t>subtract</a:t>
             </a:r>
             <a:endParaRPr lang="en-US" sz="2800" dirty="0"/>
           </a:p>
@@ -23701,7 +24208,7 @@
                 <a:ea typeface="Trebuchet MS" pitchFamily="34" charset="-122"/>
                 <a:cs typeface="Trebuchet MS" pitchFamily="34" charset="-120"/>
               </a:rPr>
-              <a:t>dis</a:t>
+              <a:t>sub</a:t>
             </a:r>
             <a:endParaRPr lang="en-US" sz="1300" dirty="0"/>
           </a:p>
@@ -23740,7 +24247,7 @@
                 <a:ea typeface="Calibri" pitchFamily="34" charset="-122"/>
                 <a:cs typeface="Calibri" pitchFamily="34" charset="-120"/>
               </a:rPr>
-              <a:t>away, apart</a:t>
+              <a:t>under, below</a:t>
             </a:r>
             <a:endParaRPr lang="en-US" sz="850" dirty="0"/>
           </a:p>
@@ -23852,7 +24359,7 @@
                 <a:ea typeface="Calibri" pitchFamily="34" charset="-122"/>
                 <a:cs typeface="Calibri" pitchFamily="34" charset="-120"/>
               </a:rPr>
-              <a:t>to pull or drag</a:t>
+              <a:t>pull, draw</a:t>
             </a:r>
             <a:endParaRPr lang="en-US" sz="850" dirty="0"/>
           </a:p>
@@ -24408,7 +24915,7 @@
                 <a:ea typeface="Calibri" pitchFamily="34" charset="-122"/>
                 <a:cs typeface="Calibri" pitchFamily="34" charset="-120"/>
               </a:rPr>
-              <a:t>Word Labs  •  wordlabs.app  •  Root: 'tract' = to pull or drag</a:t>
+              <a:t>Word Labs  •  wordlabs.app  •  Root: 'tract' = pull, drag, draw</a:t>
             </a:r>
             <a:endParaRPr lang="en-US" sz="800" dirty="0"/>
           </a:p>
@@ -24481,7 +24988,7 @@
                 <a:ea typeface="Trebuchet MS" pitchFamily="34" charset="-122"/>
                 <a:cs typeface="Trebuchet MS" pitchFamily="34" charset="-120"/>
               </a:rPr>
-              <a:t>We are learning that the root 'tract' means 'to pull or drag'.</a:t>
+              <a:t>We are learning that the root 'tract' means 'pull, drag, draw'.</a:t>
             </a:r>
             <a:endParaRPr lang="en-US" sz="2000" dirty="0"/>
           </a:p>
@@ -25127,7 +25634,7 @@
                 <a:ea typeface="Calibri" pitchFamily="34" charset="-122"/>
                 <a:cs typeface="Calibri" pitchFamily="34" charset="-120"/>
               </a:rPr>
-              <a:t>Word Labs  •  wordlabs.app  •  Root: 'tract' = to pull or drag</a:t>
+              <a:t>Word Labs  •  wordlabs.app  •  Root: 'tract' = pull, drag, draw</a:t>
             </a:r>
             <a:endParaRPr lang="en-US" sz="800" dirty="0"/>
           </a:p>
@@ -25266,7 +25773,7 @@
                 <a:ea typeface="Trebuchet MS" pitchFamily="34" charset="-122"/>
                 <a:cs typeface="Trebuchet MS" pitchFamily="34" charset="-120"/>
               </a:rPr>
-              <a:t>distract</a:t>
+              <a:t>subtract</a:t>
             </a:r>
             <a:endParaRPr lang="en-US" sz="2800" dirty="0"/>
           </a:p>
@@ -25405,7 +25912,7 @@
                 <a:ea typeface="Trebuchet MS" pitchFamily="34" charset="-122"/>
                 <a:cs typeface="Trebuchet MS" pitchFamily="34" charset="-120"/>
               </a:rPr>
-              <a:t>dis</a:t>
+              <a:t>sub</a:t>
             </a:r>
             <a:endParaRPr lang="en-US" sz="1300" dirty="0"/>
           </a:p>
@@ -25444,7 +25951,7 @@
                 <a:ea typeface="Calibri" pitchFamily="34" charset="-122"/>
                 <a:cs typeface="Calibri" pitchFamily="34" charset="-120"/>
               </a:rPr>
-              <a:t>away, apart</a:t>
+              <a:t>under, below</a:t>
             </a:r>
             <a:endParaRPr lang="en-US" sz="850" dirty="0"/>
           </a:p>
@@ -25556,7 +26063,7 @@
                 <a:ea typeface="Calibri" pitchFamily="34" charset="-122"/>
                 <a:cs typeface="Calibri" pitchFamily="34" charset="-120"/>
               </a:rPr>
-              <a:t>to pull or drag</a:t>
+              <a:t>pull, draw</a:t>
             </a:r>
             <a:endParaRPr lang="en-US" sz="850" dirty="0"/>
           </a:p>
@@ -25715,7 +26222,7 @@
                 <a:ea typeface="Trebuchet MS" pitchFamily="34" charset="-122"/>
                 <a:cs typeface="Trebuchet MS" pitchFamily="34" charset="-120"/>
               </a:rPr>
-              <a:t>dis</a:t>
+              <a:t>sub</a:t>
             </a:r>
             <a:endParaRPr lang="en-US" sz="1400" dirty="0"/>
           </a:p>
@@ -26244,7 +26751,7 @@
                 <a:ea typeface="Calibri" pitchFamily="34" charset="-122"/>
                 <a:cs typeface="Calibri" pitchFamily="34" charset="-120"/>
               </a:rPr>
-              <a:t>Word Labs  •  wordlabs.app  •  Root: 'tract' = to pull or drag</a:t>
+              <a:t>Word Labs  •  wordlabs.app  •  Root: 'tract' = pull, drag, draw</a:t>
             </a:r>
             <a:endParaRPr lang="en-US" sz="800" dirty="0"/>
           </a:p>
@@ -26383,7 +26890,7 @@
                 <a:ea typeface="Trebuchet MS" pitchFamily="34" charset="-122"/>
                 <a:cs typeface="Trebuchet MS" pitchFamily="34" charset="-120"/>
               </a:rPr>
-              <a:t>distract</a:t>
+              <a:t>subtract</a:t>
             </a:r>
             <a:endParaRPr lang="en-US" sz="2800" dirty="0"/>
           </a:p>
@@ -26522,7 +27029,7 @@
                 <a:ea typeface="Trebuchet MS" pitchFamily="34" charset="-122"/>
                 <a:cs typeface="Trebuchet MS" pitchFamily="34" charset="-120"/>
               </a:rPr>
-              <a:t>dis</a:t>
+              <a:t>sub</a:t>
             </a:r>
             <a:endParaRPr lang="en-US" sz="1300" dirty="0"/>
           </a:p>
@@ -26561,7 +27068,7 @@
                 <a:ea typeface="Calibri" pitchFamily="34" charset="-122"/>
                 <a:cs typeface="Calibri" pitchFamily="34" charset="-120"/>
               </a:rPr>
-              <a:t>away, apart</a:t>
+              <a:t>under, below</a:t>
             </a:r>
             <a:endParaRPr lang="en-US" sz="850" dirty="0"/>
           </a:p>
@@ -26673,7 +27180,7 @@
                 <a:ea typeface="Calibri" pitchFamily="34" charset="-122"/>
                 <a:cs typeface="Calibri" pitchFamily="34" charset="-120"/>
               </a:rPr>
-              <a:t>to pull or drag</a:t>
+              <a:t>pull, draw</a:t>
             </a:r>
             <a:endParaRPr lang="en-US" sz="850" dirty="0"/>
           </a:p>
@@ -26832,7 +27339,7 @@
                 <a:ea typeface="Trebuchet MS" pitchFamily="34" charset="-122"/>
                 <a:cs typeface="Trebuchet MS" pitchFamily="34" charset="-120"/>
               </a:rPr>
-              <a:t>dis</a:t>
+              <a:t>sub</a:t>
             </a:r>
             <a:endParaRPr lang="en-US" sz="1400" dirty="0"/>
           </a:p>
@@ -27044,7 +27551,7 @@
         </p:nvSpPr>
         <p:spPr>
           <a:xfrm>
-            <a:off x="2023872" y="4169664"/>
+            <a:off x="2124837" y="4169664"/>
             <a:ext cx="685800" cy="384048"/>
           </a:xfrm>
           <a:prstGeom prst="rect">
@@ -27071,7 +27578,7 @@
         </p:nvSpPr>
         <p:spPr>
           <a:xfrm>
-            <a:off x="2023872" y="4169664"/>
+            <a:off x="2124837" y="4169664"/>
             <a:ext cx="685800" cy="384048"/>
           </a:xfrm>
           <a:prstGeom prst="rect">
@@ -27096,7 +27603,7 @@
                 <a:ea typeface="Trebuchet MS" pitchFamily="34" charset="-122"/>
                 <a:cs typeface="Trebuchet MS" pitchFamily="34" charset="-120"/>
               </a:rPr>
-              <a:t>d</a:t>
+              <a:t>s</a:t>
             </a:r>
             <a:endParaRPr lang="en-US" sz="900" dirty="0"/>
           </a:p>
@@ -27110,7 +27617,7 @@
         </p:nvSpPr>
         <p:spPr>
           <a:xfrm>
-            <a:off x="2831592" y="4169664"/>
+            <a:off x="3033522" y="4169664"/>
             <a:ext cx="685800" cy="384048"/>
           </a:xfrm>
           <a:prstGeom prst="rect">
@@ -27137,7 +27644,7 @@
         </p:nvSpPr>
         <p:spPr>
           <a:xfrm>
-            <a:off x="2831592" y="4169664"/>
+            <a:off x="3033522" y="4169664"/>
             <a:ext cx="685800" cy="384048"/>
           </a:xfrm>
           <a:prstGeom prst="rect">
@@ -27162,7 +27669,7 @@
                 <a:ea typeface="Trebuchet MS" pitchFamily="34" charset="-122"/>
                 <a:cs typeface="Trebuchet MS" pitchFamily="34" charset="-120"/>
               </a:rPr>
-              <a:t>i</a:t>
+              <a:t>u</a:t>
             </a:r>
             <a:endParaRPr lang="en-US" sz="900" dirty="0"/>
           </a:p>
@@ -27176,7 +27683,7 @@
         </p:nvSpPr>
         <p:spPr>
           <a:xfrm>
-            <a:off x="3639312" y="4169664"/>
+            <a:off x="3942207" y="4169664"/>
             <a:ext cx="685800" cy="384048"/>
           </a:xfrm>
           <a:prstGeom prst="rect">
@@ -27203,7 +27710,7 @@
         </p:nvSpPr>
         <p:spPr>
           <a:xfrm>
-            <a:off x="3639312" y="4169664"/>
+            <a:off x="3942207" y="4169664"/>
             <a:ext cx="685800" cy="384048"/>
           </a:xfrm>
           <a:prstGeom prst="rect">
@@ -27228,7 +27735,7 @@
                 <a:ea typeface="Trebuchet MS" pitchFamily="34" charset="-122"/>
                 <a:cs typeface="Trebuchet MS" pitchFamily="34" charset="-120"/>
               </a:rPr>
-              <a:t>s</a:t>
+              <a:t>b</a:t>
             </a:r>
             <a:endParaRPr lang="en-US" sz="900" dirty="0"/>
           </a:p>
@@ -27242,7 +27749,7 @@
         </p:nvSpPr>
         <p:spPr>
           <a:xfrm>
-            <a:off x="4447032" y="4169664"/>
+            <a:off x="4850892" y="4169664"/>
             <a:ext cx="685800" cy="384048"/>
           </a:xfrm>
           <a:prstGeom prst="rect">
@@ -27269,7 +27776,7 @@
         </p:nvSpPr>
         <p:spPr>
           <a:xfrm>
-            <a:off x="4447032" y="4169664"/>
+            <a:off x="4850892" y="4169664"/>
             <a:ext cx="685800" cy="384048"/>
           </a:xfrm>
           <a:prstGeom prst="rect">
@@ -27308,7 +27815,7 @@
         </p:nvSpPr>
         <p:spPr>
           <a:xfrm>
-            <a:off x="5254752" y="4169664"/>
+            <a:off x="5759577" y="4169664"/>
             <a:ext cx="685800" cy="384048"/>
           </a:xfrm>
           <a:prstGeom prst="rect">
@@ -27335,7 +27842,7 @@
         </p:nvSpPr>
         <p:spPr>
           <a:xfrm>
-            <a:off x="5254752" y="4169664"/>
+            <a:off x="5759577" y="4169664"/>
             <a:ext cx="685800" cy="384048"/>
           </a:xfrm>
           <a:prstGeom prst="rect">
@@ -27374,7 +27881,7 @@
         </p:nvSpPr>
         <p:spPr>
           <a:xfrm>
-            <a:off x="6062472" y="4169664"/>
+            <a:off x="6668262" y="4169664"/>
             <a:ext cx="685800" cy="384048"/>
           </a:xfrm>
           <a:prstGeom prst="rect">
@@ -27401,7 +27908,7 @@
         </p:nvSpPr>
         <p:spPr>
           <a:xfrm>
-            <a:off x="6062472" y="4169664"/>
+            <a:off x="6668262" y="4169664"/>
             <a:ext cx="685800" cy="384048"/>
           </a:xfrm>
           <a:prstGeom prst="rect">
@@ -27440,7 +27947,7 @@
         </p:nvSpPr>
         <p:spPr>
           <a:xfrm>
-            <a:off x="6870192" y="4169664"/>
+            <a:off x="7576947" y="4169664"/>
             <a:ext cx="685800" cy="384048"/>
           </a:xfrm>
           <a:prstGeom prst="rect">
@@ -27467,7 +27974,7 @@
         </p:nvSpPr>
         <p:spPr>
           <a:xfrm>
-            <a:off x="6870192" y="4169664"/>
+            <a:off x="7576947" y="4169664"/>
             <a:ext cx="685800" cy="384048"/>
           </a:xfrm>
           <a:prstGeom prst="rect">
@@ -27492,7 +27999,7 @@
                 <a:ea typeface="Trebuchet MS" pitchFamily="34" charset="-122"/>
                 <a:cs typeface="Trebuchet MS" pitchFamily="34" charset="-120"/>
               </a:rPr>
-              <a:t>c</a:t>
+              <a:t>ct</a:t>
             </a:r>
             <a:endParaRPr lang="en-US" sz="900" dirty="0"/>
           </a:p>
@@ -27506,7 +28013,7 @@
         </p:nvSpPr>
         <p:spPr>
           <a:xfrm>
-            <a:off x="6870192" y="4572000"/>
+            <a:off x="7576947" y="4572000"/>
             <a:ext cx="685800" cy="219456"/>
           </a:xfrm>
           <a:prstGeom prst="rect">
@@ -27531,75 +28038,9 @@
                 <a:ea typeface="Calibri" pitchFamily="34" charset="-122"/>
                 <a:cs typeface="Calibri" pitchFamily="34" charset="-120"/>
               </a:rPr>
-              <a:t>/k/</a:t>
+              <a:t>/kt/</a:t>
             </a:r>
             <a:endParaRPr lang="en-US" sz="750" dirty="0"/>
-          </a:p>
-        </p:txBody>
-      </p:sp>
-      <p:sp>
-        <p:nvSpPr>
-          <p:cNvPr id="48" name="Shape 46"/>
-          <p:cNvSpPr/>
-          <p:nvPr/>
-        </p:nvSpPr>
-        <p:spPr>
-          <a:xfrm>
-            <a:off x="7677912" y="4169664"/>
-            <a:ext cx="685800" cy="384048"/>
-          </a:xfrm>
-          <a:prstGeom prst="rect">
-            <a:avLst>
-              <a:gd name="adj" fmla="val 9524"/>
-            </a:avLst>
-          </a:prstGeom>
-          <a:solidFill>
-            <a:srgbClr val="FFFFFF"/>
-          </a:solidFill>
-          <a:ln w="12700">
-            <a:solidFill>
-              <a:srgbClr val="DB2777"/>
-            </a:solidFill>
-            <a:prstDash val="solid"/>
-          </a:ln>
-        </p:spPr>
-      </p:sp>
-      <p:sp>
-        <p:nvSpPr>
-          <p:cNvPr id="49" name="Text 47"/>
-          <p:cNvSpPr/>
-          <p:nvPr/>
-        </p:nvSpPr>
-        <p:spPr>
-          <a:xfrm>
-            <a:off x="7677912" y="4169664"/>
-            <a:ext cx="685800" cy="384048"/>
-          </a:xfrm>
-          <a:prstGeom prst="rect">
-            <a:avLst/>
-          </a:prstGeom>
-          <a:noFill/>
-          <a:ln/>
-        </p:spPr>
-        <p:txBody>
-          <a:bodyPr wrap="square" lIns="0" tIns="0" rIns="0" bIns="0" rtlCol="0" anchor="ctr"/>
-          <a:lstStyle/>
-          <a:p>
-            <a:pPr algn="ctr" indent="0" marL="0">
-              <a:buNone/>
-            </a:pPr>
-            <a:r>
-              <a:rPr lang="en-US" sz="900" b="1" dirty="0">
-                <a:solidFill>
-                  <a:srgbClr val="9D174D"/>
-                </a:solidFill>
-                <a:latin typeface="Trebuchet MS" pitchFamily="34" charset="0"/>
-                <a:ea typeface="Trebuchet MS" pitchFamily="34" charset="-122"/>
-                <a:cs typeface="Trebuchet MS" pitchFamily="34" charset="-120"/>
-              </a:rPr>
-              <a:t>t</a:t>
-            </a:r>
-            <a:endParaRPr lang="en-US" sz="900" dirty="0"/>
           </a:p>
         </p:txBody>
       </p:sp>
@@ -27889,7 +28330,7 @@
                 <a:ea typeface="Calibri" pitchFamily="34" charset="-122"/>
                 <a:cs typeface="Calibri" pitchFamily="34" charset="-120"/>
               </a:rPr>
-              <a:t>Word Labs  •  wordlabs.app  •  Root: 'tract' = to pull or drag</a:t>
+              <a:t>Word Labs  •  wordlabs.app  •  Root: 'tract' = pull, drag, draw</a:t>
             </a:r>
             <a:endParaRPr lang="en-US" sz="800" dirty="0"/>
           </a:p>
@@ -28028,7 +28469,7 @@
                 <a:ea typeface="Trebuchet MS" pitchFamily="34" charset="-122"/>
                 <a:cs typeface="Trebuchet MS" pitchFamily="34" charset="-120"/>
               </a:rPr>
-              <a:t>tractor</a:t>
+              <a:t>extract</a:t>
             </a:r>
             <a:endParaRPr lang="en-US" sz="2800" dirty="0"/>
           </a:p>
@@ -28716,7 +29157,7 @@
                 <a:ea typeface="Calibri" pitchFamily="34" charset="-122"/>
                 <a:cs typeface="Calibri" pitchFamily="34" charset="-120"/>
               </a:rPr>
-              <a:t>Word Labs  •  wordlabs.app  •  Root: 'tract' = to pull or drag</a:t>
+              <a:t>Word Labs  •  wordlabs.app  •  Root: 'tract' = pull, drag, draw</a:t>
             </a:r>
             <a:endParaRPr lang="en-US" sz="800" dirty="0"/>
           </a:p>
@@ -28855,7 +29296,7 @@
                 <a:ea typeface="Trebuchet MS" pitchFamily="34" charset="-122"/>
                 <a:cs typeface="Trebuchet MS" pitchFamily="34" charset="-120"/>
               </a:rPr>
-              <a:t>tractor</a:t>
+              <a:t>extract</a:t>
             </a:r>
             <a:endParaRPr lang="en-US" sz="2800" dirty="0"/>
           </a:p>
@@ -28944,11 +29385,11 @@
             </a:avLst>
           </a:prstGeom>
           <a:solidFill>
-            <a:srgbClr val="CCFBF1"/>
+            <a:srgbClr val="DDD6FE"/>
           </a:solidFill>
           <a:ln w="19050">
             <a:solidFill>
-              <a:srgbClr val="0D9488"/>
+              <a:srgbClr val="7C3AED"/>
             </a:solidFill>
             <a:prstDash val="solid"/>
           </a:ln>
@@ -28988,13 +29429,13 @@
             <a:r>
               <a:rPr lang="en-US" sz="1300" b="1" dirty="0">
                 <a:solidFill>
-                  <a:srgbClr val="0F766E"/>
+                  <a:srgbClr val="4C1D95"/>
                 </a:solidFill>
                 <a:latin typeface="Trebuchet MS" pitchFamily="34" charset="0"/>
                 <a:ea typeface="Trebuchet MS" pitchFamily="34" charset="-122"/>
                 <a:cs typeface="Trebuchet MS" pitchFamily="34" charset="-120"/>
               </a:rPr>
-              <a:t>tract</a:t>
+              <a:t>ex</a:t>
             </a:r>
             <a:endParaRPr lang="en-US" sz="1300" dirty="0"/>
           </a:p>
@@ -29033,7 +29474,7 @@
                 <a:ea typeface="Calibri" pitchFamily="34" charset="-122"/>
                 <a:cs typeface="Calibri" pitchFamily="34" charset="-120"/>
               </a:rPr>
-              <a:t>to pull or drag</a:t>
+              <a:t>out, out of</a:t>
             </a:r>
             <a:endParaRPr lang="en-US" sz="850" dirty="0"/>
           </a:p>
@@ -29056,11 +29497,11 @@
             </a:avLst>
           </a:prstGeom>
           <a:solidFill>
-            <a:srgbClr val="FCE7F3"/>
+            <a:srgbClr val="CCFBF1"/>
           </a:solidFill>
           <a:ln w="19050">
             <a:solidFill>
-              <a:srgbClr val="DB2777"/>
+              <a:srgbClr val="0D9488"/>
             </a:solidFill>
             <a:prstDash val="solid"/>
           </a:ln>
@@ -29100,13 +29541,13 @@
             <a:r>
               <a:rPr lang="en-US" sz="1300" b="1" dirty="0">
                 <a:solidFill>
-                  <a:srgbClr val="9D174D"/>
+                  <a:srgbClr val="0F766E"/>
                 </a:solidFill>
                 <a:latin typeface="Trebuchet MS" pitchFamily="34" charset="0"/>
                 <a:ea typeface="Trebuchet MS" pitchFamily="34" charset="-122"/>
                 <a:cs typeface="Trebuchet MS" pitchFamily="34" charset="-120"/>
               </a:rPr>
-              <a:t>or</a:t>
+              <a:t>tract</a:t>
             </a:r>
             <a:endParaRPr lang="en-US" sz="1300" dirty="0"/>
           </a:p>
@@ -29145,7 +29586,7 @@
                 <a:ea typeface="Calibri" pitchFamily="34" charset="-122"/>
                 <a:cs typeface="Calibri" pitchFamily="34" charset="-120"/>
               </a:rPr>
-              <a:t>one who, thing that</a:t>
+              <a:t>pull, draw</a:t>
             </a:r>
             <a:endParaRPr lang="en-US" sz="850" dirty="0"/>
           </a:p>
@@ -29701,7 +30142,7 @@
                 <a:ea typeface="Calibri" pitchFamily="34" charset="-122"/>
                 <a:cs typeface="Calibri" pitchFamily="34" charset="-120"/>
               </a:rPr>
-              <a:t>Word Labs  •  wordlabs.app  •  Root: 'tract' = to pull or drag</a:t>
+              <a:t>Word Labs  •  wordlabs.app  •  Root: 'tract' = pull, drag, draw</a:t>
             </a:r>
             <a:endParaRPr lang="en-US" sz="800" dirty="0"/>
           </a:p>
@@ -29840,7 +30281,7 @@
                 <a:ea typeface="Trebuchet MS" pitchFamily="34" charset="-122"/>
                 <a:cs typeface="Trebuchet MS" pitchFamily="34" charset="-120"/>
               </a:rPr>
-              <a:t>tractor</a:t>
+              <a:t>extract</a:t>
             </a:r>
             <a:endParaRPr lang="en-US" sz="2800" dirty="0"/>
           </a:p>
@@ -29929,11 +30370,11 @@
             </a:avLst>
           </a:prstGeom>
           <a:solidFill>
-            <a:srgbClr val="CCFBF1"/>
+            <a:srgbClr val="DDD6FE"/>
           </a:solidFill>
           <a:ln w="19050">
             <a:solidFill>
-              <a:srgbClr val="0D9488"/>
+              <a:srgbClr val="7C3AED"/>
             </a:solidFill>
             <a:prstDash val="solid"/>
           </a:ln>
@@ -29973,13 +30414,13 @@
             <a:r>
               <a:rPr lang="en-US" sz="1300" b="1" dirty="0">
                 <a:solidFill>
-                  <a:srgbClr val="0F766E"/>
+                  <a:srgbClr val="4C1D95"/>
                 </a:solidFill>
                 <a:latin typeface="Trebuchet MS" pitchFamily="34" charset="0"/>
                 <a:ea typeface="Trebuchet MS" pitchFamily="34" charset="-122"/>
                 <a:cs typeface="Trebuchet MS" pitchFamily="34" charset="-120"/>
               </a:rPr>
-              <a:t>tract</a:t>
+              <a:t>ex</a:t>
             </a:r>
             <a:endParaRPr lang="en-US" sz="1300" dirty="0"/>
           </a:p>
@@ -30018,7 +30459,7 @@
                 <a:ea typeface="Calibri" pitchFamily="34" charset="-122"/>
                 <a:cs typeface="Calibri" pitchFamily="34" charset="-120"/>
               </a:rPr>
-              <a:t>to pull or drag</a:t>
+              <a:t>out, out of</a:t>
             </a:r>
             <a:endParaRPr lang="en-US" sz="850" dirty="0"/>
           </a:p>
@@ -30041,11 +30482,11 @@
             </a:avLst>
           </a:prstGeom>
           <a:solidFill>
-            <a:srgbClr val="FCE7F3"/>
+            <a:srgbClr val="CCFBF1"/>
           </a:solidFill>
           <a:ln w="19050">
             <a:solidFill>
-              <a:srgbClr val="DB2777"/>
+              <a:srgbClr val="0D9488"/>
             </a:solidFill>
             <a:prstDash val="solid"/>
           </a:ln>
@@ -30085,13 +30526,13 @@
             <a:r>
               <a:rPr lang="en-US" sz="1300" b="1" dirty="0">
                 <a:solidFill>
-                  <a:srgbClr val="9D174D"/>
+                  <a:srgbClr val="0F766E"/>
                 </a:solidFill>
                 <a:latin typeface="Trebuchet MS" pitchFamily="34" charset="0"/>
                 <a:ea typeface="Trebuchet MS" pitchFamily="34" charset="-122"/>
                 <a:cs typeface="Trebuchet MS" pitchFamily="34" charset="-120"/>
               </a:rPr>
-              <a:t>or</a:t>
+              <a:t>tract</a:t>
             </a:r>
             <a:endParaRPr lang="en-US" sz="1300" dirty="0"/>
           </a:p>
@@ -30130,7 +30571,7 @@
                 <a:ea typeface="Calibri" pitchFamily="34" charset="-122"/>
                 <a:cs typeface="Calibri" pitchFamily="34" charset="-120"/>
               </a:rPr>
-              <a:t>one who, thing that</a:t>
+              <a:t>pull, draw</a:t>
             </a:r>
             <a:endParaRPr lang="en-US" sz="850" dirty="0"/>
           </a:p>
@@ -30289,7 +30730,7 @@
                 <a:ea typeface="Trebuchet MS" pitchFamily="34" charset="-122"/>
                 <a:cs typeface="Trebuchet MS" pitchFamily="34" charset="-120"/>
               </a:rPr>
-              <a:t>trac</a:t>
+              <a:t>ex</a:t>
             </a:r>
             <a:endParaRPr lang="en-US" sz="1400" dirty="0"/>
           </a:p>
@@ -30394,7 +30835,7 @@
                 <a:ea typeface="Trebuchet MS" pitchFamily="34" charset="-122"/>
                 <a:cs typeface="Trebuchet MS" pitchFamily="34" charset="-120"/>
               </a:rPr>
-              <a:t>tor</a:t>
+              <a:t>tract</a:t>
             </a:r>
             <a:endParaRPr lang="en-US" sz="1400" dirty="0"/>
           </a:p>
@@ -30818,7 +31259,7 @@
                 <a:ea typeface="Calibri" pitchFamily="34" charset="-122"/>
                 <a:cs typeface="Calibri" pitchFamily="34" charset="-120"/>
               </a:rPr>
-              <a:t>Word Labs  •  wordlabs.app  •  Root: 'tract' = to pull or drag</a:t>
+              <a:t>Word Labs  •  wordlabs.app  •  Root: 'tract' = pull, drag, draw</a:t>
             </a:r>
             <a:endParaRPr lang="en-US" sz="800" dirty="0"/>
           </a:p>
@@ -30957,7 +31398,7 @@
                 <a:ea typeface="Trebuchet MS" pitchFamily="34" charset="-122"/>
                 <a:cs typeface="Trebuchet MS" pitchFamily="34" charset="-120"/>
               </a:rPr>
-              <a:t>tractor</a:t>
+              <a:t>extract</a:t>
             </a:r>
             <a:endParaRPr lang="en-US" sz="2800" dirty="0"/>
           </a:p>
@@ -31046,11 +31487,11 @@
             </a:avLst>
           </a:prstGeom>
           <a:solidFill>
-            <a:srgbClr val="CCFBF1"/>
+            <a:srgbClr val="DDD6FE"/>
           </a:solidFill>
           <a:ln w="19050">
             <a:solidFill>
-              <a:srgbClr val="0D9488"/>
+              <a:srgbClr val="7C3AED"/>
             </a:solidFill>
             <a:prstDash val="solid"/>
           </a:ln>
@@ -31090,13 +31531,13 @@
             <a:r>
               <a:rPr lang="en-US" sz="1300" b="1" dirty="0">
                 <a:solidFill>
-                  <a:srgbClr val="0F766E"/>
+                  <a:srgbClr val="4C1D95"/>
                 </a:solidFill>
                 <a:latin typeface="Trebuchet MS" pitchFamily="34" charset="0"/>
                 <a:ea typeface="Trebuchet MS" pitchFamily="34" charset="-122"/>
                 <a:cs typeface="Trebuchet MS" pitchFamily="34" charset="-120"/>
               </a:rPr>
-              <a:t>tract</a:t>
+              <a:t>ex</a:t>
             </a:r>
             <a:endParaRPr lang="en-US" sz="1300" dirty="0"/>
           </a:p>
@@ -31135,7 +31576,7 @@
                 <a:ea typeface="Calibri" pitchFamily="34" charset="-122"/>
                 <a:cs typeface="Calibri" pitchFamily="34" charset="-120"/>
               </a:rPr>
-              <a:t>to pull or drag</a:t>
+              <a:t>out, out of</a:t>
             </a:r>
             <a:endParaRPr lang="en-US" sz="850" dirty="0"/>
           </a:p>
@@ -31158,11 +31599,11 @@
             </a:avLst>
           </a:prstGeom>
           <a:solidFill>
-            <a:srgbClr val="FCE7F3"/>
+            <a:srgbClr val="CCFBF1"/>
           </a:solidFill>
           <a:ln w="19050">
             <a:solidFill>
-              <a:srgbClr val="DB2777"/>
+              <a:srgbClr val="0D9488"/>
             </a:solidFill>
             <a:prstDash val="solid"/>
           </a:ln>
@@ -31202,13 +31643,13 @@
             <a:r>
               <a:rPr lang="en-US" sz="1300" b="1" dirty="0">
                 <a:solidFill>
-                  <a:srgbClr val="9D174D"/>
+                  <a:srgbClr val="0F766E"/>
                 </a:solidFill>
                 <a:latin typeface="Trebuchet MS" pitchFamily="34" charset="0"/>
                 <a:ea typeface="Trebuchet MS" pitchFamily="34" charset="-122"/>
                 <a:cs typeface="Trebuchet MS" pitchFamily="34" charset="-120"/>
               </a:rPr>
-              <a:t>or</a:t>
+              <a:t>tract</a:t>
             </a:r>
             <a:endParaRPr lang="en-US" sz="1300" dirty="0"/>
           </a:p>
@@ -31247,7 +31688,7 @@
                 <a:ea typeface="Calibri" pitchFamily="34" charset="-122"/>
                 <a:cs typeface="Calibri" pitchFamily="34" charset="-120"/>
               </a:rPr>
-              <a:t>one who, thing that</a:t>
+              <a:t>pull, draw</a:t>
             </a:r>
             <a:endParaRPr lang="en-US" sz="850" dirty="0"/>
           </a:p>
@@ -31406,7 +31847,7 @@
                 <a:ea typeface="Trebuchet MS" pitchFamily="34" charset="-122"/>
                 <a:cs typeface="Trebuchet MS" pitchFamily="34" charset="-120"/>
               </a:rPr>
-              <a:t>trac</a:t>
+              <a:t>ex</a:t>
             </a:r>
             <a:endParaRPr lang="en-US" sz="1400" dirty="0"/>
           </a:p>
@@ -31511,7 +31952,7 @@
                 <a:ea typeface="Trebuchet MS" pitchFamily="34" charset="-122"/>
                 <a:cs typeface="Trebuchet MS" pitchFamily="34" charset="-120"/>
               </a:rPr>
-              <a:t>tor</a:t>
+              <a:t>tract</a:t>
             </a:r>
             <a:endParaRPr lang="en-US" sz="1400" dirty="0"/>
           </a:p>
@@ -31670,7 +32111,7 @@
                 <a:ea typeface="Trebuchet MS" pitchFamily="34" charset="-122"/>
                 <a:cs typeface="Trebuchet MS" pitchFamily="34" charset="-120"/>
               </a:rPr>
-              <a:t>t</a:t>
+              <a:t>e</a:t>
             </a:r>
             <a:endParaRPr lang="en-US" sz="900" dirty="0"/>
           </a:p>
@@ -31736,7 +32177,7 @@
                 <a:ea typeface="Trebuchet MS" pitchFamily="34" charset="-122"/>
                 <a:cs typeface="Trebuchet MS" pitchFamily="34" charset="-120"/>
               </a:rPr>
-              <a:t>r</a:t>
+              <a:t>x</a:t>
             </a:r>
             <a:endParaRPr lang="en-US" sz="900" dirty="0"/>
           </a:p>
@@ -31744,7 +32185,46 @@
       </p:sp>
       <p:sp>
         <p:nvSpPr>
-          <p:cNvPr id="37" name="Shape 35"/>
+          <p:cNvPr id="37" name="Text 35"/>
+          <p:cNvSpPr/>
+          <p:nvPr/>
+        </p:nvSpPr>
+        <p:spPr>
+          <a:xfrm>
+            <a:off x="3293146" y="4572000"/>
+            <a:ext cx="685800" cy="219456"/>
+          </a:xfrm>
+          <a:prstGeom prst="rect">
+            <a:avLst/>
+          </a:prstGeom>
+          <a:noFill/>
+          <a:ln/>
+        </p:spPr>
+        <p:txBody>
+          <a:bodyPr wrap="square" lIns="0" tIns="0" rIns="0" bIns="0" rtlCol="0" anchor="t"/>
+          <a:lstStyle/>
+          <a:p>
+            <a:pPr algn="ctr" indent="0" marL="0">
+              <a:buNone/>
+            </a:pPr>
+            <a:r>
+              <a:rPr lang="en-US" sz="750" i="1" dirty="0">
+                <a:solidFill>
+                  <a:srgbClr val="94A3B8"/>
+                </a:solidFill>
+                <a:latin typeface="Calibri" pitchFamily="34" charset="0"/>
+                <a:ea typeface="Calibri" pitchFamily="34" charset="-122"/>
+                <a:cs typeface="Calibri" pitchFamily="34" charset="-120"/>
+              </a:rPr>
+              <a:t>/ks/</a:t>
+            </a:r>
+            <a:endParaRPr lang="en-US" sz="750" dirty="0"/>
+          </a:p>
+        </p:txBody>
+      </p:sp>
+      <p:sp>
+        <p:nvSpPr>
+          <p:cNvPr id="38" name="Shape 36"/>
           <p:cNvSpPr/>
           <p:nvPr/>
         </p:nvSpPr>
@@ -31771,7 +32251,7 @@
       </p:sp>
       <p:sp>
         <p:nvSpPr>
-          <p:cNvPr id="38" name="Text 36"/>
+          <p:cNvPr id="39" name="Text 37"/>
           <p:cNvSpPr/>
           <p:nvPr/>
         </p:nvSpPr>
@@ -31802,7 +32282,7 @@
                 <a:ea typeface="Trebuchet MS" pitchFamily="34" charset="-122"/>
                 <a:cs typeface="Trebuchet MS" pitchFamily="34" charset="-120"/>
               </a:rPr>
-              <a:t>a</a:t>
+              <a:t>t</a:t>
             </a:r>
             <a:endParaRPr lang="en-US" sz="900" dirty="0"/>
           </a:p>
@@ -31810,7 +32290,7 @@
       </p:sp>
       <p:sp>
         <p:nvSpPr>
-          <p:cNvPr id="39" name="Shape 37"/>
+          <p:cNvPr id="40" name="Shape 38"/>
           <p:cNvSpPr/>
           <p:nvPr/>
         </p:nvSpPr>
@@ -31837,7 +32317,7 @@
       </p:sp>
       <p:sp>
         <p:nvSpPr>
-          <p:cNvPr id="40" name="Text 38"/>
+          <p:cNvPr id="41" name="Text 39"/>
           <p:cNvSpPr/>
           <p:nvPr/>
         </p:nvSpPr>
@@ -31868,7 +32348,7 @@
                 <a:ea typeface="Trebuchet MS" pitchFamily="34" charset="-122"/>
                 <a:cs typeface="Trebuchet MS" pitchFamily="34" charset="-120"/>
               </a:rPr>
-              <a:t>c</a:t>
+              <a:t>r</a:t>
             </a:r>
             <a:endParaRPr lang="en-US" sz="900" dirty="0"/>
           </a:p>
@@ -31876,13 +32356,145 @@
       </p:sp>
       <p:sp>
         <p:nvSpPr>
-          <p:cNvPr id="41" name="Text 39"/>
-          <p:cNvSpPr/>
-          <p:nvPr/>
-        </p:nvSpPr>
-        <p:spPr>
-          <a:xfrm>
-            <a:off x="5370141" y="4572000"/>
+          <p:cNvPr id="42" name="Shape 40"/>
+          <p:cNvSpPr/>
+          <p:nvPr/>
+        </p:nvSpPr>
+        <p:spPr>
+          <a:xfrm>
+            <a:off x="6408638" y="4169664"/>
+            <a:ext cx="685800" cy="384048"/>
+          </a:xfrm>
+          <a:prstGeom prst="rect">
+            <a:avLst>
+              <a:gd name="adj" fmla="val 9524"/>
+            </a:avLst>
+          </a:prstGeom>
+          <a:solidFill>
+            <a:srgbClr val="FFFFFF"/>
+          </a:solidFill>
+          <a:ln w="12700">
+            <a:solidFill>
+              <a:srgbClr val="DB2777"/>
+            </a:solidFill>
+            <a:prstDash val="solid"/>
+          </a:ln>
+        </p:spPr>
+      </p:sp>
+      <p:sp>
+        <p:nvSpPr>
+          <p:cNvPr id="43" name="Text 41"/>
+          <p:cNvSpPr/>
+          <p:nvPr/>
+        </p:nvSpPr>
+        <p:spPr>
+          <a:xfrm>
+            <a:off x="6408638" y="4169664"/>
+            <a:ext cx="685800" cy="384048"/>
+          </a:xfrm>
+          <a:prstGeom prst="rect">
+            <a:avLst/>
+          </a:prstGeom>
+          <a:noFill/>
+          <a:ln/>
+        </p:spPr>
+        <p:txBody>
+          <a:bodyPr wrap="square" lIns="0" tIns="0" rIns="0" bIns="0" rtlCol="0" anchor="ctr"/>
+          <a:lstStyle/>
+          <a:p>
+            <a:pPr algn="ctr" indent="0" marL="0">
+              <a:buNone/>
+            </a:pPr>
+            <a:r>
+              <a:rPr lang="en-US" sz="900" b="1" dirty="0">
+                <a:solidFill>
+                  <a:srgbClr val="9D174D"/>
+                </a:solidFill>
+                <a:latin typeface="Trebuchet MS" pitchFamily="34" charset="0"/>
+                <a:ea typeface="Trebuchet MS" pitchFamily="34" charset="-122"/>
+                <a:cs typeface="Trebuchet MS" pitchFamily="34" charset="-120"/>
+              </a:rPr>
+              <a:t>a</a:t>
+            </a:r>
+            <a:endParaRPr lang="en-US" sz="900" dirty="0"/>
+          </a:p>
+        </p:txBody>
+      </p:sp>
+      <p:sp>
+        <p:nvSpPr>
+          <p:cNvPr id="44" name="Shape 42"/>
+          <p:cNvSpPr/>
+          <p:nvPr/>
+        </p:nvSpPr>
+        <p:spPr>
+          <a:xfrm>
+            <a:off x="7447135" y="4169664"/>
+            <a:ext cx="685800" cy="384048"/>
+          </a:xfrm>
+          <a:prstGeom prst="rect">
+            <a:avLst>
+              <a:gd name="adj" fmla="val 9524"/>
+            </a:avLst>
+          </a:prstGeom>
+          <a:solidFill>
+            <a:srgbClr val="FFFFFF"/>
+          </a:solidFill>
+          <a:ln w="12700">
+            <a:solidFill>
+              <a:srgbClr val="DB2777"/>
+            </a:solidFill>
+            <a:prstDash val="solid"/>
+          </a:ln>
+        </p:spPr>
+      </p:sp>
+      <p:sp>
+        <p:nvSpPr>
+          <p:cNvPr id="45" name="Text 43"/>
+          <p:cNvSpPr/>
+          <p:nvPr/>
+        </p:nvSpPr>
+        <p:spPr>
+          <a:xfrm>
+            <a:off x="7447135" y="4169664"/>
+            <a:ext cx="685800" cy="384048"/>
+          </a:xfrm>
+          <a:prstGeom prst="rect">
+            <a:avLst/>
+          </a:prstGeom>
+          <a:noFill/>
+          <a:ln/>
+        </p:spPr>
+        <p:txBody>
+          <a:bodyPr wrap="square" lIns="0" tIns="0" rIns="0" bIns="0" rtlCol="0" anchor="ctr"/>
+          <a:lstStyle/>
+          <a:p>
+            <a:pPr algn="ctr" indent="0" marL="0">
+              <a:buNone/>
+            </a:pPr>
+            <a:r>
+              <a:rPr lang="en-US" sz="900" b="1" dirty="0">
+                <a:solidFill>
+                  <a:srgbClr val="9D174D"/>
+                </a:solidFill>
+                <a:latin typeface="Trebuchet MS" pitchFamily="34" charset="0"/>
+                <a:ea typeface="Trebuchet MS" pitchFamily="34" charset="-122"/>
+                <a:cs typeface="Trebuchet MS" pitchFamily="34" charset="-120"/>
+              </a:rPr>
+              <a:t>ct</a:t>
+            </a:r>
+            <a:endParaRPr lang="en-US" sz="900" dirty="0"/>
+          </a:p>
+        </p:txBody>
+      </p:sp>
+      <p:sp>
+        <p:nvSpPr>
+          <p:cNvPr id="46" name="Text 44"/>
+          <p:cNvSpPr/>
+          <p:nvPr/>
+        </p:nvSpPr>
+        <p:spPr>
+          <a:xfrm>
+            <a:off x="7447135" y="4572000"/>
             <a:ext cx="685800" cy="219456"/>
           </a:xfrm>
           <a:prstGeom prst="rect">
@@ -31907,141 +32519,9 @@
                 <a:ea typeface="Calibri" pitchFamily="34" charset="-122"/>
                 <a:cs typeface="Calibri" pitchFamily="34" charset="-120"/>
               </a:rPr>
-              <a:t>/k/</a:t>
+              <a:t>/kt/</a:t>
             </a:r>
             <a:endParaRPr lang="en-US" sz="750" dirty="0"/>
-          </a:p>
-        </p:txBody>
-      </p:sp>
-      <p:sp>
-        <p:nvSpPr>
-          <p:cNvPr id="42" name="Shape 40"/>
-          <p:cNvSpPr/>
-          <p:nvPr/>
-        </p:nvSpPr>
-        <p:spPr>
-          <a:xfrm>
-            <a:off x="6408638" y="4169664"/>
-            <a:ext cx="685800" cy="384048"/>
-          </a:xfrm>
-          <a:prstGeom prst="rect">
-            <a:avLst>
-              <a:gd name="adj" fmla="val 9524"/>
-            </a:avLst>
-          </a:prstGeom>
-          <a:solidFill>
-            <a:srgbClr val="FFFFFF"/>
-          </a:solidFill>
-          <a:ln w="12700">
-            <a:solidFill>
-              <a:srgbClr val="DB2777"/>
-            </a:solidFill>
-            <a:prstDash val="solid"/>
-          </a:ln>
-        </p:spPr>
-      </p:sp>
-      <p:sp>
-        <p:nvSpPr>
-          <p:cNvPr id="43" name="Text 41"/>
-          <p:cNvSpPr/>
-          <p:nvPr/>
-        </p:nvSpPr>
-        <p:spPr>
-          <a:xfrm>
-            <a:off x="6408638" y="4169664"/>
-            <a:ext cx="685800" cy="384048"/>
-          </a:xfrm>
-          <a:prstGeom prst="rect">
-            <a:avLst/>
-          </a:prstGeom>
-          <a:noFill/>
-          <a:ln/>
-        </p:spPr>
-        <p:txBody>
-          <a:bodyPr wrap="square" lIns="0" tIns="0" rIns="0" bIns="0" rtlCol="0" anchor="ctr"/>
-          <a:lstStyle/>
-          <a:p>
-            <a:pPr algn="ctr" indent="0" marL="0">
-              <a:buNone/>
-            </a:pPr>
-            <a:r>
-              <a:rPr lang="en-US" sz="900" b="1" dirty="0">
-                <a:solidFill>
-                  <a:srgbClr val="9D174D"/>
-                </a:solidFill>
-                <a:latin typeface="Trebuchet MS" pitchFamily="34" charset="0"/>
-                <a:ea typeface="Trebuchet MS" pitchFamily="34" charset="-122"/>
-                <a:cs typeface="Trebuchet MS" pitchFamily="34" charset="-120"/>
-              </a:rPr>
-              <a:t>t</a:t>
-            </a:r>
-            <a:endParaRPr lang="en-US" sz="900" dirty="0"/>
-          </a:p>
-        </p:txBody>
-      </p:sp>
-      <p:sp>
-        <p:nvSpPr>
-          <p:cNvPr id="44" name="Shape 42"/>
-          <p:cNvSpPr/>
-          <p:nvPr/>
-        </p:nvSpPr>
-        <p:spPr>
-          <a:xfrm>
-            <a:off x="7447135" y="4169664"/>
-            <a:ext cx="685800" cy="384048"/>
-          </a:xfrm>
-          <a:prstGeom prst="rect">
-            <a:avLst>
-              <a:gd name="adj" fmla="val 9524"/>
-            </a:avLst>
-          </a:prstGeom>
-          <a:solidFill>
-            <a:srgbClr val="FFFFFF"/>
-          </a:solidFill>
-          <a:ln w="12700">
-            <a:solidFill>
-              <a:srgbClr val="DB2777"/>
-            </a:solidFill>
-            <a:prstDash val="solid"/>
-          </a:ln>
-        </p:spPr>
-      </p:sp>
-      <p:sp>
-        <p:nvSpPr>
-          <p:cNvPr id="45" name="Text 43"/>
-          <p:cNvSpPr/>
-          <p:nvPr/>
-        </p:nvSpPr>
-        <p:spPr>
-          <a:xfrm>
-            <a:off x="7447135" y="4169664"/>
-            <a:ext cx="685800" cy="384048"/>
-          </a:xfrm>
-          <a:prstGeom prst="rect">
-            <a:avLst/>
-          </a:prstGeom>
-          <a:noFill/>
-          <a:ln/>
-        </p:spPr>
-        <p:txBody>
-          <a:bodyPr wrap="square" lIns="0" tIns="0" rIns="0" bIns="0" rtlCol="0" anchor="ctr"/>
-          <a:lstStyle/>
-          <a:p>
-            <a:pPr algn="ctr" indent="0" marL="0">
-              <a:buNone/>
-            </a:pPr>
-            <a:r>
-              <a:rPr lang="en-US" sz="900" b="1" dirty="0">
-                <a:solidFill>
-                  <a:srgbClr val="9D174D"/>
-                </a:solidFill>
-                <a:latin typeface="Trebuchet MS" pitchFamily="34" charset="0"/>
-                <a:ea typeface="Trebuchet MS" pitchFamily="34" charset="-122"/>
-                <a:cs typeface="Trebuchet MS" pitchFamily="34" charset="-120"/>
-              </a:rPr>
-              <a:t>or</a:t>
-            </a:r>
-            <a:endParaRPr lang="en-US" sz="900" dirty="0"/>
           </a:p>
         </p:txBody>
       </p:sp>
@@ -32331,7 +32811,7 @@
                 <a:ea typeface="Calibri" pitchFamily="34" charset="-122"/>
                 <a:cs typeface="Calibri" pitchFamily="34" charset="-120"/>
               </a:rPr>
-              <a:t>Word Labs  •  wordlabs.app  •  Root: 'tract' = to pull or drag</a:t>
+              <a:t>Word Labs  •  wordlabs.app  •  Root: 'tract' = pull, drag, draw</a:t>
             </a:r>
             <a:endParaRPr lang="en-US" sz="800" dirty="0"/>
           </a:p>
@@ -33500,7 +33980,7 @@
                 <a:ea typeface="Calibri" pitchFamily="34" charset="-122"/>
                 <a:cs typeface="Calibri" pitchFamily="34" charset="-120"/>
               </a:rPr>
-              <a:t>Word Labs  •  wordlabs.app  •  Root: 'tract' = to pull or drag</a:t>
+              <a:t>Word Labs  •  wordlabs.app  •  Root: 'tract' = pull, drag, draw</a:t>
             </a:r>
             <a:endParaRPr lang="en-US" sz="800" dirty="0"/>
           </a:p>
@@ -33801,7 +34281,7 @@
                 <a:ea typeface="Trebuchet MS" pitchFamily="34" charset="-122"/>
                 <a:cs typeface="Trebuchet MS" pitchFamily="34" charset="-120"/>
               </a:rPr>
-              <a:t>at-</a:t>
+              <a:t>re-</a:t>
             </a:r>
             <a:endParaRPr lang="en-US" sz="1300" dirty="0"/>
           </a:p>
@@ -33929,7 +34409,7 @@
                 <a:ea typeface="Trebuchet MS" pitchFamily="34" charset="-122"/>
                 <a:cs typeface="Trebuchet MS" pitchFamily="34" charset="-120"/>
               </a:rPr>
-              <a:t>-ed</a:t>
+              <a:t>-ion</a:t>
             </a:r>
             <a:endParaRPr lang="en-US" sz="1300" dirty="0"/>
           </a:p>
@@ -33993,7 +34473,7 @@
                 <a:ea typeface="Trebuchet MS" pitchFamily="34" charset="-122"/>
                 <a:cs typeface="Trebuchet MS" pitchFamily="34" charset="-120"/>
               </a:rPr>
-              <a:t>con-</a:t>
+              <a:t>ex-</a:t>
             </a:r>
             <a:endParaRPr lang="en-US" sz="1300" dirty="0"/>
           </a:p>
@@ -34082,7 +34562,7 @@
                 <a:ea typeface="Trebuchet MS" pitchFamily="34" charset="-122"/>
                 <a:cs typeface="Trebuchet MS" pitchFamily="34" charset="-120"/>
               </a:rPr>
-              <a:t>-ing</a:t>
+              <a:t>-or</a:t>
             </a:r>
             <a:endParaRPr lang="en-US" sz="1300" dirty="0"/>
           </a:p>
@@ -34146,7 +34626,7 @@
                 <a:ea typeface="Trebuchet MS" pitchFamily="34" charset="-122"/>
                 <a:cs typeface="Trebuchet MS" pitchFamily="34" charset="-120"/>
               </a:rPr>
-              <a:t>de-</a:t>
+              <a:t>con-</a:t>
             </a:r>
             <a:endParaRPr lang="en-US" sz="1300" dirty="0"/>
           </a:p>
@@ -34235,7 +34715,7 @@
                 <a:ea typeface="Trebuchet MS" pitchFamily="34" charset="-122"/>
                 <a:cs typeface="Trebuchet MS" pitchFamily="34" charset="-120"/>
               </a:rPr>
-              <a:t>-ion</a:t>
+              <a:t>-ed</a:t>
             </a:r>
             <a:endParaRPr lang="en-US" sz="1300" dirty="0"/>
           </a:p>
@@ -34299,7 +34779,7 @@
                 <a:ea typeface="Trebuchet MS" pitchFamily="34" charset="-122"/>
                 <a:cs typeface="Trebuchet MS" pitchFamily="34" charset="-120"/>
               </a:rPr>
-              <a:t>dis-</a:t>
+              <a:t>de-</a:t>
             </a:r>
             <a:endParaRPr lang="en-US" sz="1300" dirty="0"/>
           </a:p>
@@ -34388,7 +34868,7 @@
                 <a:ea typeface="Trebuchet MS" pitchFamily="34" charset="-122"/>
                 <a:cs typeface="Trebuchet MS" pitchFamily="34" charset="-120"/>
               </a:rPr>
-              <a:t>-or</a:t>
+              <a:t>-ing</a:t>
             </a:r>
             <a:endParaRPr lang="en-US" sz="1300" dirty="0"/>
           </a:p>
@@ -34452,7 +34932,7 @@
                 <a:ea typeface="Trebuchet MS" pitchFamily="34" charset="-122"/>
                 <a:cs typeface="Trebuchet MS" pitchFamily="34" charset="-120"/>
               </a:rPr>
-              <a:t>ex-</a:t>
+              <a:t>sub-</a:t>
             </a:r>
             <a:endParaRPr lang="en-US" sz="1300" dirty="0"/>
           </a:p>
@@ -34549,39 +35029,14 @@
       </p:sp>
       <p:sp>
         <p:nvSpPr>
-          <p:cNvPr id="43" name="Shape 41"/>
-          <p:cNvSpPr/>
-          <p:nvPr/>
-        </p:nvSpPr>
-        <p:spPr>
-          <a:xfrm>
-            <a:off x="365760" y="3666744"/>
-            <a:ext cx="2468880" cy="402336"/>
-          </a:xfrm>
-          <a:prstGeom prst="rect">
-            <a:avLst/>
-          </a:prstGeom>
-          <a:solidFill>
-            <a:srgbClr val="DDD6FE"/>
-          </a:solidFill>
-          <a:ln w="12700">
-            <a:solidFill>
-              <a:srgbClr val="E2E8F0"/>
-            </a:solidFill>
-            <a:prstDash val="solid"/>
-          </a:ln>
-        </p:spPr>
-      </p:sp>
-      <p:sp>
-        <p:nvSpPr>
-          <p:cNvPr id="44" name="Text 42"/>
-          <p:cNvSpPr/>
-          <p:nvPr/>
-        </p:nvSpPr>
-        <p:spPr>
-          <a:xfrm>
-            <a:off x="365760" y="3666744"/>
-            <a:ext cx="2468880" cy="402336"/>
+          <p:cNvPr id="43" name="Text 41"/>
+          <p:cNvSpPr/>
+          <p:nvPr/>
+        </p:nvSpPr>
+        <p:spPr>
+          <a:xfrm>
+            <a:off x="365760" y="3611880"/>
+            <a:ext cx="1828800" cy="347472"/>
           </a:xfrm>
           <a:prstGeom prst="rect">
             <a:avLst/>
@@ -34593,84 +35048,61 @@
           <a:bodyPr wrap="square" lIns="0" tIns="0" rIns="0" bIns="0" rtlCol="0" anchor="ctr"/>
           <a:lstStyle/>
           <a:p>
-            <a:pPr algn="ctr" indent="0" marL="0">
-              <a:buNone/>
-            </a:pPr>
-            <a:r>
-              <a:rPr lang="en-US" sz="1300" b="1" dirty="0">
-                <a:solidFill>
-                  <a:srgbClr val="4C1D95"/>
+            <a:pPr algn="l" indent="0" marL="0">
+              <a:buNone/>
+            </a:pPr>
+            <a:r>
+              <a:rPr lang="en-US" sz="1200" b="1" dirty="0">
+                <a:solidFill>
+                  <a:srgbClr val="0F172A"/>
                 </a:solidFill>
                 <a:latin typeface="Trebuchet MS" pitchFamily="34" charset="0"/>
                 <a:ea typeface="Trebuchet MS" pitchFamily="34" charset="-122"/>
                 <a:cs typeface="Trebuchet MS" pitchFamily="34" charset="-120"/>
               </a:rPr>
-              <a:t>sub-</a:t>
-            </a:r>
-            <a:endParaRPr lang="en-US" sz="1300" dirty="0"/>
-          </a:p>
-        </p:txBody>
-      </p:sp>
-      <p:sp>
-        <p:nvSpPr>
-          <p:cNvPr id="45" name="Shape 43"/>
-          <p:cNvSpPr/>
-          <p:nvPr/>
-        </p:nvSpPr>
-        <p:spPr>
-          <a:xfrm>
-            <a:off x="2971800" y="3666744"/>
-            <a:ext cx="2834640" cy="402336"/>
-          </a:xfrm>
-          <a:prstGeom prst="rect">
-            <a:avLst/>
-          </a:prstGeom>
-          <a:solidFill>
-            <a:srgbClr val="F1F5F9"/>
-          </a:solidFill>
-          <a:ln w="12700">
-            <a:solidFill>
-              <a:srgbClr val="E2E8F0"/>
-            </a:solidFill>
-            <a:prstDash val="solid"/>
-          </a:ln>
-        </p:spPr>
-      </p:sp>
-      <p:sp>
-        <p:nvSpPr>
-          <p:cNvPr id="46" name="Shape 44"/>
-          <p:cNvSpPr/>
-          <p:nvPr/>
-        </p:nvSpPr>
-        <p:spPr>
-          <a:xfrm>
-            <a:off x="5943600" y="3666744"/>
-            <a:ext cx="2834640" cy="402336"/>
-          </a:xfrm>
-          <a:prstGeom prst="rect">
-            <a:avLst/>
-          </a:prstGeom>
-          <a:solidFill>
-            <a:srgbClr val="F1F5F9"/>
-          </a:solidFill>
-          <a:ln w="12700">
-            <a:solidFill>
-              <a:srgbClr val="E2E8F0"/>
-            </a:solidFill>
-            <a:prstDash val="solid"/>
-          </a:ln>
-        </p:spPr>
-      </p:sp>
-      <p:sp>
-        <p:nvSpPr>
-          <p:cNvPr id="47" name="Text 45"/>
-          <p:cNvSpPr/>
-          <p:nvPr/>
-        </p:nvSpPr>
-        <p:spPr>
-          <a:xfrm>
-            <a:off x="365760" y="3611880"/>
-            <a:ext cx="1828800" cy="347472"/>
+              <a:t>Sample words:</a:t>
+            </a:r>
+            <a:endParaRPr lang="en-US" sz="1200" dirty="0"/>
+          </a:p>
+        </p:txBody>
+      </p:sp>
+      <p:sp>
+        <p:nvSpPr>
+          <p:cNvPr id="44" name="Shape 42"/>
+          <p:cNvSpPr/>
+          <p:nvPr/>
+        </p:nvSpPr>
+        <p:spPr>
+          <a:xfrm>
+            <a:off x="365760" y="4023360"/>
+            <a:ext cx="2011680" cy="402336"/>
+          </a:xfrm>
+          <a:prstGeom prst="rect">
+            <a:avLst>
+              <a:gd name="adj" fmla="val 13636"/>
+            </a:avLst>
+          </a:prstGeom>
+          <a:solidFill>
+            <a:srgbClr val="EEF2FF"/>
+          </a:solidFill>
+          <a:ln w="12700">
+            <a:solidFill>
+              <a:srgbClr val="6366F1"/>
+            </a:solidFill>
+            <a:prstDash val="solid"/>
+          </a:ln>
+        </p:spPr>
+      </p:sp>
+      <p:sp>
+        <p:nvSpPr>
+          <p:cNvPr id="45" name="Text 43"/>
+          <p:cNvSpPr/>
+          <p:nvPr/>
+        </p:nvSpPr>
+        <p:spPr>
+          <a:xfrm>
+            <a:off x="365760" y="4023360"/>
+            <a:ext cx="2011680" cy="402336"/>
           </a:xfrm>
           <a:prstGeom prst="rect">
             <a:avLst/>
@@ -34682,19 +35114,19 @@
           <a:bodyPr wrap="square" lIns="0" tIns="0" rIns="0" bIns="0" rtlCol="0" anchor="ctr"/>
           <a:lstStyle/>
           <a:p>
-            <a:pPr algn="l" indent="0" marL="0">
+            <a:pPr algn="ctr" indent="0" marL="0">
               <a:buNone/>
             </a:pPr>
             <a:r>
               <a:rPr lang="en-US" sz="1200" b="1" dirty="0">
                 <a:solidFill>
-                  <a:srgbClr val="0F172A"/>
+                  <a:srgbClr val="4338CA"/>
                 </a:solidFill>
                 <a:latin typeface="Trebuchet MS" pitchFamily="34" charset="0"/>
                 <a:ea typeface="Trebuchet MS" pitchFamily="34" charset="-122"/>
                 <a:cs typeface="Trebuchet MS" pitchFamily="34" charset="-120"/>
               </a:rPr>
-              <a:t>Sample words:</a:t>
+              <a:t>tractor</a:t>
             </a:r>
             <a:endParaRPr lang="en-US" sz="1200" dirty="0"/>
           </a:p>
@@ -34702,13 +35134,13 @@
       </p:sp>
       <p:sp>
         <p:nvSpPr>
-          <p:cNvPr id="48" name="Shape 46"/>
-          <p:cNvSpPr/>
-          <p:nvPr/>
-        </p:nvSpPr>
-        <p:spPr>
-          <a:xfrm>
-            <a:off x="365760" y="4023360"/>
+          <p:cNvPr id="46" name="Shape 44"/>
+          <p:cNvSpPr/>
+          <p:nvPr/>
+        </p:nvSpPr>
+        <p:spPr>
+          <a:xfrm>
+            <a:off x="2542032" y="4023360"/>
             <a:ext cx="2011680" cy="402336"/>
           </a:xfrm>
           <a:prstGeom prst="rect">
@@ -34729,13 +35161,13 @@
       </p:sp>
       <p:sp>
         <p:nvSpPr>
-          <p:cNvPr id="49" name="Text 47"/>
-          <p:cNvSpPr/>
-          <p:nvPr/>
-        </p:nvSpPr>
-        <p:spPr>
-          <a:xfrm>
-            <a:off x="365760" y="4023360"/>
+          <p:cNvPr id="47" name="Text 45"/>
+          <p:cNvSpPr/>
+          <p:nvPr/>
+        </p:nvSpPr>
+        <p:spPr>
+          <a:xfrm>
+            <a:off x="2542032" y="4023360"/>
             <a:ext cx="2011680" cy="402336"/>
           </a:xfrm>
           <a:prstGeom prst="rect">
@@ -34760,7 +35192,7 @@
                 <a:ea typeface="Trebuchet MS" pitchFamily="34" charset="-122"/>
                 <a:cs typeface="Trebuchet MS" pitchFamily="34" charset="-120"/>
               </a:rPr>
-              <a:t>attract</a:t>
+              <a:t>extract</a:t>
             </a:r>
             <a:endParaRPr lang="en-US" sz="1200" dirty="0"/>
           </a:p>
@@ -34768,13 +35200,13 @@
       </p:sp>
       <p:sp>
         <p:nvSpPr>
-          <p:cNvPr id="50" name="Shape 48"/>
-          <p:cNvSpPr/>
-          <p:nvPr/>
-        </p:nvSpPr>
-        <p:spPr>
-          <a:xfrm>
-            <a:off x="2542032" y="4023360"/>
+          <p:cNvPr id="48" name="Shape 46"/>
+          <p:cNvSpPr/>
+          <p:nvPr/>
+        </p:nvSpPr>
+        <p:spPr>
+          <a:xfrm>
+            <a:off x="4718304" y="4023360"/>
             <a:ext cx="2011680" cy="402336"/>
           </a:xfrm>
           <a:prstGeom prst="rect">
@@ -34795,13 +35227,13 @@
       </p:sp>
       <p:sp>
         <p:nvSpPr>
-          <p:cNvPr id="51" name="Text 49"/>
-          <p:cNvSpPr/>
-          <p:nvPr/>
-        </p:nvSpPr>
-        <p:spPr>
-          <a:xfrm>
-            <a:off x="2542032" y="4023360"/>
+          <p:cNvPr id="49" name="Text 47"/>
+          <p:cNvSpPr/>
+          <p:nvPr/>
+        </p:nvSpPr>
+        <p:spPr>
+          <a:xfrm>
+            <a:off x="4718304" y="4023360"/>
             <a:ext cx="2011680" cy="402336"/>
           </a:xfrm>
           <a:prstGeom prst="rect">
@@ -34834,13 +35266,13 @@
       </p:sp>
       <p:sp>
         <p:nvSpPr>
-          <p:cNvPr id="52" name="Shape 50"/>
-          <p:cNvSpPr/>
-          <p:nvPr/>
-        </p:nvSpPr>
-        <p:spPr>
-          <a:xfrm>
-            <a:off x="4718304" y="4023360"/>
+          <p:cNvPr id="50" name="Shape 48"/>
+          <p:cNvSpPr/>
+          <p:nvPr/>
+        </p:nvSpPr>
+        <p:spPr>
+          <a:xfrm>
+            <a:off x="6894576" y="4023360"/>
             <a:ext cx="2011680" cy="402336"/>
           </a:xfrm>
           <a:prstGeom prst="rect">
@@ -34861,13 +35293,13 @@
       </p:sp>
       <p:sp>
         <p:nvSpPr>
-          <p:cNvPr id="53" name="Text 51"/>
-          <p:cNvSpPr/>
-          <p:nvPr/>
-        </p:nvSpPr>
-        <p:spPr>
-          <a:xfrm>
-            <a:off x="4718304" y="4023360"/>
+          <p:cNvPr id="51" name="Text 49"/>
+          <p:cNvSpPr/>
+          <p:nvPr/>
+        </p:nvSpPr>
+        <p:spPr>
+          <a:xfrm>
+            <a:off x="6894576" y="4023360"/>
             <a:ext cx="2011680" cy="402336"/>
           </a:xfrm>
           <a:prstGeom prst="rect">
@@ -34892,7 +35324,7 @@
                 <a:ea typeface="Trebuchet MS" pitchFamily="34" charset="-122"/>
                 <a:cs typeface="Trebuchet MS" pitchFamily="34" charset="-120"/>
               </a:rPr>
-              <a:t>detract</a:t>
+              <a:t>subtract</a:t>
             </a:r>
             <a:endParaRPr lang="en-US" sz="1200" dirty="0"/>
           </a:p>
@@ -34900,13 +35332,13 @@
       </p:sp>
       <p:sp>
         <p:nvSpPr>
-          <p:cNvPr id="54" name="Shape 52"/>
-          <p:cNvSpPr/>
-          <p:nvPr/>
-        </p:nvSpPr>
-        <p:spPr>
-          <a:xfrm>
-            <a:off x="6894576" y="4023360"/>
+          <p:cNvPr id="52" name="Shape 50"/>
+          <p:cNvSpPr/>
+          <p:nvPr/>
+        </p:nvSpPr>
+        <p:spPr>
+          <a:xfrm>
+            <a:off x="365760" y="4498848"/>
             <a:ext cx="2011680" cy="402336"/>
           </a:xfrm>
           <a:prstGeom prst="rect">
@@ -34927,13 +35359,13 @@
       </p:sp>
       <p:sp>
         <p:nvSpPr>
-          <p:cNvPr id="55" name="Text 53"/>
-          <p:cNvSpPr/>
-          <p:nvPr/>
-        </p:nvSpPr>
-        <p:spPr>
-          <a:xfrm>
-            <a:off x="6894576" y="4023360"/>
+          <p:cNvPr id="53" name="Text 51"/>
+          <p:cNvSpPr/>
+          <p:nvPr/>
+        </p:nvSpPr>
+        <p:spPr>
+          <a:xfrm>
+            <a:off x="365760" y="4498848"/>
             <a:ext cx="2011680" cy="402336"/>
           </a:xfrm>
           <a:prstGeom prst="rect">
@@ -34966,13 +35398,13 @@
       </p:sp>
       <p:sp>
         <p:nvSpPr>
-          <p:cNvPr id="56" name="Shape 54"/>
-          <p:cNvSpPr/>
-          <p:nvPr/>
-        </p:nvSpPr>
-        <p:spPr>
-          <a:xfrm>
-            <a:off x="365760" y="4498848"/>
+          <p:cNvPr id="54" name="Shape 52"/>
+          <p:cNvSpPr/>
+          <p:nvPr/>
+        </p:nvSpPr>
+        <p:spPr>
+          <a:xfrm>
+            <a:off x="2542032" y="4498848"/>
             <a:ext cx="2011680" cy="402336"/>
           </a:xfrm>
           <a:prstGeom prst="rect">
@@ -34993,13 +35425,13 @@
       </p:sp>
       <p:sp>
         <p:nvSpPr>
-          <p:cNvPr id="57" name="Text 55"/>
-          <p:cNvSpPr/>
-          <p:nvPr/>
-        </p:nvSpPr>
-        <p:spPr>
-          <a:xfrm>
-            <a:off x="365760" y="4498848"/>
+          <p:cNvPr id="55" name="Text 53"/>
+          <p:cNvSpPr/>
+          <p:nvPr/>
+        </p:nvSpPr>
+        <p:spPr>
+          <a:xfrm>
+            <a:off x="2542032" y="4498848"/>
             <a:ext cx="2011680" cy="402336"/>
           </a:xfrm>
           <a:prstGeom prst="rect">
@@ -35024,7 +35456,7 @@
                 <a:ea typeface="Trebuchet MS" pitchFamily="34" charset="-122"/>
                 <a:cs typeface="Trebuchet MS" pitchFamily="34" charset="-120"/>
               </a:rPr>
-              <a:t>extract</a:t>
+              <a:t>retract</a:t>
             </a:r>
             <a:endParaRPr lang="en-US" sz="1200" dirty="0"/>
           </a:p>
@@ -35032,13 +35464,13 @@
       </p:sp>
       <p:sp>
         <p:nvSpPr>
-          <p:cNvPr id="58" name="Shape 56"/>
-          <p:cNvSpPr/>
-          <p:nvPr/>
-        </p:nvSpPr>
-        <p:spPr>
-          <a:xfrm>
-            <a:off x="2542032" y="4498848"/>
+          <p:cNvPr id="56" name="Shape 54"/>
+          <p:cNvSpPr/>
+          <p:nvPr/>
+        </p:nvSpPr>
+        <p:spPr>
+          <a:xfrm>
+            <a:off x="4718304" y="4498848"/>
             <a:ext cx="2011680" cy="402336"/>
           </a:xfrm>
           <a:prstGeom prst="rect">
@@ -35059,13 +35491,13 @@
       </p:sp>
       <p:sp>
         <p:nvSpPr>
-          <p:cNvPr id="59" name="Text 57"/>
-          <p:cNvSpPr/>
-          <p:nvPr/>
-        </p:nvSpPr>
-        <p:spPr>
-          <a:xfrm>
-            <a:off x="2542032" y="4498848"/>
+          <p:cNvPr id="57" name="Text 55"/>
+          <p:cNvSpPr/>
+          <p:nvPr/>
+        </p:nvSpPr>
+        <p:spPr>
+          <a:xfrm>
+            <a:off x="4718304" y="4498848"/>
             <a:ext cx="2011680" cy="402336"/>
           </a:xfrm>
           <a:prstGeom prst="rect">
@@ -35090,7 +35522,7 @@
                 <a:ea typeface="Trebuchet MS" pitchFamily="34" charset="-122"/>
                 <a:cs typeface="Trebuchet MS" pitchFamily="34" charset="-120"/>
               </a:rPr>
-              <a:t>subtract</a:t>
+              <a:t>attract</a:t>
             </a:r>
             <a:endParaRPr lang="en-US" sz="1200" dirty="0"/>
           </a:p>
@@ -35098,13 +35530,13 @@
       </p:sp>
       <p:sp>
         <p:nvSpPr>
-          <p:cNvPr id="60" name="Shape 58"/>
-          <p:cNvSpPr/>
-          <p:nvPr/>
-        </p:nvSpPr>
-        <p:spPr>
-          <a:xfrm>
-            <a:off x="4718304" y="4498848"/>
+          <p:cNvPr id="58" name="Shape 56"/>
+          <p:cNvSpPr/>
+          <p:nvPr/>
+        </p:nvSpPr>
+        <p:spPr>
+          <a:xfrm>
+            <a:off x="6894576" y="4498848"/>
             <a:ext cx="2011680" cy="402336"/>
           </a:xfrm>
           <a:prstGeom prst="rect">
@@ -35125,13 +35557,13 @@
       </p:sp>
       <p:sp>
         <p:nvSpPr>
-          <p:cNvPr id="61" name="Text 59"/>
-          <p:cNvSpPr/>
-          <p:nvPr/>
-        </p:nvSpPr>
-        <p:spPr>
-          <a:xfrm>
-            <a:off x="4718304" y="4498848"/>
+          <p:cNvPr id="59" name="Text 57"/>
+          <p:cNvSpPr/>
+          <p:nvPr/>
+        </p:nvSpPr>
+        <p:spPr>
+          <a:xfrm>
+            <a:off x="6894576" y="4498848"/>
             <a:ext cx="2011680" cy="402336"/>
           </a:xfrm>
           <a:prstGeom prst="rect">
@@ -35156,73 +35588,7 @@
                 <a:ea typeface="Trebuchet MS" pitchFamily="34" charset="-122"/>
                 <a:cs typeface="Trebuchet MS" pitchFamily="34" charset="-120"/>
               </a:rPr>
-              <a:t>tractor</a:t>
-            </a:r>
-            <a:endParaRPr lang="en-US" sz="1200" dirty="0"/>
-          </a:p>
-        </p:txBody>
-      </p:sp>
-      <p:sp>
-        <p:nvSpPr>
-          <p:cNvPr id="62" name="Shape 60"/>
-          <p:cNvSpPr/>
-          <p:nvPr/>
-        </p:nvSpPr>
-        <p:spPr>
-          <a:xfrm>
-            <a:off x="6894576" y="4498848"/>
-            <a:ext cx="2011680" cy="402336"/>
-          </a:xfrm>
-          <a:prstGeom prst="rect">
-            <a:avLst>
-              <a:gd name="adj" fmla="val 13636"/>
-            </a:avLst>
-          </a:prstGeom>
-          <a:solidFill>
-            <a:srgbClr val="EEF2FF"/>
-          </a:solidFill>
-          <a:ln w="12700">
-            <a:solidFill>
-              <a:srgbClr val="6366F1"/>
-            </a:solidFill>
-            <a:prstDash val="solid"/>
-          </a:ln>
-        </p:spPr>
-      </p:sp>
-      <p:sp>
-        <p:nvSpPr>
-          <p:cNvPr id="63" name="Text 61"/>
-          <p:cNvSpPr/>
-          <p:nvPr/>
-        </p:nvSpPr>
-        <p:spPr>
-          <a:xfrm>
-            <a:off x="6894576" y="4498848"/>
-            <a:ext cx="2011680" cy="402336"/>
-          </a:xfrm>
-          <a:prstGeom prst="rect">
-            <a:avLst/>
-          </a:prstGeom>
-          <a:noFill/>
-          <a:ln/>
-        </p:spPr>
-        <p:txBody>
-          <a:bodyPr wrap="square" lIns="0" tIns="0" rIns="0" bIns="0" rtlCol="0" anchor="ctr"/>
-          <a:lstStyle/>
-          <a:p>
-            <a:pPr algn="ctr" indent="0" marL="0">
-              <a:buNone/>
-            </a:pPr>
-            <a:r>
-              <a:rPr lang="en-US" sz="1200" b="1" dirty="0">
-                <a:solidFill>
-                  <a:srgbClr val="4338CA"/>
-                </a:solidFill>
-                <a:latin typeface="Trebuchet MS" pitchFamily="34" charset="0"/>
-                <a:ea typeface="Trebuchet MS" pitchFamily="34" charset="-122"/>
-                <a:cs typeface="Trebuchet MS" pitchFamily="34" charset="-120"/>
-              </a:rPr>
-              <a:t>retract</a:t>
+              <a:t>traction</a:t>
             </a:r>
             <a:endParaRPr lang="en-US" sz="1200" dirty="0"/>
           </a:p>
@@ -35514,7 +35880,7 @@
                 <a:ea typeface="Calibri" pitchFamily="34" charset="-122"/>
                 <a:cs typeface="Calibri" pitchFamily="34" charset="-120"/>
               </a:rPr>
-              <a:t>Word Labs  •  wordlabs.app  •  Root: 'tract' = to pull or drag</a:t>
+              <a:t>Word Labs  •  wordlabs.app  •  Root: 'tract' = pull, drag, draw</a:t>
             </a:r>
             <a:endParaRPr lang="en-US" sz="800" dirty="0"/>
           </a:p>
@@ -35678,7 +36044,7 @@
                 <a:ea typeface="Calibri" pitchFamily="34" charset="-122"/>
                 <a:cs typeface="Calibri" pitchFamily="34" charset="-120"/>
               </a:rPr>
-              <a:t>The core part of a word carrying its basic meaning. For example, 'tract' means 'to pull or drag'.</a:t>
+              <a:t>The core part of a word carrying its basic meaning. For example, 'tract' means 'pull, drag, draw'.</a:t>
             </a:r>
             <a:endParaRPr lang="en-US" sz="1350" dirty="0"/>
           </a:p>
@@ -36298,7 +36664,7 @@
                 <a:ea typeface="Calibri" pitchFamily="34" charset="-122"/>
                 <a:cs typeface="Calibri" pitchFamily="34" charset="-120"/>
               </a:rPr>
-              <a:t>Word Labs  •  wordlabs.app  •  Root: 'tract' = to pull or drag</a:t>
+              <a:t>Word Labs  •  wordlabs.app  •  Root: 'tract' = pull, drag, draw</a:t>
             </a:r>
             <a:endParaRPr lang="en-US" sz="800" dirty="0"/>
           </a:p>
@@ -36410,7 +36776,7 @@
                 <a:ea typeface="Calibri" pitchFamily="34" charset="-122"/>
                 <a:cs typeface="Calibri" pitchFamily="34" charset="-120"/>
               </a:rPr>
-              <a:t>1.  The root 'tract' comes from a Latin word meaning to pull or drag.</a:t>
+              <a:t>1.  The word 'extract' means to push something deeper inside.</a:t>
             </a:r>
             <a:endParaRPr lang="en-US" sz="1300" dirty="0"/>
           </a:p>
@@ -36433,11 +36799,11 @@
             </a:avLst>
           </a:prstGeom>
           <a:solidFill>
-            <a:srgbClr val="DCFCE7"/>
-          </a:solidFill>
-          <a:ln w="12700">
-            <a:solidFill>
-              <a:srgbClr val="16A34A"/>
+            <a:srgbClr val="FEE2E2"/>
+          </a:solidFill>
+          <a:ln w="12700">
+            <a:solidFill>
+              <a:srgbClr val="DC2626"/>
             </a:solidFill>
             <a:prstDash val="solid"/>
           </a:ln>
@@ -36470,13 +36836,13 @@
             <a:r>
               <a:rPr lang="en-US" sz="1100" b="1" dirty="0">
                 <a:solidFill>
-                  <a:srgbClr val="16A34A"/>
+                  <a:srgbClr val="DC2626"/>
                 </a:solidFill>
                 <a:latin typeface="Trebuchet MS" pitchFamily="34" charset="0"/>
                 <a:ea typeface="Trebuchet MS" pitchFamily="34" charset="-122"/>
                 <a:cs typeface="Trebuchet MS" pitchFamily="34" charset="-120"/>
               </a:rPr>
-              <a:t>TRUE</a:t>
+              <a:t>FALSE</a:t>
             </a:r>
             <a:endParaRPr lang="en-US" sz="1100" dirty="0"/>
           </a:p>
@@ -36549,7 +36915,7 @@
                 <a:ea typeface="Calibri" pitchFamily="34" charset="-122"/>
                 <a:cs typeface="Calibri" pitchFamily="34" charset="-120"/>
               </a:rPr>
-              <a:t>2.  The word 'distract' means to pull your attention towards something helpful.</a:t>
+              <a:t>2.  The word 'subtract' has nothing to do with the root 'tract'.</a:t>
             </a:r>
             <a:endParaRPr lang="en-US" sz="1300" dirty="0"/>
           </a:p>
@@ -36688,7 +37054,7 @@
                 <a:ea typeface="Calibri" pitchFamily="34" charset="-122"/>
                 <a:cs typeface="Calibri" pitchFamily="34" charset="-120"/>
               </a:rPr>
-              <a:t>3.  A tractor is named after this root because it pulls heavy loads.</a:t>
+              <a:t>3.  A tractor is named 'tractor' because it pulls farm equipment.</a:t>
             </a:r>
             <a:endParaRPr lang="en-US" sz="1300" dirty="0"/>
           </a:p>
@@ -36827,7 +37193,7 @@
                 <a:ea typeface="Calibri" pitchFamily="34" charset="-122"/>
                 <a:cs typeface="Calibri" pitchFamily="34" charset="-120"/>
               </a:rPr>
-              <a:t>4.  The word 'subtract' contains the root 'tract' meaning to pull.</a:t>
+              <a:t>4.  The root 'tract' can be found in the word 'distract'.</a:t>
             </a:r>
             <a:endParaRPr lang="en-US" sz="1300" dirty="0"/>
           </a:p>
@@ -36966,7 +37332,7 @@
                 <a:ea typeface="Calibri" pitchFamily="34" charset="-122"/>
                 <a:cs typeface="Calibri" pitchFamily="34" charset="-120"/>
               </a:rPr>
-              <a:t>5.  The root 'tract' comes from a Greek word meaning to push.</a:t>
+              <a:t>5.  The root 'tract' comes from a Latin word meaning to pull or drag.</a:t>
             </a:r>
             <a:endParaRPr lang="en-US" sz="1300" dirty="0"/>
           </a:p>
@@ -36989,11 +37355,11 @@
             </a:avLst>
           </a:prstGeom>
           <a:solidFill>
-            <a:srgbClr val="FEE2E2"/>
-          </a:solidFill>
-          <a:ln w="12700">
-            <a:solidFill>
-              <a:srgbClr val="DC2626"/>
+            <a:srgbClr val="DCFCE7"/>
+          </a:solidFill>
+          <a:ln w="12700">
+            <a:solidFill>
+              <a:srgbClr val="16A34A"/>
             </a:solidFill>
             <a:prstDash val="solid"/>
           </a:ln>
@@ -37026,13 +37392,13 @@
             <a:r>
               <a:rPr lang="en-US" sz="1100" b="1" dirty="0">
                 <a:solidFill>
-                  <a:srgbClr val="DC2626"/>
+                  <a:srgbClr val="16A34A"/>
                 </a:solidFill>
                 <a:latin typeface="Trebuchet MS" pitchFamily="34" charset="0"/>
                 <a:ea typeface="Trebuchet MS" pitchFamily="34" charset="-122"/>
                 <a:cs typeface="Trebuchet MS" pitchFamily="34" charset="-120"/>
               </a:rPr>
-              <a:t>FALSE</a:t>
+              <a:t>TRUE</a:t>
             </a:r>
             <a:endParaRPr lang="en-US" sz="1100" dirty="0"/>
           </a:p>
@@ -37324,7 +37690,7 @@
                 <a:ea typeface="Calibri" pitchFamily="34" charset="-122"/>
                 <a:cs typeface="Calibri" pitchFamily="34" charset="-120"/>
               </a:rPr>
-              <a:t>Word Labs  •  wordlabs.app  •  Root: 'tract' = to pull or drag</a:t>
+              <a:t>Word Labs  •  wordlabs.app  •  Root: 'tract' = pull, drag, draw</a:t>
             </a:r>
             <a:endParaRPr lang="en-US" sz="800" dirty="0"/>
           </a:p>
@@ -37461,7 +37827,7 @@
                 <a:ea typeface="Trebuchet MS" pitchFamily="34" charset="-122"/>
                 <a:cs typeface="Trebuchet MS" pitchFamily="34" charset="-120"/>
               </a:rPr>
-              <a:t>to pull or drag</a:t>
+              <a:t>pull, drag, draw</a:t>
             </a:r>
             <a:endParaRPr lang="en-US" sz="2000" dirty="0"/>
           </a:p>
@@ -37605,7 +37971,7 @@
                 <a:ea typeface="Trebuchet MS" pitchFamily="34" charset="-122"/>
                 <a:cs typeface="Trebuchet MS" pitchFamily="34" charset="-120"/>
               </a:rPr>
-              <a:t>attract</a:t>
+              <a:t>tractor</a:t>
             </a:r>
             <a:endParaRPr lang="en-US" sz="1300" dirty="0"/>
           </a:p>
@@ -37671,7 +38037,7 @@
                 <a:ea typeface="Trebuchet MS" pitchFamily="34" charset="-122"/>
                 <a:cs typeface="Trebuchet MS" pitchFamily="34" charset="-120"/>
               </a:rPr>
-              <a:t>contract</a:t>
+              <a:t>extract</a:t>
             </a:r>
             <a:endParaRPr lang="en-US" sz="1300" dirty="0"/>
           </a:p>
@@ -37737,7 +38103,7 @@
                 <a:ea typeface="Trebuchet MS" pitchFamily="34" charset="-122"/>
                 <a:cs typeface="Trebuchet MS" pitchFamily="34" charset="-120"/>
               </a:rPr>
-              <a:t>detract</a:t>
+              <a:t>contract</a:t>
             </a:r>
             <a:endParaRPr lang="en-US" sz="1300" dirty="0"/>
           </a:p>
@@ -37803,7 +38169,7 @@
                 <a:ea typeface="Trebuchet MS" pitchFamily="34" charset="-122"/>
                 <a:cs typeface="Trebuchet MS" pitchFamily="34" charset="-120"/>
               </a:rPr>
-              <a:t>distract</a:t>
+              <a:t>subtract</a:t>
             </a:r>
             <a:endParaRPr lang="en-US" sz="1300" dirty="0"/>
           </a:p>
@@ -37869,7 +38235,7 @@
                 <a:ea typeface="Trebuchet MS" pitchFamily="34" charset="-122"/>
                 <a:cs typeface="Trebuchet MS" pitchFamily="34" charset="-120"/>
               </a:rPr>
-              <a:t>extract</a:t>
+              <a:t>distract</a:t>
             </a:r>
             <a:endParaRPr lang="en-US" sz="1300" dirty="0"/>
           </a:p>
@@ -37935,7 +38301,7 @@
                 <a:ea typeface="Trebuchet MS" pitchFamily="34" charset="-122"/>
                 <a:cs typeface="Trebuchet MS" pitchFamily="34" charset="-120"/>
               </a:rPr>
-              <a:t>subtract</a:t>
+              <a:t>retract</a:t>
             </a:r>
             <a:endParaRPr lang="en-US" sz="1300" dirty="0"/>
           </a:p>
@@ -38001,7 +38367,7 @@
                 <a:ea typeface="Trebuchet MS" pitchFamily="34" charset="-122"/>
                 <a:cs typeface="Trebuchet MS" pitchFamily="34" charset="-120"/>
               </a:rPr>
-              <a:t>tractor</a:t>
+              <a:t>attract</a:t>
             </a:r>
             <a:endParaRPr lang="en-US" sz="1300" dirty="0"/>
           </a:p>
@@ -38293,7 +38659,7 @@
                 <a:ea typeface="Calibri" pitchFamily="34" charset="-122"/>
                 <a:cs typeface="Calibri" pitchFamily="34" charset="-120"/>
               </a:rPr>
-              <a:t>Word Labs  •  wordlabs.app  •  Root: 'tract' = to pull or drag</a:t>
+              <a:t>Word Labs  •  wordlabs.app  •  Root: 'tract' = pull, drag, draw</a:t>
             </a:r>
             <a:endParaRPr lang="en-US" sz="800" dirty="0"/>
           </a:p>
@@ -38594,7 +38960,7 @@
                 <a:ea typeface="Trebuchet MS" pitchFamily="34" charset="-122"/>
                 <a:cs typeface="Trebuchet MS" pitchFamily="34" charset="-120"/>
               </a:rPr>
-              <a:t>at-</a:t>
+              <a:t>re-</a:t>
             </a:r>
             <a:endParaRPr lang="en-US" sz="1300" dirty="0"/>
           </a:p>
@@ -38722,7 +39088,7 @@
                 <a:ea typeface="Trebuchet MS" pitchFamily="34" charset="-122"/>
                 <a:cs typeface="Trebuchet MS" pitchFamily="34" charset="-120"/>
               </a:rPr>
-              <a:t>-ed</a:t>
+              <a:t>-ion</a:t>
             </a:r>
             <a:endParaRPr lang="en-US" sz="1300" dirty="0"/>
           </a:p>
@@ -38786,7 +39152,7 @@
                 <a:ea typeface="Trebuchet MS" pitchFamily="34" charset="-122"/>
                 <a:cs typeface="Trebuchet MS" pitchFamily="34" charset="-120"/>
               </a:rPr>
-              <a:t>con-</a:t>
+              <a:t>ex-</a:t>
             </a:r>
             <a:endParaRPr lang="en-US" sz="1300" dirty="0"/>
           </a:p>
@@ -38875,7 +39241,7 @@
                 <a:ea typeface="Trebuchet MS" pitchFamily="34" charset="-122"/>
                 <a:cs typeface="Trebuchet MS" pitchFamily="34" charset="-120"/>
               </a:rPr>
-              <a:t>-ing</a:t>
+              <a:t>-or</a:t>
             </a:r>
             <a:endParaRPr lang="en-US" sz="1300" dirty="0"/>
           </a:p>
@@ -38939,7 +39305,7 @@
                 <a:ea typeface="Trebuchet MS" pitchFamily="34" charset="-122"/>
                 <a:cs typeface="Trebuchet MS" pitchFamily="34" charset="-120"/>
               </a:rPr>
-              <a:t>de-</a:t>
+              <a:t>con-</a:t>
             </a:r>
             <a:endParaRPr lang="en-US" sz="1300" dirty="0"/>
           </a:p>
@@ -39028,7 +39394,7 @@
                 <a:ea typeface="Trebuchet MS" pitchFamily="34" charset="-122"/>
                 <a:cs typeface="Trebuchet MS" pitchFamily="34" charset="-120"/>
               </a:rPr>
-              <a:t>-ion</a:t>
+              <a:t>-ed</a:t>
             </a:r>
             <a:endParaRPr lang="en-US" sz="1300" dirty="0"/>
           </a:p>
@@ -39092,7 +39458,7 @@
                 <a:ea typeface="Trebuchet MS" pitchFamily="34" charset="-122"/>
                 <a:cs typeface="Trebuchet MS" pitchFamily="34" charset="-120"/>
               </a:rPr>
-              <a:t>dis-</a:t>
+              <a:t>de-</a:t>
             </a:r>
             <a:endParaRPr lang="en-US" sz="1300" dirty="0"/>
           </a:p>
@@ -39181,7 +39547,7 @@
                 <a:ea typeface="Trebuchet MS" pitchFamily="34" charset="-122"/>
                 <a:cs typeface="Trebuchet MS" pitchFamily="34" charset="-120"/>
               </a:rPr>
-              <a:t>-or</a:t>
+              <a:t>-ing</a:t>
             </a:r>
             <a:endParaRPr lang="en-US" sz="1300" dirty="0"/>
           </a:p>
@@ -39245,7 +39611,7 @@
                 <a:ea typeface="Trebuchet MS" pitchFamily="34" charset="-122"/>
                 <a:cs typeface="Trebuchet MS" pitchFamily="34" charset="-120"/>
               </a:rPr>
-              <a:t>ex-</a:t>
+              <a:t>sub-</a:t>
             </a:r>
             <a:endParaRPr lang="en-US" sz="1300" dirty="0"/>
           </a:p>
@@ -39342,127 +39708,13 @@
       </p:sp>
       <p:sp>
         <p:nvSpPr>
-          <p:cNvPr id="43" name="Shape 41"/>
-          <p:cNvSpPr/>
-          <p:nvPr/>
-        </p:nvSpPr>
-        <p:spPr>
-          <a:xfrm>
-            <a:off x="640080" y="4041648"/>
-            <a:ext cx="1463040" cy="420624"/>
-          </a:xfrm>
-          <a:prstGeom prst="rect">
-            <a:avLst/>
-          </a:prstGeom>
-          <a:solidFill>
-            <a:srgbClr val="DDD6FE"/>
-          </a:solidFill>
-          <a:ln w="12700">
-            <a:solidFill>
-              <a:srgbClr val="E5E7EB"/>
-            </a:solidFill>
-            <a:prstDash val="solid"/>
-          </a:ln>
-        </p:spPr>
-      </p:sp>
-      <p:sp>
-        <p:nvSpPr>
-          <p:cNvPr id="44" name="Text 42"/>
-          <p:cNvSpPr/>
-          <p:nvPr/>
-        </p:nvSpPr>
-        <p:spPr>
-          <a:xfrm>
-            <a:off x="640080" y="4041648"/>
-            <a:ext cx="1463040" cy="420624"/>
-          </a:xfrm>
-          <a:prstGeom prst="rect">
-            <a:avLst/>
-          </a:prstGeom>
-          <a:noFill/>
-          <a:ln/>
-        </p:spPr>
-        <p:txBody>
-          <a:bodyPr wrap="square" lIns="0" tIns="0" rIns="0" bIns="0" rtlCol="0" anchor="ctr"/>
-          <a:lstStyle/>
-          <a:p>
-            <a:pPr algn="ctr" indent="0" marL="0">
-              <a:buNone/>
-            </a:pPr>
-            <a:r>
-              <a:rPr lang="en-US" sz="1300" b="1" dirty="0">
-                <a:solidFill>
-                  <a:srgbClr val="4C1D95"/>
-                </a:solidFill>
-                <a:latin typeface="Trebuchet MS" pitchFamily="34" charset="0"/>
-                <a:ea typeface="Trebuchet MS" pitchFamily="34" charset="-122"/>
-                <a:cs typeface="Trebuchet MS" pitchFamily="34" charset="-120"/>
-              </a:rPr>
-              <a:t>sub-</a:t>
-            </a:r>
-            <a:endParaRPr lang="en-US" sz="1300" dirty="0"/>
-          </a:p>
-        </p:txBody>
-      </p:sp>
-      <p:sp>
-        <p:nvSpPr>
-          <p:cNvPr id="45" name="Shape 43"/>
-          <p:cNvSpPr/>
-          <p:nvPr/>
-        </p:nvSpPr>
-        <p:spPr>
-          <a:xfrm>
-            <a:off x="3291840" y="4041648"/>
-            <a:ext cx="1645920" cy="420624"/>
-          </a:xfrm>
-          <a:prstGeom prst="rect">
-            <a:avLst/>
-          </a:prstGeom>
-          <a:solidFill>
-            <a:srgbClr val="F1F5F9"/>
-          </a:solidFill>
-          <a:ln w="12700">
-            <a:solidFill>
-              <a:srgbClr val="E5E7EB"/>
-            </a:solidFill>
-            <a:prstDash val="solid"/>
-          </a:ln>
-        </p:spPr>
-      </p:sp>
-      <p:sp>
-        <p:nvSpPr>
-          <p:cNvPr id="46" name="Shape 44"/>
-          <p:cNvSpPr/>
-          <p:nvPr/>
-        </p:nvSpPr>
-        <p:spPr>
-          <a:xfrm>
-            <a:off x="5943600" y="4041648"/>
-            <a:ext cx="1463040" cy="420624"/>
-          </a:xfrm>
-          <a:prstGeom prst="rect">
-            <a:avLst/>
-          </a:prstGeom>
-          <a:solidFill>
-            <a:srgbClr val="F1F5F9"/>
-          </a:solidFill>
-          <a:ln w="12700">
-            <a:solidFill>
-              <a:srgbClr val="E5E7EB"/>
-            </a:solidFill>
-            <a:prstDash val="solid"/>
-          </a:ln>
-        </p:spPr>
-      </p:sp>
-      <p:sp>
-        <p:nvSpPr>
-          <p:cNvPr id="47" name="Text 45"/>
-          <p:cNvSpPr/>
-          <p:nvPr/>
-        </p:nvSpPr>
-        <p:spPr>
-          <a:xfrm>
-            <a:off x="365760" y="4636008"/>
+          <p:cNvPr id="43" name="Text 41"/>
+          <p:cNvSpPr/>
+          <p:nvPr/>
+        </p:nvSpPr>
+        <p:spPr>
+          <a:xfrm>
+            <a:off x="365760" y="4178808"/>
             <a:ext cx="1097280" cy="420624"/>
           </a:xfrm>
           <a:prstGeom prst="rect">
@@ -39495,13 +39747,13 @@
       </p:sp>
       <p:sp>
         <p:nvSpPr>
-          <p:cNvPr id="48" name="Shape 46"/>
-          <p:cNvSpPr/>
-          <p:nvPr/>
-        </p:nvSpPr>
-        <p:spPr>
-          <a:xfrm>
-            <a:off x="1508760" y="4636008"/>
+          <p:cNvPr id="44" name="Shape 42"/>
+          <p:cNvSpPr/>
+          <p:nvPr/>
+        </p:nvSpPr>
+        <p:spPr>
+          <a:xfrm>
+            <a:off x="1508760" y="4178808"/>
             <a:ext cx="822960" cy="420624"/>
           </a:xfrm>
           <a:prstGeom prst="rect">
@@ -39529,13 +39781,13 @@
       </p:sp>
       <p:sp>
         <p:nvSpPr>
-          <p:cNvPr id="49" name="Text 47"/>
-          <p:cNvSpPr/>
-          <p:nvPr/>
-        </p:nvSpPr>
-        <p:spPr>
-          <a:xfrm>
-            <a:off x="1508760" y="4636008"/>
+          <p:cNvPr id="45" name="Text 43"/>
+          <p:cNvSpPr/>
+          <p:nvPr/>
+        </p:nvSpPr>
+        <p:spPr>
+          <a:xfrm>
+            <a:off x="1508760" y="4178808"/>
             <a:ext cx="822960" cy="420624"/>
           </a:xfrm>
           <a:prstGeom prst="rect">
@@ -39560,7 +39812,7 @@
                 <a:ea typeface="Trebuchet MS" pitchFamily="34" charset="-122"/>
                 <a:cs typeface="Trebuchet MS" pitchFamily="34" charset="-120"/>
               </a:rPr>
-              <a:t>at-</a:t>
+              <a:t>re-</a:t>
             </a:r>
             <a:endParaRPr lang="en-US" sz="1300" dirty="0"/>
           </a:p>
@@ -39568,13 +39820,13 @@
       </p:sp>
       <p:sp>
         <p:nvSpPr>
-          <p:cNvPr id="50" name="Text 48"/>
-          <p:cNvSpPr/>
-          <p:nvPr/>
-        </p:nvSpPr>
-        <p:spPr>
-          <a:xfrm>
-            <a:off x="2359152" y="4636008"/>
+          <p:cNvPr id="46" name="Text 44"/>
+          <p:cNvSpPr/>
+          <p:nvPr/>
+        </p:nvSpPr>
+        <p:spPr>
+          <a:xfrm>
+            <a:off x="2359152" y="4178808"/>
             <a:ext cx="320040" cy="420624"/>
           </a:xfrm>
           <a:prstGeom prst="rect">
@@ -39607,13 +39859,13 @@
       </p:sp>
       <p:sp>
         <p:nvSpPr>
-          <p:cNvPr id="51" name="Shape 49"/>
-          <p:cNvSpPr/>
-          <p:nvPr/>
-        </p:nvSpPr>
-        <p:spPr>
-          <a:xfrm>
-            <a:off x="2706624" y="4636008"/>
+          <p:cNvPr id="47" name="Shape 45"/>
+          <p:cNvSpPr/>
+          <p:nvPr/>
+        </p:nvSpPr>
+        <p:spPr>
+          <a:xfrm>
+            <a:off x="2706624" y="4178808"/>
             <a:ext cx="1389888" cy="420624"/>
           </a:xfrm>
           <a:prstGeom prst="rect">
@@ -39641,13 +39893,13 @@
       </p:sp>
       <p:sp>
         <p:nvSpPr>
-          <p:cNvPr id="52" name="Text 50"/>
-          <p:cNvSpPr/>
-          <p:nvPr/>
-        </p:nvSpPr>
-        <p:spPr>
-          <a:xfrm>
-            <a:off x="2706624" y="4636008"/>
+          <p:cNvPr id="48" name="Text 46"/>
+          <p:cNvSpPr/>
+          <p:nvPr/>
+        </p:nvSpPr>
+        <p:spPr>
+          <a:xfrm>
+            <a:off x="2706624" y="4178808"/>
             <a:ext cx="1389888" cy="420624"/>
           </a:xfrm>
           <a:prstGeom prst="rect">
@@ -39680,13 +39932,13 @@
       </p:sp>
       <p:sp>
         <p:nvSpPr>
-          <p:cNvPr id="53" name="Text 51"/>
-          <p:cNvSpPr/>
-          <p:nvPr/>
-        </p:nvSpPr>
-        <p:spPr>
-          <a:xfrm>
-            <a:off x="4123944" y="4636008"/>
+          <p:cNvPr id="49" name="Text 47"/>
+          <p:cNvSpPr/>
+          <p:nvPr/>
+        </p:nvSpPr>
+        <p:spPr>
+          <a:xfrm>
+            <a:off x="4123944" y="4178808"/>
             <a:ext cx="320040" cy="420624"/>
           </a:xfrm>
           <a:prstGeom prst="rect">
@@ -39719,14 +39971,14 @@
       </p:sp>
       <p:sp>
         <p:nvSpPr>
-          <p:cNvPr id="54" name="Shape 52"/>
-          <p:cNvSpPr/>
-          <p:nvPr/>
-        </p:nvSpPr>
-        <p:spPr>
-          <a:xfrm>
-            <a:off x="4471416" y="4636008"/>
-            <a:ext cx="822960" cy="420624"/>
+          <p:cNvPr id="50" name="Shape 48"/>
+          <p:cNvSpPr/>
+          <p:nvPr/>
+        </p:nvSpPr>
+        <p:spPr>
+          <a:xfrm>
+            <a:off x="4471416" y="4178808"/>
+            <a:ext cx="950976" cy="420624"/>
           </a:xfrm>
           <a:prstGeom prst="rect">
             <a:avLst>
@@ -39753,14 +40005,14 @@
       </p:sp>
       <p:sp>
         <p:nvSpPr>
-          <p:cNvPr id="55" name="Text 53"/>
-          <p:cNvSpPr/>
-          <p:nvPr/>
-        </p:nvSpPr>
-        <p:spPr>
-          <a:xfrm>
-            <a:off x="4471416" y="4636008"/>
-            <a:ext cx="822960" cy="420624"/>
+          <p:cNvPr id="51" name="Text 49"/>
+          <p:cNvSpPr/>
+          <p:nvPr/>
+        </p:nvSpPr>
+        <p:spPr>
+          <a:xfrm>
+            <a:off x="4471416" y="4178808"/>
+            <a:ext cx="950976" cy="420624"/>
           </a:xfrm>
           <a:prstGeom prst="rect">
             <a:avLst/>
@@ -39784,7 +40036,7 @@
                 <a:ea typeface="Trebuchet MS" pitchFamily="34" charset="-122"/>
                 <a:cs typeface="Trebuchet MS" pitchFamily="34" charset="-120"/>
               </a:rPr>
-              <a:t>-ed</a:t>
+              <a:t>-ion</a:t>
             </a:r>
             <a:endParaRPr lang="en-US" sz="1300" dirty="0"/>
           </a:p>
@@ -39792,13 +40044,13 @@
       </p:sp>
       <p:sp>
         <p:nvSpPr>
-          <p:cNvPr id="56" name="Text 54"/>
-          <p:cNvSpPr/>
-          <p:nvPr/>
-        </p:nvSpPr>
-        <p:spPr>
-          <a:xfrm>
-            <a:off x="5367528" y="4636008"/>
+          <p:cNvPr id="52" name="Text 50"/>
+          <p:cNvSpPr/>
+          <p:nvPr/>
+        </p:nvSpPr>
+        <p:spPr>
+          <a:xfrm>
+            <a:off x="5495544" y="4178808"/>
             <a:ext cx="365760" cy="420624"/>
           </a:xfrm>
           <a:prstGeom prst="rect">
@@ -39831,13 +40083,13 @@
       </p:sp>
       <p:sp>
         <p:nvSpPr>
-          <p:cNvPr id="57" name="Shape 55"/>
-          <p:cNvSpPr/>
-          <p:nvPr/>
-        </p:nvSpPr>
-        <p:spPr>
-          <a:xfrm>
-            <a:off x="5779008" y="4636008"/>
+          <p:cNvPr id="53" name="Shape 51"/>
+          <p:cNvSpPr/>
+          <p:nvPr/>
+        </p:nvSpPr>
+        <p:spPr>
+          <a:xfrm>
+            <a:off x="5907024" y="4178808"/>
             <a:ext cx="2194560" cy="420624"/>
           </a:xfrm>
           <a:prstGeom prst="rect">
@@ -39858,13 +40110,13 @@
       </p:sp>
       <p:sp>
         <p:nvSpPr>
-          <p:cNvPr id="58" name="Text 56"/>
-          <p:cNvSpPr/>
-          <p:nvPr/>
-        </p:nvSpPr>
-        <p:spPr>
-          <a:xfrm>
-            <a:off x="5779008" y="4636008"/>
+          <p:cNvPr id="54" name="Text 52"/>
+          <p:cNvSpPr/>
+          <p:nvPr/>
+        </p:nvSpPr>
+        <p:spPr>
+          <a:xfrm>
+            <a:off x="5907024" y="4178808"/>
             <a:ext cx="2194560" cy="420624"/>
           </a:xfrm>
           <a:prstGeom prst="rect">
@@ -39889,7 +40141,7 @@
                 <a:ea typeface="Trebuchet MS" pitchFamily="34" charset="-122"/>
                 <a:cs typeface="Trebuchet MS" pitchFamily="34" charset="-120"/>
               </a:rPr>
-              <a:t>attract</a:t>
+              <a:t>tractor</a:t>
             </a:r>
             <a:endParaRPr lang="en-US" sz="1400" dirty="0"/>
           </a:p>
@@ -40181,7 +40433,7 @@
                 <a:ea typeface="Calibri" pitchFamily="34" charset="-122"/>
                 <a:cs typeface="Calibri" pitchFamily="34" charset="-120"/>
               </a:rPr>
-              <a:t>Word Labs  •  wordlabs.app  •  Root: 'tract' = to pull or drag</a:t>
+              <a:t>Word Labs  •  wordlabs.app  •  Root: 'tract' = pull, drag, draw</a:t>
             </a:r>
             <a:endParaRPr lang="en-US" sz="800" dirty="0"/>
           </a:p>
@@ -40293,7 +40545,7 @@
                 <a:ea typeface="Trebuchet MS" pitchFamily="34" charset="-122"/>
                 <a:cs typeface="Trebuchet MS" pitchFamily="34" charset="-120"/>
               </a:rPr>
-              <a:t>attract</a:t>
+              <a:t>tractor</a:t>
             </a:r>
             <a:endParaRPr lang="en-US" sz="1200" dirty="0"/>
           </a:p>
@@ -40359,7 +40611,7 @@
                 <a:ea typeface="Calibri" pitchFamily="34" charset="-122"/>
                 <a:cs typeface="Calibri" pitchFamily="34" charset="-120"/>
               </a:rPr>
-              <a:t>To pull something or someone towards you, like a magnet attracts metal.</a:t>
+              <a:t>A large, powerful vehicle used on farms to pull heavy equipment across fields.</a:t>
             </a:r>
             <a:endParaRPr lang="en-US" sz="1200" dirty="0"/>
           </a:p>
@@ -40432,7 +40684,7 @@
                 <a:ea typeface="Trebuchet MS" pitchFamily="34" charset="-122"/>
                 <a:cs typeface="Trebuchet MS" pitchFamily="34" charset="-120"/>
               </a:rPr>
-              <a:t>contract</a:t>
+              <a:t>extract</a:t>
             </a:r>
             <a:endParaRPr lang="en-US" sz="1200" dirty="0"/>
           </a:p>
@@ -40498,7 +40750,7 @@
                 <a:ea typeface="Calibri" pitchFamily="34" charset="-122"/>
                 <a:cs typeface="Calibri" pitchFamily="34" charset="-120"/>
               </a:rPr>
-              <a:t>To pull away from the value or importance of something.</a:t>
+              <a:t>A written agreement between people, or when muscles pull tight and get shorter.</a:t>
             </a:r>
             <a:endParaRPr lang="en-US" sz="1200" dirty="0"/>
           </a:p>
@@ -40571,7 +40823,7 @@
                 <a:ea typeface="Trebuchet MS" pitchFamily="34" charset="-122"/>
                 <a:cs typeface="Trebuchet MS" pitchFamily="34" charset="-120"/>
               </a:rPr>
-              <a:t>detract</a:t>
+              <a:t>contract</a:t>
             </a:r>
             <a:endParaRPr lang="en-US" sz="1200" dirty="0"/>
           </a:p>
@@ -40637,7 +40889,7 @@
                 <a:ea typeface="Calibri" pitchFamily="34" charset="-122"/>
                 <a:cs typeface="Calibri" pitchFamily="34" charset="-120"/>
               </a:rPr>
-              <a:t>To pull a number away from another number to make it smaller.</a:t>
+              <a:t>To pull something back in, like a cat pulling its claws back inside its paws.</a:t>
             </a:r>
             <a:endParaRPr lang="en-US" sz="1200" dirty="0"/>
           </a:p>
@@ -40710,7 +40962,7 @@
                 <a:ea typeface="Trebuchet MS" pitchFamily="34" charset="-122"/>
                 <a:cs typeface="Trebuchet MS" pitchFamily="34" charset="-120"/>
               </a:rPr>
-              <a:t>distract</a:t>
+              <a:t>subtract</a:t>
             </a:r>
             <a:endParaRPr lang="en-US" sz="1200" dirty="0"/>
           </a:p>
@@ -40776,7 +41028,7 @@
                 <a:ea typeface="Calibri" pitchFamily="34" charset="-122"/>
                 <a:cs typeface="Calibri" pitchFamily="34" charset="-120"/>
               </a:rPr>
-              <a:t>To pull someone's attention away from what they are doing.</a:t>
+              <a:t>To take away a number from another number in maths.</a:t>
             </a:r>
             <a:endParaRPr lang="en-US" sz="1200" dirty="0"/>
           </a:p>
@@ -40849,7 +41101,7 @@
                 <a:ea typeface="Trebuchet MS" pitchFamily="34" charset="-122"/>
                 <a:cs typeface="Trebuchet MS" pitchFamily="34" charset="-120"/>
               </a:rPr>
-              <a:t>extract</a:t>
+              <a:t>distract</a:t>
             </a:r>
             <a:endParaRPr lang="en-US" sz="1200" dirty="0"/>
           </a:p>
@@ -40915,7 +41167,7 @@
                 <a:ea typeface="Calibri" pitchFamily="34" charset="-122"/>
                 <a:cs typeface="Calibri" pitchFamily="34" charset="-120"/>
               </a:rPr>
-              <a:t>To pull something out from where it is, like pulling a tooth or juice from a fruit.</a:t>
+              <a:t>To pull someone's attention away from what they are doing.</a:t>
             </a:r>
             <a:endParaRPr lang="en-US" sz="1200" dirty="0"/>
           </a:p>
@@ -40988,7 +41240,7 @@
                 <a:ea typeface="Trebuchet MS" pitchFamily="34" charset="-122"/>
                 <a:cs typeface="Trebuchet MS" pitchFamily="34" charset="-120"/>
               </a:rPr>
-              <a:t>subtract</a:t>
+              <a:t>retract</a:t>
             </a:r>
             <a:endParaRPr lang="en-US" sz="1200" dirty="0"/>
           </a:p>
@@ -41054,7 +41306,7 @@
                 <a:ea typeface="Calibri" pitchFamily="34" charset="-122"/>
                 <a:cs typeface="Calibri" pitchFamily="34" charset="-120"/>
               </a:rPr>
-              <a:t>A powerful farm vehicle that pulls heavy loads or machinery across fields.</a:t>
+              <a:t>To pull something or someone closer, like a magnet drawing metal objects towards it.</a:t>
             </a:r>
             <a:endParaRPr lang="en-US" sz="1200" dirty="0"/>
           </a:p>
@@ -41127,7 +41379,7 @@
                 <a:ea typeface="Trebuchet MS" pitchFamily="34" charset="-122"/>
                 <a:cs typeface="Trebuchet MS" pitchFamily="34" charset="-120"/>
               </a:rPr>
-              <a:t>tractor</a:t>
+              <a:t>attract</a:t>
             </a:r>
             <a:endParaRPr lang="en-US" sz="1200" dirty="0"/>
           </a:p>
@@ -41193,7 +41445,7 @@
                 <a:ea typeface="Calibri" pitchFamily="34" charset="-122"/>
                 <a:cs typeface="Calibri" pitchFamily="34" charset="-120"/>
               </a:rPr>
-              <a:t>An agreement written down that pulls two people or groups together with rules.</a:t>
+              <a:t>To pull or take something out from somewhere, like pulling a tooth or getting juice from fruit.</a:t>
             </a:r>
             <a:endParaRPr lang="en-US" sz="1200" dirty="0"/>
           </a:p>
@@ -41485,7 +41737,7 @@
                 <a:ea typeface="Calibri" pitchFamily="34" charset="-122"/>
                 <a:cs typeface="Calibri" pitchFamily="34" charset="-120"/>
               </a:rPr>
-              <a:t>Word Labs  •  wordlabs.app  •  Root: 'tract' = to pull or drag</a:t>
+              <a:t>Word Labs  •  wordlabs.app  •  Root: 'tract' = pull, drag, draw</a:t>
             </a:r>
             <a:endParaRPr lang="en-US" sz="800" dirty="0"/>
           </a:p>
@@ -41688,7 +41940,7 @@
                 <a:ea typeface="Calibri" pitchFamily="34" charset="-122"/>
                 <a:cs typeface="Calibri" pitchFamily="34" charset="-120"/>
               </a:rPr>
-              <a:t>The bright colours on the poster were designed to attract students to the science fair.</a:t>
+              <a:t>The farmer used a tractor to pull the heavy plough across the muddy paddock.</a:t>
             </a:r>
             <a:endParaRPr lang="en-US" sz="1500" dirty="0"/>
           </a:p>
@@ -41852,7 +42104,7 @@
                 <a:ea typeface="Calibri" pitchFamily="34" charset="-122"/>
                 <a:cs typeface="Calibri" pitchFamily="34" charset="-120"/>
               </a:rPr>
-              <a:t>When you subtract nine from fifteen, you get six.</a:t>
+              <a:t>It is hard to concentrate on your work when loud noises distract you.</a:t>
             </a:r>
             <a:endParaRPr lang="en-US" sz="1500" dirty="0"/>
           </a:p>
@@ -42016,7 +42268,7 @@
                 <a:ea typeface="Calibri" pitchFamily="34" charset="-122"/>
                 <a:cs typeface="Calibri" pitchFamily="34" charset="-120"/>
               </a:rPr>
-              <a:t>The loud noise outside began to distract the students from their reading.</a:t>
+              <a:t>The dentist had to extract the tooth carefully because it was badly decayed.</a:t>
             </a:r>
             <a:endParaRPr lang="en-US" sz="1500" dirty="0"/>
           </a:p>
